--- a/examples/pptx/immersion-3-3-hardening-and-handoff.pptx
+++ b/examples/pptx/immersion-3-3-hardening-and-handoff.pptx
@@ -553,7 +553,7 @@
           <a:lstStyle/>
           <a:p>
             <a:r>
-              <a:t>The last session of the week. They are holding a log of their own failures written by people with no reason to be gentle. This hour turns that into a better prototype and something that keeps testing itself.</a:t>
+              <a:t>This is session 3.3, Hardening and Handoff — the last session of the week. You are holding a log of your own failures, written by people with no reason to be gentle.</a:t>
             </a:r>
           </a:p>
         </p:txBody>
@@ -623,7 +623,7 @@
           <a:lstStyle/>
           <a:p>
             <a:r>
-              <a:t>Borrowed from medicine, and the borrowing is exact. Triage is not ranking by severity — it is ranking by where your limited effort does the most good, which is a different order.</a:t>
+              <a:t>Triage means sorting by what to do, not by what is worst. It is ranking by where your limited effort does the most good, which is a different order.</a:t>
             </a:r>
           </a:p>
         </p:txBody>
@@ -693,7 +693,7 @@
           <a:lstStyle/>
           <a:p>
             <a:r>
-              <a:t>Four steps first. The second usually shrinks a twenty-entry log to eight real problems, and doing it before ranking stops the same bug being fixed three times.</a:t>
+              <a:t>Four steps before ranking anything. Read the whole log. Merge findings that share one cause. Reproduce anything unclear. Then start ranking.</a:t>
             </a:r>
           </a:p>
         </p:txBody>
@@ -763,7 +763,7 @@
           <a:lstStyle/>
           <a:p>
             <a:r>
-              <a:t>Two questions per finding, thirty seconds each. Resist adding a third axis — elegance, interest, whose fault it was. Every extra axis is a way of arriving at the answer you already wanted.</a:t>
+              <a:t>Two questions per finding, thirty seconds each. Severity: how bad is it if a judge hits it? Cost: how long to fix, honestly? Resist adding a third axis.</a:t>
             </a:r>
           </a:p>
         </p:txBody>
@@ -833,7 +833,7 @@
           <a:lstStyle/>
           <a:p>
             <a:r>
-              <a:t>The grid that does the work. Note the top-right cell: a critical failure gets fixed even when it is expensive, because severity beats cost at the top. Everything else trades.</a:t>
+              <a:t>Here is the grid. A critical finding is fixed now whether it is cheap or costly — severity beats cost at the top. A high one is fixed if cheap and debated if costly. A low one is maybe if cheap and never if costly.</a:t>
             </a:r>
           </a:p>
         </p:txBody>
@@ -903,7 +903,7 @@
           <a:lstStyle/>
           <a:p>
             <a:r>
-              <a:t>Say the hard half out loud: below the line means not today, not tonight, not quietly during the demo. A line people cross privately is not a line.</a:t>
+              <a:t>The cut line is the point below which you fix nothing today. Not tonight, and not quietly during the demo.</a:t>
             </a:r>
           </a:p>
         </p:txBody>
@@ -973,7 +973,7 @@
           <a:lstStyle/>
           <a:p>
             <a:r>
-              <a:t>Step two is the honest one. Teams rank well and then plan to fix nine things in thirty minutes. Adding the estimates up is what forces the line to land somewhere real.</a:t>
+              <a:t>Three steps. Rank by the grid — fix now, decide, maybe, never. Add up the hours against the time you actually have. Then draw the line where the time runs out, and say the number out loud.</a:t>
             </a:r>
           </a:p>
         </p:txBody>
@@ -1043,7 +1043,7 @@
           <a:lstStyle/>
           <a:p>
             <a:r>
-              <a:t>Four non-negotiables regardless of cost. The first outranks the rest — a system that is wrong while looking right damages trust in a way a crash never does.</a:t>
+              <a:t>Four things stay above the line regardless of cost: confidently wrong output, anything that hangs forever, a crash on a normal input, and anything that leaks a secret.</a:t>
             </a:r>
           </a:p>
         </p:txBody>
@@ -1113,7 +1113,7 @@
           <a:lstStyle/>
           <a:p>
             <a:r>
-              <a:t>Four things to leave alone with a clear conscience. The last is why yesterday's caveat list pays off twice — a documented limit is a decision already made, not a bug rediscovered.</a:t>
+              <a:t>Four things you can leave alone with a clear conscience: it looks rough, it is slow but finishes, it fails on an absurd input, or it is already in your caveats.</a:t>
             </a:r>
           </a:p>
         </p:txBody>
@@ -1183,7 +1183,7 @@
           <a:lstStyle/>
           <a:p>
             <a:r>
-              <a:t>Four buckets, no finer. The fourth is the discipline — an unknown estimate is not a small one, and teams systematically guess low on things they have not looked at.</a:t>
+              <a:t>Four buckets, no finer. Under ten minutes: just do it. Under an hour: it needs the line. Over an hour: not today. Unknown: treat it as over an hour.</a:t>
             </a:r>
           </a:p>
         </p:txBody>
@@ -1253,7 +1253,7 @@
           <a:lstStyle/>
           <a:p>
             <a:r>
-              <a:t>Both teams run out of time; only one of them chose where. The third row is the one that decides how the demo goes, because an unfixed critical finding does not stay hidden.</a:t>
+              <a:t>Without a line you fix what is nearest, run out of time surprised, and the critical one survives. With a line you fix what matters most, run out of time on purpose, and know exactly what is left.</a:t>
             </a:r>
           </a:p>
         </p:txBody>
@@ -1323,7 +1323,7 @@
           <a:lstStyle/>
           <a:p>
             <a:r>
-              <a:t>The deliverable in one line: the failures above the cut line fixed, proven by re-running the exact tests that caught them, pushed, and a schedule of checks running after everyone goes home.</a:t>
+              <a:t>Fifty minutes, and you leave with the failures above the cut line fixed and proven, everything pushed, and a schedule of checks running after you go home.</a:t>
             </a:r>
           </a:p>
         </p:txBody>
@@ -1393,7 +1393,7 @@
           <a:lstStyle/>
           <a:p>
             <a:r>
-              <a:t>Four ways the twelve minutes disappear. The last two are the same instinct 3.2 asked them to suppress, arriving late. If a finding is disputed, rank it and move on.</a:t>
+              <a:t>Four ways the twelve minutes disappear: fixing the interesting one first, softening severity to feel better, arguing whether something counts, and re-litigating their findings.</a:t>
             </a:r>
           </a:p>
         </p:txBody>
@@ -1463,7 +1463,7 @@
           <a:lstStyle/>
           <a:p>
             <a:r>
-              <a:t>The third is where discipline breaks. A team that keeps sliding the line downward as they finish things ends up mid-fix at 11:50 with nothing pushed and nothing scheduled.</a:t>
+              <a:t>Three rules. Drawn against real time — sum the estimates rather than aspiring. Agreed out loud, so everyone hears where it landed. And held once drawn, because moving it later is how the hour is lost.</a:t>
             </a:r>
           </a:p>
         </p:txBody>
@@ -1533,7 +1533,7 @@
           <a:lstStyle/>
           <a:p>
             <a:r>
-              <a:t>Committed, not remembered. The lower list is the more valuable one — it goes straight into the demo caveats and answers the question a judge is about to ask.</a:t>
+              <a:t>Write it into the repo as TRIAGE.md — what is above the line, and what is below it on purpose. The lower list is the more valuable one, because it goes straight into your demo caveats.</a:t>
             </a:r>
           </a:p>
         </p:txBody>
@@ -1603,7 +1603,7 @@
           <a:lstStyle/>
           <a:p>
             <a:r>
-              <a:t>Second objective. Twenty-two minutes of fixing, and the syllabus is specific that each fix must be proven by re-running the exact test that caught it. That word exact is doing real work.</a:t>
+              <a:t>Second objective: twenty-two minutes of fixing, and every fix proven by re-running the exact test that caught it.</a:t>
             </a:r>
           </a:p>
         </p:txBody>
@@ -1673,7 +1673,7 @@
           <a:lstStyle/>
           <a:p>
             <a:r>
-              <a:t>Define it so it cannot drift. Not "I changed the code", not "it should be better" — the specific input from the log goes in and the right thing comes out, watched by a person.</a:t>
+              <a:t>Fixed means the test that caught it now passes. Not “I changed the code”, not “it should be better”.</a:t>
             </a:r>
           </a:p>
         </p:txBody>
@@ -1743,7 +1743,7 @@
           <a:lstStyle/>
           <a:p>
             <a:r>
-              <a:t>Step one is skipped constantly and it is the one that saves time. A fix applied to a failure you never reproduced is a guess, and about half of those guesses are wrong.</a:t>
+              <a:t>Three steps. Reproduce it first, and see the failure before you change anything. Change one thing, the smallest edit that could work. Then re-run that exact input — the one from the log, not a similar one.</a:t>
             </a:r>
           </a:p>
         </p:txBody>
@@ -1813,7 +1813,7 @@
           <a:lstStyle/>
           <a:p>
             <a:r>
-              <a:t>Four rules that feel slow and are faster. Batched fixes that do not work leave you unable to tell which change broke what, at the worst possible point in the week.</a:t>
+              <a:t>Four rules that feel slow and are faster: one finding one change, re-run before starting the next, commit each fix separately, and never batch three and hope.</a:t>
             </a:r>
           </a:p>
         </p:txBody>
@@ -1883,7 +1883,7 @@
           <a:lstStyle/>
           <a:p>
             <a:r>
-              <a:t>This is what proof looks like — the exact input from the log, the new behaviour on screen, and a note tying it to the finding number. Thirty seconds, and it makes the commit message write itself.</a:t>
+              <a:t>This is what proof looks like — the exact input from the log, the new behaviour on screen, and a note tying it back to the finding number.</a:t>
             </a:r>
           </a:p>
         </p:txBody>
@@ -1953,7 +1953,7 @@
           <a:lstStyle/>
           <a:p>
             <a:r>
-              <a:t>The distinction the objective turns on. Every unproven fix is a finding you have merely moved out of sight, and Day 3 exists precisely because things out of sight get found by someone else.</a:t>
+              <a:t>Two kinds of done. You believe it should work now. Or you re-ran it and watched it work. Every unproven fix is a finding you have moved out of sight.</a:t>
             </a:r>
           </a:p>
         </p:txBody>
@@ -2023,7 +2023,7 @@
           <a:lstStyle/>
           <a:p>
             <a:r>
-              <a:t>The same ban list as Day 2, for the same reason. There are thirty minutes left in the week; every one spent on something not on the log is taken from something that is.</a:t>
+              <a:t>Not now: do not refactor while fixing, do not add a feature nobody asked for, do not restyle anything, and do not start on a second input.</a:t>
             </a:r>
           </a:p>
         </p:txBody>
@@ -2093,7 +2093,7 @@
           <a:lstStyle/>
           <a:p>
             <a:r>
-              <a:t>Three syllabus objectives across four moves. The second is a separate move on purpose — deciding what you will not fix is a distinct act from ranking, and teams that skip it fix whatever is nearest.</a:t>
+              <a:t>Four things this session. We triage severity against cost, commit to a cut line, fix and re-run and push, and schedule checks that outlive you.</a:t>
             </a:r>
           </a:p>
         </p:txBody>
@@ -2163,7 +2163,7 @@
           <a:lstStyle/>
           <a:p>
             <a:r>
-              <a:t>Step three is the one that gets forgotten. A stale caveat list is worse than none, because it tells a judge you are not tracking your own system accurately.</a:t>
+              <a:t>Three steps. Commit per finding, with the message naming the finding it closes. Push after each one rather than once at the end when it is rushed. And update the caveats — fixed comes off, below-the-line goes on.</a:t>
             </a:r>
           </a:p>
         </p:txBody>
@@ -2303,7 +2303,7 @@
           <a:lstStyle/>
           <a:p>
             <a:r>
-              <a:t>Four rows a stranger can read in ten seconds. Note that below-the-line entries stay on the record rather than disappearing — that is the difference between a known limit and an unknown one.</a:t>
+              <a:t>Four rows a stranger can read in ten seconds. Two fixed and re-ran, two below the line. Note that the below-the-line entries stay on the record rather than disappearing.</a:t>
             </a:r>
           </a:p>
         </p:txBody>
@@ -2373,7 +2373,7 @@
           <a:lstStyle/>
           <a:p>
             <a:r>
-              <a:t>Four destinations. The last line matters for morale on the final afternoon: a documented, deliberate limit is a scoping decision, and every shipped system has a list like it.</a:t>
+              <a:t>The ones you did not fix go into the caveats, into the demo script, and into the next sprint. They are not failures — every shipped system has a list like this.</a:t>
             </a:r>
           </a:p>
         </p:txBody>
@@ -2443,7 +2443,7 @@
           <a:lstStyle/>
           <a:p>
             <a:r>
-              <a:t>The line to repeat when a team is running short and tempted to push a change they have not re-run. If there is time for one but not both, fix fewer things and prove them.</a:t>
+              <a:t>An unproven fix is still a bug. If there is time for one but not both, fix fewer things and prove them.</a:t>
             </a:r>
           </a:p>
         </p:txBody>
@@ -2513,7 +2513,7 @@
           <a:lstStyle/>
           <a:p>
             <a:r>
-              <a:t>Third objective, and the one that outlives the week. Everything so far was tested because people were watching. This section is about what happens when they are not.</a:t>
+              <a:t>Third objective, and the one that outlives the week. Everything so far was tested because people were watching.</a:t>
             </a:r>
           </a:p>
         </p:txBody>
@@ -2583,7 +2583,7 @@
           <a:lstStyle/>
           <a:p>
             <a:r>
-              <a:t>Ask it and let the silence sit. The honest answer for most prototypes is nobody, which is exactly why they quietly stop working and nobody finds out until they are opened in front of someone.</a:t>
+              <a:t>So: who tests it next week? For most prototypes the honest answer is nobody, which is why they quietly stop working.</a:t>
             </a:r>
           </a:p>
         </p:txBody>
@@ -2653,7 +2653,7 @@
           <a:lstStyle/>
           <a:p>
             <a:r>
-              <a:t>Define it plainly. A Routine is a scheduled agent run — the same instructions they would type, fired on a timer, reporting what it found. That is the whole idea.</a:t>
+              <a:t>A Routine is a prompt that runs on a schedule, without you. It is a scheduled agent run — the same instructions you would type, fired on a timer.</a:t>
             </a:r>
           </a:p>
         </p:txBody>
@@ -2723,7 +2723,7 @@
           <a:lstStyle/>
           <a:p>
             <a:r>
-              <a:t>Four reasons. The second is the most common in practice — prototypes rarely break because of code changes, they break because something they depend on changed underneath them.</a:t>
+              <a:t>Four reasons to schedule checks. Things break with nobody touching them. A key expires, a service moves. You will not think to look. And a dead demo gets found by a judge.</a:t>
             </a:r>
           </a:p>
         </p:txBody>
@@ -2793,7 +2793,7 @@
           <a:lstStyle/>
           <a:p>
             <a:r>
-              <a:t>Three steps, a few minutes each. Step three decides whether any of this matters — a check reporting into a place nobody opens is the same as no check at all.</a:t>
+              <a:t>Three steps. Write the check as a prompt — exactly what you would do by hand. Pick a schedule, and daily is right for almost everything. Then say where it reports, somewhere you will actually see it.</a:t>
             </a:r>
           </a:p>
         </p:txBody>
@@ -2863,7 +2863,7 @@
           <a:lstStyle/>
           <a:p>
             <a:r>
-              <a:t>Open here rather than with the log. In fifty minutes they cannot fix everything, and the teams that end the week strongest are the ones that decided that on purpose rather than by running out of time.</a:t>
+              <a:t>Start here: what will you not fix? In fifty minutes you cannot fix everything, and the teams that end strongest decided that on purpose rather than by running out of time.</a:t>
             </a:r>
           </a:p>
         </p:txBody>
@@ -2933,7 +2933,7 @@
           <a:lstStyle/>
           <a:p>
             <a:r>
-              <a:t>Five lines, and it is just the happy path from 2.2 run by somebody else. The last line matters — a check that reports nothing when healthy is a check you stop trusting.</a:t>
+              <a:t>Five lines, and it is just your happy path run by somebody else. Open the URL, upload the fixture, click Run, and say so in one line if the output is missing or wrong — otherwise say OK.</a:t>
             </a:r>
           </a:p>
         </p:txBody>
@@ -3003,7 +3003,7 @@
           <a:lstStyle/>
           <a:p>
             <a:r>
-              <a:t>Four checks, and the second is the point of the whole session. A fix that silently regresses is worse than the original bug, because you have stopped watching for it.</a:t>
+              <a:t>Four things to schedule: the happy path end to end, the findings you fixed today, whether the URL still loads at all, and anything with a key or a quota.</a:t>
             </a:r>
           </a:p>
         </p:txBody>
@@ -3073,7 +3073,7 @@
           <a:lstStyle/>
           <a:p>
             <a:r>
-              <a:t>The same specificity lesson as the whole week, applied one last time. A vague scheduled prompt produces a vague daily message that everybody learns to ignore within a week.</a:t>
+              <a:t>A weak check says “check if it works”, reports only on failure, and goes where nobody looks. A strong one has one input and one expectation, reports either way, and lands where you look daily.</a:t>
             </a:r>
           </a:p>
         </p:txBody>
@@ -3143,7 +3143,7 @@
           <a:lstStyle/>
           <a:p>
             <a:r>
-              <a:t>The syllabus says unlimited, so the constraint is not count — it is whether each one is worth reading. Generous with checks, strict about them reporting something a person can act on.</a:t>
+              <a:t>The constraint is not the count — the syllabus says unlimited. One per fix you made today, one for the happy path, one for each external dependency. Be generous with checks and strict about them reporting something you can act on.</a:t>
             </a:r>
           </a:p>
         </p:txBody>
@@ -3213,7 +3213,7 @@
           <a:lstStyle/>
           <a:p>
             <a:r>
-              <a:t>If a team only sets up three, these are the three. The first catches the dead-demo case, the second catches silent breakage, and the third catches regression of everything they did this hour.</a:t>
+              <a:t>If you only set up three, make it these. Is it alive — the URL loads and returns a page. Does it still work — the happy path daily, start to finish. And did the fixes hold — today's findings, re-run on a timer.</a:t>
             </a:r>
           </a:p>
         </p:txBody>
@@ -3283,7 +3283,7 @@
           <a:lstStyle/>
           <a:p>
             <a:r>
-              <a:t>Four files, and together they are the handoff. Anyone picking this up in a month — including them — can understand the system without a conversation, which is what handoff means.</a:t>
+              <a:t>Four files, and together they are the handoff. README says what it does. CAVEATS says what it does not. TRIAGE says what you chose. And the checks say it still runs.</a:t>
             </a:r>
           </a:p>
         </p:txBody>
@@ -3353,7 +3353,7 @@
           <a:lstStyle/>
           <a:p>
             <a:r>
-              <a:t>Three days of work in one screen. Point out that four of these files are prose rather than code — the record of what they chose and what they know is as much of the deliverable as the pipeline.</a:t>
+              <a:t>Three days of work in one screen. Four of these files are prose rather than code — the record of what you chose and what you know is as much of the deliverable as the pipeline.</a:t>
             </a:r>
           </a:p>
         </p:txBody>
@@ -3423,7 +3423,7 @@
           <a:lstStyle/>
           <a:p>
             <a:r>
-              <a:t>Four binary checks to run as a team before 11:50. The last is the one to verify rather than assume — a Routine that was created but never fired has not been tested either.</a:t>
+              <a:t>Four binary checks before 11:50. Everything pushed, nothing only local. Fixes proven, each test re-run. Caveats current, matching reality today. And checks running, with at least one already fired.</a:t>
             </a:r>
           </a:p>
         </p:txBody>
@@ -3493,7 +3493,7 @@
           <a:lstStyle/>
           <a:p>
             <a:r>
-              <a:t>Read this at 11:38. The order of sacrifice is fixes first, the schedule last — a prototype with two fixes and a working daily check is in better shape than one with five fixes and nobody watching.</a:t>
+              <a:t>If you are behind: stop fixing at 11:40 and whatever is left goes into the caveats. Push what is proven, and leave an unproven change uncommitted. But never skip the schedule — it is the only part that outlives today.</a:t>
             </a:r>
           </a:p>
         </p:txBody>
@@ -3563,7 +3563,7 @@
           <a:lstStyle/>
           <a:p>
             <a:r>
-              <a:t>The exit checklist for the session and for the week. Four lines, all binary, all verifiable in the repo by someone who was not in the room.</a:t>
+              <a:t>You are leaving with a cut line written and held, the fixes above it each re-run, everything pushed to GitHub, and checks running without you.</a:t>
             </a:r>
           </a:p>
         </p:txBody>
@@ -3633,7 +3633,7 @@
           <a:lstStyle/>
           <a:p>
             <a:r>
-              <a:t>The bridge. A log is a pile of facts and produces anxiety. A cut line turns the same pile into a plan, and the pile stops being frightening the moment the line exists.</a:t>
+              <a:t>A log is a pile of facts, and it produces anxiety. A cut line turns the same pile into a plan.</a:t>
             </a:r>
           </a:p>
         </p:txBody>
@@ -3703,7 +3703,7 @@
           <a:lstStyle/>
           <a:p>
             <a:r>
-              <a:t>The last four answers of the week. The third is what they should say out loud in the demo before anyone asks, which turns their largest remaining weakness into evidence that they know their own system.</a:t>
+              <a:t>The last four answers of the week: where the line landed, what you fixed and proved, the biggest thing left, and what the checks are watching.</a:t>
             </a:r>
           </a:p>
         </p:txBody>
@@ -3773,7 +3773,7 @@
           <a:lstStyle/>
           <a:p>
             <a:r>
-              <a:t>Close the week here. Four lines covering three days. The last is the one most teams never have — plenty of people can show a demo, far fewer can show what they did to try to break it.</a:t>
+              <a:t>What you built this week: a problem stated precisely, a workflow mapped and owned, a prototype at a public URL, and proof that you tested it. Plenty of people can show a demo; far fewer can show what they did to break it.</a:t>
             </a:r>
           </a:p>
         </p:txBody>
@@ -3843,7 +3843,7 @@
           <a:lstStyle/>
           <a:p>
             <a:r>
-              <a:t>The final question of the week. Everything below the cut line, everything in the caveats and everything the red team found is already the answer — they leave with a backlog rather than a blank page.</a:t>
+              <a:t>One last question: what would you build next? Everything below your cut line, everything in your caveats and everything the red team found is already the answer — you leave with a backlog rather than a blank page.</a:t>
             </a:r>
           </a:p>
         </p:txBody>
@@ -3913,7 +3913,7 @@
           <a:lstStyle/>
           <a:p>
             <a:r>
-              <a:t>The shape of the hour. Note that fixing is only the third move — most of the value is in the first two, and teams that dive straight into code fix the easy things and leave the critical ones.</a:t>
+              <a:t>Four moves: triage on severity against cost to fix, draw the cut line out loud, fix and re-run the exact test, then schedule it to keep testing itself.</a:t>
             </a:r>
           </a:p>
         </p:txBody>
@@ -3983,7 +3983,7 @@
           <a:lstStyle/>
           <a:p>
             <a:r>
-              <a:t>The gate is 11:40. Stop fixing then regardless of what is left — the scheduled checks are the only part of this hour that keeps working after the week ends, and they need the full ten minutes.</a:t>
+              <a:t>The hour runs in four blocks, and 11:40 is the gate — stop fixing then, whatever is left. The scheduled checks are the only part of this hour that keeps working after the week ends.</a:t>
             </a:r>
           </a:p>
         </p:txBody>
@@ -4053,7 +4053,7 @@
           <a:lstStyle/>
           <a:p>
             <a:r>
-              <a:t>The line for the session. Anyone can rank a list; committing to leave the bottom of it alone is what makes the ranking mean something. That commitment is the deliverable of the first twelve minutes.</a:t>
+              <a:t>Deciding what to ignore is the work. Anyone can rank a list; committing to leave the bottom of it alone is what makes the ranking mean anything.</a:t>
             </a:r>
           </a:p>
         </p:txBody>
@@ -4123,7 +4123,7 @@
           <a:lstStyle/>
           <a:p>
             <a:r>
-              <a:t>First objective. Two axes, one line, twelve minutes. Do this as a whole team with the log on a shared screen, not by splitting the list between people.</a:t>
+              <a:t>First objective: two axes, one line, twelve minutes — done as a whole team with the log on a shared screen.</a:t>
             </a:r>
           </a:p>
         </p:txBody>

--- a/examples/pptx/immersion-3-3-hardening-and-handoff.pptx
+++ b/examples/pptx/immersion-3-3-hardening-and-handoff.pptx
@@ -56,7 +56,6 @@
     <p:sldId id="304" r:id="rId56"/>
     <p:sldId id="305" r:id="rId57"/>
     <p:sldId id="306" r:id="rId58"/>
-    <p:sldId id="307" r:id="rId59"/>
   </p:sldIdLst>
   <p:sldSz cx="12192000" cy="6858000" type="screen16x9"/>
   <p:notesSz cx="6858000" cy="9144000"/>
@@ -3798,76 +3797,6 @@
 </p:notes>
 </file>
 
-<file path=ppt/notesSlides/notesSlide52.xml><?xml version="1.0" encoding="utf-8"?>
-<p:notes xmlns:a="http://schemas.openxmlformats.org/drawingml/2006/main" xmlns:p="http://schemas.openxmlformats.org/presentationml/2006/main" xmlns:r="http://schemas.openxmlformats.org/officeDocument/2006/relationships">
-  <p:cSld>
-    <p:spTree>
-      <p:nvGrpSpPr>
-        <p:cNvPr id="1" name=""/>
-        <p:cNvGrpSpPr/>
-        <p:nvPr/>
-      </p:nvGrpSpPr>
-      <p:grpSpPr>
-        <a:xfrm>
-          <a:off x="0" y="0"/>
-          <a:ext cx="0" cy="0"/>
-          <a:chOff x="0" y="0"/>
-          <a:chExt cx="0" cy="0"/>
-        </a:xfrm>
-      </p:grpSpPr>
-      <p:sp>
-        <p:nvSpPr>
-          <p:cNvPr id="2" name="Slide Image Placeholder 1"/>
-          <p:cNvSpPr>
-            <a:spLocks noGrp="1"/>
-          </p:cNvSpPr>
-          <p:nvPr>
-            <p:ph type="sldImg" idx="2"/>
-          </p:nvPr>
-        </p:nvSpPr>
-        <p:spPr/>
-      </p:sp>
-      <p:sp>
-        <p:nvSpPr>
-          <p:cNvPr id="3" name="Notes Placeholder 2"/>
-          <p:cNvSpPr>
-            <a:spLocks noGrp="1"/>
-          </p:cNvSpPr>
-          <p:nvPr>
-            <p:ph type="body" idx="3" sz="quarter"/>
-          </p:nvPr>
-        </p:nvSpPr>
-        <p:spPr/>
-        <p:txBody>
-          <a:bodyPr/>
-          <a:lstStyle/>
-          <a:p>
-            <a:r>
-              <a:t>One last question: what would you build next? Everything below your cut line, everything in your caveats and everything the red team found is already the answer — you leave with a backlog rather than a blank page.</a:t>
-            </a:r>
-          </a:p>
-        </p:txBody>
-      </p:sp>
-      <p:sp>
-        <p:nvSpPr>
-          <p:cNvPr id="4" name="Slide Number Placeholder 3"/>
-          <p:cNvSpPr>
-            <a:spLocks noGrp="1"/>
-          </p:cNvSpPr>
-          <p:nvPr>
-            <p:ph type="sldNum" idx="5" sz="quarter"/>
-          </p:nvPr>
-        </p:nvSpPr>
-        <p:spPr/>
-      </p:sp>
-    </p:spTree>
-  </p:cSld>
-  <p:clrMapOvr>
-    <a:masterClrMapping/>
-  </p:clrMapOvr>
-</p:notes>
-</file>
-
 <file path=ppt/notesSlides/notesSlide6.xml><?xml version="1.0" encoding="utf-8"?>
 <p:notes xmlns:a="http://schemas.openxmlformats.org/drawingml/2006/main" xmlns:p="http://schemas.openxmlformats.org/presentationml/2006/main" xmlns:r="http://schemas.openxmlformats.org/officeDocument/2006/relationships">
   <p:cSld>
@@ -5611,7 +5540,7 @@
             <a:r>
               <a:rPr sz="3400" b="1" i="0">
                 <a:solidFill>
-                  <a:srgbClr val="123A6B"/>
+                  <a:srgbClr val="0072CE"/>
                 </a:solidFill>
                 <a:latin typeface="Arial"/>
               </a:rPr>
@@ -5648,7 +5577,7 @@
             <a:r>
               <a:rPr sz="3400" b="1" i="0">
                 <a:solidFill>
-                  <a:srgbClr val="123A6B"/>
+                  <a:srgbClr val="0072CE"/>
                 </a:solidFill>
                 <a:latin typeface="Arial"/>
               </a:rPr>
@@ -6540,6 +6469,43 @@
         <p:spPr>
           <a:xfrm>
             <a:off x="6233160" y="1499616"/>
+            <a:ext cx="5958840" cy="609600"/>
+          </a:xfrm>
+          <a:prstGeom prst="rect">
+            <a:avLst/>
+          </a:prstGeom>
+          <a:noFill/>
+        </p:spPr>
+        <p:txBody>
+          <a:bodyPr wrap="none" lIns="0" rIns="0">
+            <a:noAutofit/>
+          </a:bodyPr>
+          <a:lstStyle/>
+          <a:p>
+            <a:pPr algn="l"/>
+            <a:r>
+              <a:rPr sz="3400" b="0" i="0">
+                <a:solidFill>
+                  <a:srgbClr val="0A2240"/>
+                </a:solidFill>
+                <a:latin typeface="Arial"/>
+              </a:rPr>
+              <a:t>Built with customers.</a:t>
+            </a:r>
+          </a:p>
+        </p:txBody>
+      </p:sp>
+      <p:sp>
+        <p:nvSpPr>
+          <p:cNvPr id="7" name="TextBox 6"/>
+          <p:cNvSpPr/>
+          <p:nvPr>
+            <p:ph type="body" idx="2"/>
+          </p:nvPr>
+        </p:nvSpPr>
+        <p:spPr>
+          <a:xfrm>
+            <a:off x="6233160" y="2383536"/>
             <a:ext cx="5501640" cy="1127760"/>
           </a:xfrm>
           <a:prstGeom prst="rect">
@@ -6561,44 +6527,7 @@
                 </a:solidFill>
                 <a:latin typeface="Arial"/>
               </a:rPr>
-              <a:t>Built with customers, not just for them.</a:t>
-            </a:r>
-          </a:p>
-        </p:txBody>
-      </p:sp>
-      <p:sp>
-        <p:nvSpPr>
-          <p:cNvPr id="7" name="TextBox 6"/>
-          <p:cNvSpPr/>
-          <p:nvPr>
-            <p:ph type="body" idx="2"/>
-          </p:nvPr>
-        </p:nvSpPr>
-        <p:spPr>
-          <a:xfrm>
-            <a:off x="6233160" y="2901696"/>
-            <a:ext cx="5501640" cy="1127760"/>
-          </a:xfrm>
-          <a:prstGeom prst="rect">
-            <a:avLst/>
-          </a:prstGeom>
-          <a:noFill/>
-        </p:spPr>
-        <p:txBody>
-          <a:bodyPr wrap="square" lIns="0" rIns="0">
-            <a:noAutofit/>
-          </a:bodyPr>
-          <a:lstStyle/>
-          <a:p>
-            <a:pPr algn="l"/>
-            <a:r>
-              <a:rPr sz="3400" b="0" i="0">
-                <a:solidFill>
-                  <a:srgbClr val="0A2240"/>
-                </a:solidFill>
-                <a:latin typeface="Arial"/>
-              </a:rPr>
-              <a:t>60% faster rollout; 50% fewer tickets.</a:t>
+              <a:t>60% faster; 50% fewer tickets</a:t>
             </a:r>
           </a:p>
         </p:txBody>
@@ -6617,405 +6546,6 @@
 </file>
 
 <file path=ppt/slideLayouts/slideLayout18.xml><?xml version="1.0" encoding="utf-8"?>
-<p:sldLayout xmlns:a="http://schemas.openxmlformats.org/drawingml/2006/main" xmlns:r="http://schemas.openxmlformats.org/officeDocument/2006/relationships" xmlns:p="http://schemas.openxmlformats.org/presentationml/2006/main" type="blank" preserve="1">
-  <p:cSld name="slidekit · Card Grid">
-    <p:bg>
-      <p:bgPr>
-        <a:solidFill>
-          <a:srgbClr val="FFFFFF"/>
-        </a:solidFill>
-        <a:effectLst/>
-      </p:bgPr>
-    </p:bg>
-    <p:spTree>
-      <p:nvGrpSpPr>
-        <p:cNvPr id="1" name=""/>
-        <p:cNvGrpSpPr/>
-        <p:nvPr/>
-      </p:nvGrpSpPr>
-      <p:grpSpPr>
-        <a:xfrm>
-          <a:off x="0" y="0"/>
-          <a:ext cx="0" cy="0"/>
-          <a:chOff x="0" y="0"/>
-          <a:chExt cx="0" cy="0"/>
-        </a:xfrm>
-      </p:grpSpPr>
-      <p:sp>
-        <p:nvSpPr>
-          <p:cNvPr id="4" name="Slide Number Placeholder 3"/>
-          <p:cNvSpPr>
-            <a:spLocks noGrp="1"/>
-          </p:cNvSpPr>
-          <p:nvPr>
-            <p:ph type="sldNum" sz="quarter" idx="12"/>
-          </p:nvPr>
-        </p:nvSpPr>
-        <p:spPr>
-          <a:xfrm>
-            <a:off x="11186160" y="6035040"/>
-            <a:ext cx="548640" cy="365760"/>
-          </a:xfrm>
-        </p:spPr>
-        <p:txBody>
-          <a:bodyPr/>
-          <a:lstStyle/>
-          <a:p>
-            <a:fld id="{C1FF6DA9-008F-8B48-92A6-B652298478BF}" type="slidenum">
-              <a:rPr lang="en-US" smtClean="0"/>
-              <a:t>‹#›</a:t>
-            </a:fld>
-            <a:endParaRPr lang="en-US"/>
-          </a:p>
-        </p:txBody>
-      </p:sp>
-      <p:sp>
-        <p:nvSpPr>
-          <p:cNvPr id="5" name="TextBox 4"/>
-          <p:cNvSpPr/>
-          <p:nvPr>
-            <p:ph type="title"/>
-          </p:nvPr>
-        </p:nvSpPr>
-        <p:spPr>
-          <a:xfrm>
-            <a:off x="457200" y="457200"/>
-            <a:ext cx="11277600" cy="768096"/>
-          </a:xfrm>
-          <a:prstGeom prst="rect">
-            <a:avLst/>
-          </a:prstGeom>
-          <a:noFill/>
-        </p:spPr>
-        <p:txBody>
-          <a:bodyPr wrap="none" lIns="0" rIns="0">
-            <a:noAutofit/>
-          </a:bodyPr>
-          <a:lstStyle/>
-          <a:p>
-            <a:pPr algn="l"/>
-            <a:r>
-              <a:rPr sz="4200" b="1" i="0">
-                <a:solidFill>
-                  <a:srgbClr val="0072CE"/>
-                </a:solidFill>
-                <a:latin typeface="Arial"/>
-              </a:rPr>
-              <a:t>What We Offer</a:t>
-            </a:r>
-          </a:p>
-        </p:txBody>
-      </p:sp>
-      <p:sp>
-        <p:nvSpPr>
-          <p:cNvPr id="6" name="TextBox 5"/>
-          <p:cNvSpPr/>
-          <p:nvPr>
-            <p:ph type="body" idx="1"/>
-          </p:nvPr>
-        </p:nvSpPr>
-        <p:spPr>
-          <a:xfrm>
-            <a:off x="457200" y="1499616"/>
-            <a:ext cx="2831366" cy="518159"/>
-          </a:xfrm>
-          <a:prstGeom prst="rect">
-            <a:avLst/>
-          </a:prstGeom>
-          <a:noFill/>
-        </p:spPr>
-        <p:txBody>
-          <a:bodyPr wrap="none" lIns="0" rIns="0">
-            <a:noAutofit/>
-          </a:bodyPr>
-          <a:lstStyle/>
-          <a:p>
-            <a:pPr algn="l"/>
-            <a:r>
-              <a:rPr sz="3400" b="1" i="0">
-                <a:solidFill>
-                  <a:srgbClr val="0A2240"/>
-                </a:solidFill>
-                <a:latin typeface="Arial"/>
-              </a:rPr>
-              <a:t>Insights</a:t>
-            </a:r>
-          </a:p>
-        </p:txBody>
-      </p:sp>
-      <p:sp>
-        <p:nvSpPr>
-          <p:cNvPr id="7" name="TextBox 6"/>
-          <p:cNvSpPr/>
-          <p:nvPr>
-            <p:ph type="body" idx="2"/>
-          </p:nvPr>
-        </p:nvSpPr>
-        <p:spPr>
-          <a:xfrm>
-            <a:off x="457200" y="2154935"/>
-            <a:ext cx="2613660" cy="3605785"/>
-          </a:xfrm>
-          <a:prstGeom prst="rect">
-            <a:avLst/>
-          </a:prstGeom>
-          <a:noFill/>
-        </p:spPr>
-        <p:txBody>
-          <a:bodyPr wrap="square" lIns="0" rIns="0">
-            <a:noAutofit/>
-          </a:bodyPr>
-          <a:lstStyle/>
-          <a:p>
-            <a:pPr algn="l"/>
-            <a:r>
-              <a:rPr sz="3400" b="0" i="0">
-                <a:solidFill>
-                  <a:srgbClr val="0A2240"/>
-                </a:solidFill>
-                <a:latin typeface="Arial"/>
-              </a:rPr>
-              <a:t>Live data and AI analytics.</a:t>
-            </a:r>
-          </a:p>
-        </p:txBody>
-      </p:sp>
-      <p:sp>
-        <p:nvSpPr>
-          <p:cNvPr id="8" name="TextBox 7"/>
-          <p:cNvSpPr/>
-          <p:nvPr>
-            <p:ph type="body" idx="3"/>
-          </p:nvPr>
-        </p:nvSpPr>
-        <p:spPr>
-          <a:xfrm>
-            <a:off x="3345180" y="1499616"/>
-            <a:ext cx="2909292" cy="518159"/>
-          </a:xfrm>
-          <a:prstGeom prst="rect">
-            <a:avLst/>
-          </a:prstGeom>
-          <a:noFill/>
-        </p:spPr>
-        <p:txBody>
-          <a:bodyPr wrap="none" lIns="0" rIns="0">
-            <a:noAutofit/>
-          </a:bodyPr>
-          <a:lstStyle/>
-          <a:p>
-            <a:pPr algn="l"/>
-            <a:r>
-              <a:rPr sz="3400" b="1" i="0">
-                <a:solidFill>
-                  <a:srgbClr val="0A2240"/>
-                </a:solidFill>
-                <a:latin typeface="Arial"/>
-              </a:rPr>
-              <a:t>Security</a:t>
-            </a:r>
-          </a:p>
-        </p:txBody>
-      </p:sp>
-      <p:sp>
-        <p:nvSpPr>
-          <p:cNvPr id="9" name="TextBox 8"/>
-          <p:cNvSpPr/>
-          <p:nvPr>
-            <p:ph type="body" idx="4"/>
-          </p:nvPr>
-        </p:nvSpPr>
-        <p:spPr>
-          <a:xfrm>
-            <a:off x="3345180" y="2154935"/>
-            <a:ext cx="2613660" cy="3605785"/>
-          </a:xfrm>
-          <a:prstGeom prst="rect">
-            <a:avLst/>
-          </a:prstGeom>
-          <a:noFill/>
-        </p:spPr>
-        <p:txBody>
-          <a:bodyPr wrap="square" lIns="0" rIns="0">
-            <a:noAutofit/>
-          </a:bodyPr>
-          <a:lstStyle/>
-          <a:p>
-            <a:pPr algn="l"/>
-            <a:r>
-              <a:rPr sz="3400" b="0" i="0">
-                <a:solidFill>
-                  <a:srgbClr val="0A2240"/>
-                </a:solidFill>
-                <a:latin typeface="Arial"/>
-              </a:rPr>
-              <a:t>Zero-trust, SOC 2 ready.</a:t>
-            </a:r>
-          </a:p>
-        </p:txBody>
-      </p:sp>
-      <p:sp>
-        <p:nvSpPr>
-          <p:cNvPr id="10" name="TextBox 9"/>
-          <p:cNvSpPr/>
-          <p:nvPr>
-            <p:ph type="body" idx="5"/>
-          </p:nvPr>
-        </p:nvSpPr>
-        <p:spPr>
-          <a:xfrm>
-            <a:off x="6233160" y="1499616"/>
-            <a:ext cx="2613660" cy="518159"/>
-          </a:xfrm>
-          <a:prstGeom prst="rect">
-            <a:avLst/>
-          </a:prstGeom>
-          <a:noFill/>
-        </p:spPr>
-        <p:txBody>
-          <a:bodyPr wrap="none" lIns="0" rIns="0">
-            <a:noAutofit/>
-          </a:bodyPr>
-          <a:lstStyle/>
-          <a:p>
-            <a:pPr algn="l"/>
-            <a:r>
-              <a:rPr sz="3400" b="1" i="0">
-                <a:solidFill>
-                  <a:srgbClr val="0A2240"/>
-                </a:solidFill>
-                <a:latin typeface="Arial"/>
-              </a:rPr>
-              <a:t>Speed</a:t>
-            </a:r>
-          </a:p>
-        </p:txBody>
-      </p:sp>
-      <p:sp>
-        <p:nvSpPr>
-          <p:cNvPr id="11" name="TextBox 10"/>
-          <p:cNvSpPr/>
-          <p:nvPr>
-            <p:ph type="body" idx="6"/>
-          </p:nvPr>
-        </p:nvSpPr>
-        <p:spPr>
-          <a:xfrm>
-            <a:off x="6233160" y="2154935"/>
-            <a:ext cx="2613660" cy="3605785"/>
-          </a:xfrm>
-          <a:prstGeom prst="rect">
-            <a:avLst/>
-          </a:prstGeom>
-          <a:noFill/>
-        </p:spPr>
-        <p:txBody>
-          <a:bodyPr wrap="square" lIns="0" rIns="0">
-            <a:noAutofit/>
-          </a:bodyPr>
-          <a:lstStyle/>
-          <a:p>
-            <a:pPr algn="l"/>
-            <a:r>
-              <a:rPr sz="3400" b="0" i="0">
-                <a:solidFill>
-                  <a:srgbClr val="0A2240"/>
-                </a:solidFill>
-                <a:latin typeface="Arial"/>
-              </a:rPr>
-              <a:t>Sub-100ms p99 latency.</a:t>
-            </a:r>
-          </a:p>
-        </p:txBody>
-      </p:sp>
-      <p:sp>
-        <p:nvSpPr>
-          <p:cNvPr id="12" name="TextBox 11"/>
-          <p:cNvSpPr/>
-          <p:nvPr>
-            <p:ph type="body" idx="7"/>
-          </p:nvPr>
-        </p:nvSpPr>
-        <p:spPr>
-          <a:xfrm>
-            <a:off x="9121140" y="1499616"/>
-            <a:ext cx="2613660" cy="518159"/>
-          </a:xfrm>
-          <a:prstGeom prst="rect">
-            <a:avLst/>
-          </a:prstGeom>
-          <a:noFill/>
-        </p:spPr>
-        <p:txBody>
-          <a:bodyPr wrap="none" lIns="0" rIns="0">
-            <a:noAutofit/>
-          </a:bodyPr>
-          <a:lstStyle/>
-          <a:p>
-            <a:pPr algn="l"/>
-            <a:r>
-              <a:rPr sz="3400" b="1" i="0">
-                <a:solidFill>
-                  <a:srgbClr val="0A2240"/>
-                </a:solidFill>
-                <a:latin typeface="Arial"/>
-              </a:rPr>
-              <a:t>APIs</a:t>
-            </a:r>
-          </a:p>
-        </p:txBody>
-      </p:sp>
-      <p:sp>
-        <p:nvSpPr>
-          <p:cNvPr id="13" name="TextBox 12"/>
-          <p:cNvSpPr/>
-          <p:nvPr>
-            <p:ph type="body" idx="8"/>
-          </p:nvPr>
-        </p:nvSpPr>
-        <p:spPr>
-          <a:xfrm>
-            <a:off x="9121140" y="2154935"/>
-            <a:ext cx="2613660" cy="3605785"/>
-          </a:xfrm>
-          <a:prstGeom prst="rect">
-            <a:avLst/>
-          </a:prstGeom>
-          <a:noFill/>
-        </p:spPr>
-        <p:txBody>
-          <a:bodyPr wrap="square" lIns="0" rIns="0">
-            <a:noAutofit/>
-          </a:bodyPr>
-          <a:lstStyle/>
-          <a:p>
-            <a:pPr algn="l"/>
-            <a:r>
-              <a:rPr sz="3400" b="0" i="0">
-                <a:solidFill>
-                  <a:srgbClr val="0A2240"/>
-                </a:solidFill>
-                <a:latin typeface="Arial"/>
-              </a:rPr>
-              <a:t>300+ open connectors.</a:t>
-            </a:r>
-          </a:p>
-        </p:txBody>
-      </p:sp>
-    </p:spTree>
-    <p:extLst>
-      <p:ext uri="{BB962C8B-B14F-4D97-AF65-F5344CB8AC3E}">
-        <p14:creationId xmlns:p14="http://schemas.microsoft.com/office/powerpoint/2010/main" val="1212999818"/>
-      </p:ext>
-    </p:extLst>
-  </p:cSld>
-  <p:clrMapOvr>
-    <a:masterClrMapping/>
-  </p:clrMapOvr>
-</p:sldLayout>
-</file>
-
-<file path=ppt/slideLayouts/slideLayout19.xml><?xml version="1.0" encoding="utf-8"?>
 <p:sldLayout xmlns:a="http://schemas.openxmlformats.org/drawingml/2006/main" xmlns:r="http://schemas.openxmlformats.org/officeDocument/2006/relationships" xmlns:p="http://schemas.openxmlformats.org/presentationml/2006/main" type="blank" preserve="1">
   <p:cSld name="slidekit · Section Divider">
     <p:bg>
@@ -7170,6 +6700,511 @@
                 <a:latin typeface="Arial"/>
               </a:rPr>
               <a:t>Where We Stand Today</a:t>
+            </a:r>
+          </a:p>
+        </p:txBody>
+      </p:sp>
+    </p:spTree>
+    <p:extLst>
+      <p:ext uri="{BB962C8B-B14F-4D97-AF65-F5344CB8AC3E}">
+        <p14:creationId xmlns:p14="http://schemas.microsoft.com/office/powerpoint/2010/main" val="1212999818"/>
+      </p:ext>
+    </p:extLst>
+  </p:cSld>
+  <p:clrMapOvr>
+    <a:masterClrMapping/>
+  </p:clrMapOvr>
+</p:sldLayout>
+</file>
+
+<file path=ppt/slideLayouts/slideLayout19.xml><?xml version="1.0" encoding="utf-8"?>
+<p:sldLayout xmlns:a="http://schemas.openxmlformats.org/drawingml/2006/main" xmlns:r="http://schemas.openxmlformats.org/officeDocument/2006/relationships" xmlns:p="http://schemas.openxmlformats.org/presentationml/2006/main" type="blank" preserve="1">
+  <p:cSld name="slidekit · Agenda">
+    <p:bg>
+      <p:bgPr>
+        <a:solidFill>
+          <a:srgbClr val="FFFFFF"/>
+        </a:solidFill>
+        <a:effectLst/>
+      </p:bgPr>
+    </p:bg>
+    <p:spTree>
+      <p:nvGrpSpPr>
+        <p:cNvPr id="1" name=""/>
+        <p:cNvGrpSpPr/>
+        <p:nvPr/>
+      </p:nvGrpSpPr>
+      <p:grpSpPr>
+        <a:xfrm>
+          <a:off x="0" y="0"/>
+          <a:ext cx="0" cy="0"/>
+          <a:chOff x="0" y="0"/>
+          <a:chExt cx="0" cy="0"/>
+        </a:xfrm>
+      </p:grpSpPr>
+      <p:sp>
+        <p:nvSpPr>
+          <p:cNvPr id="4" name="Slide Number Placeholder 3"/>
+          <p:cNvSpPr>
+            <a:spLocks noGrp="1"/>
+          </p:cNvSpPr>
+          <p:nvPr>
+            <p:ph type="sldNum" sz="quarter" idx="12"/>
+          </p:nvPr>
+        </p:nvSpPr>
+        <p:spPr>
+          <a:xfrm>
+            <a:off x="11186160" y="6035040"/>
+            <a:ext cx="548640" cy="365760"/>
+          </a:xfrm>
+        </p:spPr>
+        <p:txBody>
+          <a:bodyPr/>
+          <a:lstStyle/>
+          <a:p>
+            <a:fld id="{C1FF6DA9-008F-8B48-92A6-B652298478BF}" type="slidenum">
+              <a:rPr lang="en-US" smtClean="0"/>
+              <a:t>‹#›</a:t>
+            </a:fld>
+            <a:endParaRPr lang="en-US"/>
+          </a:p>
+        </p:txBody>
+      </p:sp>
+      <p:sp>
+        <p:nvSpPr>
+          <p:cNvPr id="5" name="TextBox 4"/>
+          <p:cNvSpPr/>
+          <p:nvPr>
+            <p:ph type="title"/>
+          </p:nvPr>
+        </p:nvSpPr>
+        <p:spPr>
+          <a:xfrm>
+            <a:off x="457200" y="457200"/>
+            <a:ext cx="11277600" cy="768096"/>
+          </a:xfrm>
+          <a:prstGeom prst="rect">
+            <a:avLst/>
+          </a:prstGeom>
+          <a:noFill/>
+        </p:spPr>
+        <p:txBody>
+          <a:bodyPr wrap="none" lIns="0" rIns="0">
+            <a:noAutofit/>
+          </a:bodyPr>
+          <a:lstStyle/>
+          <a:p>
+            <a:pPr algn="l"/>
+            <a:r>
+              <a:rPr sz="4200" b="1" i="0">
+                <a:solidFill>
+                  <a:srgbClr val="0072CE"/>
+                </a:solidFill>
+                <a:latin typeface="Arial"/>
+              </a:rPr>
+              <a:t>What We Will Cover</a:t>
+            </a:r>
+          </a:p>
+        </p:txBody>
+      </p:sp>
+      <p:sp>
+        <p:nvSpPr>
+          <p:cNvPr id="6" name="Rectangle 5"/>
+          <p:cNvSpPr/>
+          <p:nvPr>
+            <p:ph type="body" idx="1"/>
+          </p:nvPr>
+        </p:nvSpPr>
+        <p:spPr>
+          <a:xfrm>
+            <a:off x="457200" y="1280160"/>
+            <a:ext cx="11277600" cy="64008"/>
+          </a:xfrm>
+          <a:prstGeom prst="rect">
+            <a:avLst/>
+          </a:prstGeom>
+          <a:solidFill>
+            <a:srgbClr val="0072CE"/>
+          </a:solidFill>
+          <a:ln>
+            <a:noFill/>
+          </a:ln>
+          <a:effectLst/>
+        </p:spPr>
+        <p:txBody>
+          <a:bodyPr rtlCol="0" anchor="ctr"/>
+          <a:lstStyle/>
+          <a:p>
+            <a:pPr algn="ctr"/>
+          </a:p>
+        </p:txBody>
+      </p:sp>
+      <p:sp>
+        <p:nvSpPr>
+          <p:cNvPr id="7" name="TextBox 6"/>
+          <p:cNvSpPr/>
+          <p:nvPr>
+            <p:ph type="body" idx="2"/>
+          </p:nvPr>
+        </p:nvSpPr>
+        <p:spPr>
+          <a:xfrm>
+            <a:off x="457200" y="1618488"/>
+            <a:ext cx="951348" cy="518159"/>
+          </a:xfrm>
+          <a:prstGeom prst="rect">
+            <a:avLst/>
+          </a:prstGeom>
+          <a:noFill/>
+        </p:spPr>
+        <p:txBody>
+          <a:bodyPr wrap="none" lIns="0" rIns="0">
+            <a:noAutofit/>
+          </a:bodyPr>
+          <a:lstStyle/>
+          <a:p>
+            <a:pPr algn="l"/>
+            <a:r>
+              <a:rPr sz="3400" b="1" i="0">
+                <a:solidFill>
+                  <a:srgbClr val="0072CE"/>
+                </a:solidFill>
+                <a:latin typeface="Arial"/>
+              </a:rPr>
+              <a:t>01</a:t>
+            </a:r>
+          </a:p>
+        </p:txBody>
+      </p:sp>
+      <p:sp>
+        <p:nvSpPr>
+          <p:cNvPr id="8" name="TextBox 7"/>
+          <p:cNvSpPr/>
+          <p:nvPr>
+            <p:ph type="body" idx="3"/>
+          </p:nvPr>
+        </p:nvSpPr>
+        <p:spPr>
+          <a:xfrm>
+            <a:off x="1371600" y="1618488"/>
+            <a:ext cx="10363200" cy="518159"/>
+          </a:xfrm>
+          <a:prstGeom prst="rect">
+            <a:avLst/>
+          </a:prstGeom>
+          <a:noFill/>
+        </p:spPr>
+        <p:txBody>
+          <a:bodyPr wrap="none" lIns="0" rIns="0">
+            <a:noAutofit/>
+          </a:bodyPr>
+          <a:lstStyle/>
+          <a:p>
+            <a:pPr algn="l"/>
+            <a:r>
+              <a:rPr sz="3400" b="0" i="0">
+                <a:solidFill>
+                  <a:srgbClr val="0A2240"/>
+                </a:solidFill>
+                <a:latin typeface="Arial"/>
+              </a:rPr>
+              <a:t>Performance against targets</a:t>
+            </a:r>
+          </a:p>
+        </p:txBody>
+      </p:sp>
+      <p:sp>
+        <p:nvSpPr>
+          <p:cNvPr id="9" name="TextBox 8"/>
+          <p:cNvSpPr/>
+          <p:nvPr>
+            <p:ph type="body" idx="4"/>
+          </p:nvPr>
+        </p:nvSpPr>
+        <p:spPr>
+          <a:xfrm>
+            <a:off x="457200" y="2501798"/>
+            <a:ext cx="951348" cy="518159"/>
+          </a:xfrm>
+          <a:prstGeom prst="rect">
+            <a:avLst/>
+          </a:prstGeom>
+          <a:noFill/>
+        </p:spPr>
+        <p:txBody>
+          <a:bodyPr wrap="none" lIns="0" rIns="0">
+            <a:noAutofit/>
+          </a:bodyPr>
+          <a:lstStyle/>
+          <a:p>
+            <a:pPr algn="l"/>
+            <a:r>
+              <a:rPr sz="3400" b="1" i="0">
+                <a:solidFill>
+                  <a:srgbClr val="0072CE"/>
+                </a:solidFill>
+                <a:latin typeface="Arial"/>
+              </a:rPr>
+              <a:t>02</a:t>
+            </a:r>
+          </a:p>
+        </p:txBody>
+      </p:sp>
+      <p:sp>
+        <p:nvSpPr>
+          <p:cNvPr id="10" name="TextBox 9"/>
+          <p:cNvSpPr/>
+          <p:nvPr>
+            <p:ph type="body" idx="5"/>
+          </p:nvPr>
+        </p:nvSpPr>
+        <p:spPr>
+          <a:xfrm>
+            <a:off x="1371600" y="2501798"/>
+            <a:ext cx="10363200" cy="518159"/>
+          </a:xfrm>
+          <a:prstGeom prst="rect">
+            <a:avLst/>
+          </a:prstGeom>
+          <a:noFill/>
+        </p:spPr>
+        <p:txBody>
+          <a:bodyPr wrap="none" lIns="0" rIns="0">
+            <a:noAutofit/>
+          </a:bodyPr>
+          <a:lstStyle/>
+          <a:p>
+            <a:pPr algn="l"/>
+            <a:r>
+              <a:rPr sz="3400" b="0" i="0">
+                <a:solidFill>
+                  <a:srgbClr val="0A2240"/>
+                </a:solidFill>
+                <a:latin typeface="Arial"/>
+              </a:rPr>
+              <a:t>Customer and market signals</a:t>
+            </a:r>
+          </a:p>
+        </p:txBody>
+      </p:sp>
+      <p:sp>
+        <p:nvSpPr>
+          <p:cNvPr id="11" name="TextBox 10"/>
+          <p:cNvSpPr/>
+          <p:nvPr>
+            <p:ph type="body" idx="6"/>
+          </p:nvPr>
+        </p:nvSpPr>
+        <p:spPr>
+          <a:xfrm>
+            <a:off x="457200" y="3385108"/>
+            <a:ext cx="951348" cy="518159"/>
+          </a:xfrm>
+          <a:prstGeom prst="rect">
+            <a:avLst/>
+          </a:prstGeom>
+          <a:noFill/>
+        </p:spPr>
+        <p:txBody>
+          <a:bodyPr wrap="none" lIns="0" rIns="0">
+            <a:noAutofit/>
+          </a:bodyPr>
+          <a:lstStyle/>
+          <a:p>
+            <a:pPr algn="l"/>
+            <a:r>
+              <a:rPr sz="3400" b="1" i="0">
+                <a:solidFill>
+                  <a:srgbClr val="0072CE"/>
+                </a:solidFill>
+                <a:latin typeface="Arial"/>
+              </a:rPr>
+              <a:t>03</a:t>
+            </a:r>
+          </a:p>
+        </p:txBody>
+      </p:sp>
+      <p:sp>
+        <p:nvSpPr>
+          <p:cNvPr id="12" name="TextBox 11"/>
+          <p:cNvSpPr/>
+          <p:nvPr>
+            <p:ph type="body" idx="7"/>
+          </p:nvPr>
+        </p:nvSpPr>
+        <p:spPr>
+          <a:xfrm>
+            <a:off x="1371600" y="3385108"/>
+            <a:ext cx="10363200" cy="518159"/>
+          </a:xfrm>
+          <a:prstGeom prst="rect">
+            <a:avLst/>
+          </a:prstGeom>
+          <a:noFill/>
+        </p:spPr>
+        <p:txBody>
+          <a:bodyPr wrap="none" lIns="0" rIns="0">
+            <a:noAutofit/>
+          </a:bodyPr>
+          <a:lstStyle/>
+          <a:p>
+            <a:pPr algn="l"/>
+            <a:r>
+              <a:rPr sz="3400" b="0" i="0">
+                <a:solidFill>
+                  <a:srgbClr val="0A2240"/>
+                </a:solidFill>
+                <a:latin typeface="Arial"/>
+              </a:rPr>
+              <a:t>Operational health and risks</a:t>
+            </a:r>
+          </a:p>
+        </p:txBody>
+      </p:sp>
+      <p:sp>
+        <p:nvSpPr>
+          <p:cNvPr id="13" name="TextBox 12"/>
+          <p:cNvSpPr/>
+          <p:nvPr>
+            <p:ph type="body" idx="8"/>
+          </p:nvPr>
+        </p:nvSpPr>
+        <p:spPr>
+          <a:xfrm>
+            <a:off x="457200" y="4268418"/>
+            <a:ext cx="951348" cy="518159"/>
+          </a:xfrm>
+          <a:prstGeom prst="rect">
+            <a:avLst/>
+          </a:prstGeom>
+          <a:noFill/>
+        </p:spPr>
+        <p:txBody>
+          <a:bodyPr wrap="none" lIns="0" rIns="0">
+            <a:noAutofit/>
+          </a:bodyPr>
+          <a:lstStyle/>
+          <a:p>
+            <a:pPr algn="l"/>
+            <a:r>
+              <a:rPr sz="3400" b="1" i="0">
+                <a:solidFill>
+                  <a:srgbClr val="0072CE"/>
+                </a:solidFill>
+                <a:latin typeface="Arial"/>
+              </a:rPr>
+              <a:t>04</a:t>
+            </a:r>
+          </a:p>
+        </p:txBody>
+      </p:sp>
+      <p:sp>
+        <p:nvSpPr>
+          <p:cNvPr id="14" name="TextBox 13"/>
+          <p:cNvSpPr/>
+          <p:nvPr>
+            <p:ph type="body" idx="9"/>
+          </p:nvPr>
+        </p:nvSpPr>
+        <p:spPr>
+          <a:xfrm>
+            <a:off x="1371600" y="4268418"/>
+            <a:ext cx="10363200" cy="518159"/>
+          </a:xfrm>
+          <a:prstGeom prst="rect">
+            <a:avLst/>
+          </a:prstGeom>
+          <a:noFill/>
+        </p:spPr>
+        <p:txBody>
+          <a:bodyPr wrap="none" lIns="0" rIns="0">
+            <a:noAutofit/>
+          </a:bodyPr>
+          <a:lstStyle/>
+          <a:p>
+            <a:pPr algn="l"/>
+            <a:r>
+              <a:rPr sz="3400" b="0" i="0">
+                <a:solidFill>
+                  <a:srgbClr val="0A2240"/>
+                </a:solidFill>
+                <a:latin typeface="Arial"/>
+              </a:rPr>
+              <a:t>Roadmap for next quarter</a:t>
+            </a:r>
+          </a:p>
+        </p:txBody>
+      </p:sp>
+      <p:sp>
+        <p:nvSpPr>
+          <p:cNvPr id="15" name="TextBox 14"/>
+          <p:cNvSpPr/>
+          <p:nvPr>
+            <p:ph type="body" idx="13"/>
+          </p:nvPr>
+        </p:nvSpPr>
+        <p:spPr>
+          <a:xfrm>
+            <a:off x="457200" y="5151728"/>
+            <a:ext cx="951348" cy="518159"/>
+          </a:xfrm>
+          <a:prstGeom prst="rect">
+            <a:avLst/>
+          </a:prstGeom>
+          <a:noFill/>
+        </p:spPr>
+        <p:txBody>
+          <a:bodyPr wrap="none" lIns="0" rIns="0">
+            <a:noAutofit/>
+          </a:bodyPr>
+          <a:lstStyle/>
+          <a:p>
+            <a:pPr algn="l"/>
+            <a:r>
+              <a:rPr sz="3400" b="1" i="0">
+                <a:solidFill>
+                  <a:srgbClr val="0072CE"/>
+                </a:solidFill>
+                <a:latin typeface="Arial"/>
+              </a:rPr>
+              <a:t>05</a:t>
+            </a:r>
+          </a:p>
+        </p:txBody>
+      </p:sp>
+      <p:sp>
+        <p:nvSpPr>
+          <p:cNvPr id="16" name="TextBox 15"/>
+          <p:cNvSpPr/>
+          <p:nvPr>
+            <p:ph type="body" idx="14"/>
+          </p:nvPr>
+        </p:nvSpPr>
+        <p:spPr>
+          <a:xfrm>
+            <a:off x="1371600" y="5151728"/>
+            <a:ext cx="10363200" cy="518159"/>
+          </a:xfrm>
+          <a:prstGeom prst="rect">
+            <a:avLst/>
+          </a:prstGeom>
+          <a:noFill/>
+        </p:spPr>
+        <p:txBody>
+          <a:bodyPr wrap="none" lIns="0" rIns="0">
+            <a:noAutofit/>
+          </a:bodyPr>
+          <a:lstStyle/>
+          <a:p>
+            <a:pPr algn="l"/>
+            <a:r>
+              <a:rPr sz="3400" b="0" i="0">
+                <a:solidFill>
+                  <a:srgbClr val="0A2240"/>
+                </a:solidFill>
+                <a:latin typeface="Arial"/>
+              </a:rPr>
+              <a:t>Decisions we need today</a:t>
             </a:r>
           </a:p>
         </p:txBody>
@@ -7359,511 +7394,6 @@
 
 <file path=ppt/slideLayouts/slideLayout20.xml><?xml version="1.0" encoding="utf-8"?>
 <p:sldLayout xmlns:a="http://schemas.openxmlformats.org/drawingml/2006/main" xmlns:r="http://schemas.openxmlformats.org/officeDocument/2006/relationships" xmlns:p="http://schemas.openxmlformats.org/presentationml/2006/main" type="blank" preserve="1">
-  <p:cSld name="slidekit · Agenda">
-    <p:bg>
-      <p:bgPr>
-        <a:solidFill>
-          <a:srgbClr val="FFFFFF"/>
-        </a:solidFill>
-        <a:effectLst/>
-      </p:bgPr>
-    </p:bg>
-    <p:spTree>
-      <p:nvGrpSpPr>
-        <p:cNvPr id="1" name=""/>
-        <p:cNvGrpSpPr/>
-        <p:nvPr/>
-      </p:nvGrpSpPr>
-      <p:grpSpPr>
-        <a:xfrm>
-          <a:off x="0" y="0"/>
-          <a:ext cx="0" cy="0"/>
-          <a:chOff x="0" y="0"/>
-          <a:chExt cx="0" cy="0"/>
-        </a:xfrm>
-      </p:grpSpPr>
-      <p:sp>
-        <p:nvSpPr>
-          <p:cNvPr id="4" name="Slide Number Placeholder 3"/>
-          <p:cNvSpPr>
-            <a:spLocks noGrp="1"/>
-          </p:cNvSpPr>
-          <p:nvPr>
-            <p:ph type="sldNum" sz="quarter" idx="12"/>
-          </p:nvPr>
-        </p:nvSpPr>
-        <p:spPr>
-          <a:xfrm>
-            <a:off x="11186160" y="6035040"/>
-            <a:ext cx="548640" cy="365760"/>
-          </a:xfrm>
-        </p:spPr>
-        <p:txBody>
-          <a:bodyPr/>
-          <a:lstStyle/>
-          <a:p>
-            <a:fld id="{C1FF6DA9-008F-8B48-92A6-B652298478BF}" type="slidenum">
-              <a:rPr lang="en-US" smtClean="0"/>
-              <a:t>‹#›</a:t>
-            </a:fld>
-            <a:endParaRPr lang="en-US"/>
-          </a:p>
-        </p:txBody>
-      </p:sp>
-      <p:sp>
-        <p:nvSpPr>
-          <p:cNvPr id="5" name="TextBox 4"/>
-          <p:cNvSpPr/>
-          <p:nvPr>
-            <p:ph type="title"/>
-          </p:nvPr>
-        </p:nvSpPr>
-        <p:spPr>
-          <a:xfrm>
-            <a:off x="457200" y="457200"/>
-            <a:ext cx="11277600" cy="768096"/>
-          </a:xfrm>
-          <a:prstGeom prst="rect">
-            <a:avLst/>
-          </a:prstGeom>
-          <a:noFill/>
-        </p:spPr>
-        <p:txBody>
-          <a:bodyPr wrap="none" lIns="0" rIns="0">
-            <a:noAutofit/>
-          </a:bodyPr>
-          <a:lstStyle/>
-          <a:p>
-            <a:pPr algn="l"/>
-            <a:r>
-              <a:rPr sz="4200" b="1" i="0">
-                <a:solidFill>
-                  <a:srgbClr val="0072CE"/>
-                </a:solidFill>
-                <a:latin typeface="Arial"/>
-              </a:rPr>
-              <a:t>What We Will Cover</a:t>
-            </a:r>
-          </a:p>
-        </p:txBody>
-      </p:sp>
-      <p:sp>
-        <p:nvSpPr>
-          <p:cNvPr id="6" name="Rectangle 5"/>
-          <p:cNvSpPr/>
-          <p:nvPr>
-            <p:ph type="body" idx="1"/>
-          </p:nvPr>
-        </p:nvSpPr>
-        <p:spPr>
-          <a:xfrm>
-            <a:off x="457200" y="1280160"/>
-            <a:ext cx="11277600" cy="64008"/>
-          </a:xfrm>
-          <a:prstGeom prst="rect">
-            <a:avLst/>
-          </a:prstGeom>
-          <a:solidFill>
-            <a:srgbClr val="0072CE"/>
-          </a:solidFill>
-          <a:ln>
-            <a:noFill/>
-          </a:ln>
-          <a:effectLst/>
-        </p:spPr>
-        <p:txBody>
-          <a:bodyPr rtlCol="0" anchor="ctr"/>
-          <a:lstStyle/>
-          <a:p>
-            <a:pPr algn="ctr"/>
-          </a:p>
-        </p:txBody>
-      </p:sp>
-      <p:sp>
-        <p:nvSpPr>
-          <p:cNvPr id="7" name="TextBox 6"/>
-          <p:cNvSpPr/>
-          <p:nvPr>
-            <p:ph type="body" idx="2"/>
-          </p:nvPr>
-        </p:nvSpPr>
-        <p:spPr>
-          <a:xfrm>
-            <a:off x="457200" y="1618488"/>
-            <a:ext cx="951348" cy="518159"/>
-          </a:xfrm>
-          <a:prstGeom prst="rect">
-            <a:avLst/>
-          </a:prstGeom>
-          <a:noFill/>
-        </p:spPr>
-        <p:txBody>
-          <a:bodyPr wrap="none" lIns="0" rIns="0">
-            <a:noAutofit/>
-          </a:bodyPr>
-          <a:lstStyle/>
-          <a:p>
-            <a:pPr algn="l"/>
-            <a:r>
-              <a:rPr sz="3400" b="1" i="0">
-                <a:solidFill>
-                  <a:srgbClr val="0072CE"/>
-                </a:solidFill>
-                <a:latin typeface="Arial"/>
-              </a:rPr>
-              <a:t>01</a:t>
-            </a:r>
-          </a:p>
-        </p:txBody>
-      </p:sp>
-      <p:sp>
-        <p:nvSpPr>
-          <p:cNvPr id="8" name="TextBox 7"/>
-          <p:cNvSpPr/>
-          <p:nvPr>
-            <p:ph type="body" idx="3"/>
-          </p:nvPr>
-        </p:nvSpPr>
-        <p:spPr>
-          <a:xfrm>
-            <a:off x="1371600" y="1618488"/>
-            <a:ext cx="10363200" cy="518159"/>
-          </a:xfrm>
-          <a:prstGeom prst="rect">
-            <a:avLst/>
-          </a:prstGeom>
-          <a:noFill/>
-        </p:spPr>
-        <p:txBody>
-          <a:bodyPr wrap="none" lIns="0" rIns="0">
-            <a:noAutofit/>
-          </a:bodyPr>
-          <a:lstStyle/>
-          <a:p>
-            <a:pPr algn="l"/>
-            <a:r>
-              <a:rPr sz="3400" b="0" i="0">
-                <a:solidFill>
-                  <a:srgbClr val="0A2240"/>
-                </a:solidFill>
-                <a:latin typeface="Arial"/>
-              </a:rPr>
-              <a:t>Performance against targets</a:t>
-            </a:r>
-          </a:p>
-        </p:txBody>
-      </p:sp>
-      <p:sp>
-        <p:nvSpPr>
-          <p:cNvPr id="9" name="TextBox 8"/>
-          <p:cNvSpPr/>
-          <p:nvPr>
-            <p:ph type="body" idx="4"/>
-          </p:nvPr>
-        </p:nvSpPr>
-        <p:spPr>
-          <a:xfrm>
-            <a:off x="457200" y="2501798"/>
-            <a:ext cx="951348" cy="518159"/>
-          </a:xfrm>
-          <a:prstGeom prst="rect">
-            <a:avLst/>
-          </a:prstGeom>
-          <a:noFill/>
-        </p:spPr>
-        <p:txBody>
-          <a:bodyPr wrap="none" lIns="0" rIns="0">
-            <a:noAutofit/>
-          </a:bodyPr>
-          <a:lstStyle/>
-          <a:p>
-            <a:pPr algn="l"/>
-            <a:r>
-              <a:rPr sz="3400" b="1" i="0">
-                <a:solidFill>
-                  <a:srgbClr val="0072CE"/>
-                </a:solidFill>
-                <a:latin typeface="Arial"/>
-              </a:rPr>
-              <a:t>02</a:t>
-            </a:r>
-          </a:p>
-        </p:txBody>
-      </p:sp>
-      <p:sp>
-        <p:nvSpPr>
-          <p:cNvPr id="10" name="TextBox 9"/>
-          <p:cNvSpPr/>
-          <p:nvPr>
-            <p:ph type="body" idx="5"/>
-          </p:nvPr>
-        </p:nvSpPr>
-        <p:spPr>
-          <a:xfrm>
-            <a:off x="1371600" y="2501798"/>
-            <a:ext cx="10363200" cy="518159"/>
-          </a:xfrm>
-          <a:prstGeom prst="rect">
-            <a:avLst/>
-          </a:prstGeom>
-          <a:noFill/>
-        </p:spPr>
-        <p:txBody>
-          <a:bodyPr wrap="none" lIns="0" rIns="0">
-            <a:noAutofit/>
-          </a:bodyPr>
-          <a:lstStyle/>
-          <a:p>
-            <a:pPr algn="l"/>
-            <a:r>
-              <a:rPr sz="3400" b="0" i="0">
-                <a:solidFill>
-                  <a:srgbClr val="0A2240"/>
-                </a:solidFill>
-                <a:latin typeface="Arial"/>
-              </a:rPr>
-              <a:t>Customer and market signals</a:t>
-            </a:r>
-          </a:p>
-        </p:txBody>
-      </p:sp>
-      <p:sp>
-        <p:nvSpPr>
-          <p:cNvPr id="11" name="TextBox 10"/>
-          <p:cNvSpPr/>
-          <p:nvPr>
-            <p:ph type="body" idx="6"/>
-          </p:nvPr>
-        </p:nvSpPr>
-        <p:spPr>
-          <a:xfrm>
-            <a:off x="457200" y="3385108"/>
-            <a:ext cx="951348" cy="518159"/>
-          </a:xfrm>
-          <a:prstGeom prst="rect">
-            <a:avLst/>
-          </a:prstGeom>
-          <a:noFill/>
-        </p:spPr>
-        <p:txBody>
-          <a:bodyPr wrap="none" lIns="0" rIns="0">
-            <a:noAutofit/>
-          </a:bodyPr>
-          <a:lstStyle/>
-          <a:p>
-            <a:pPr algn="l"/>
-            <a:r>
-              <a:rPr sz="3400" b="1" i="0">
-                <a:solidFill>
-                  <a:srgbClr val="0072CE"/>
-                </a:solidFill>
-                <a:latin typeface="Arial"/>
-              </a:rPr>
-              <a:t>03</a:t>
-            </a:r>
-          </a:p>
-        </p:txBody>
-      </p:sp>
-      <p:sp>
-        <p:nvSpPr>
-          <p:cNvPr id="12" name="TextBox 11"/>
-          <p:cNvSpPr/>
-          <p:nvPr>
-            <p:ph type="body" idx="7"/>
-          </p:nvPr>
-        </p:nvSpPr>
-        <p:spPr>
-          <a:xfrm>
-            <a:off x="1371600" y="3385108"/>
-            <a:ext cx="10363200" cy="518159"/>
-          </a:xfrm>
-          <a:prstGeom prst="rect">
-            <a:avLst/>
-          </a:prstGeom>
-          <a:noFill/>
-        </p:spPr>
-        <p:txBody>
-          <a:bodyPr wrap="none" lIns="0" rIns="0">
-            <a:noAutofit/>
-          </a:bodyPr>
-          <a:lstStyle/>
-          <a:p>
-            <a:pPr algn="l"/>
-            <a:r>
-              <a:rPr sz="3400" b="0" i="0">
-                <a:solidFill>
-                  <a:srgbClr val="0A2240"/>
-                </a:solidFill>
-                <a:latin typeface="Arial"/>
-              </a:rPr>
-              <a:t>Operational health and risks</a:t>
-            </a:r>
-          </a:p>
-        </p:txBody>
-      </p:sp>
-      <p:sp>
-        <p:nvSpPr>
-          <p:cNvPr id="13" name="TextBox 12"/>
-          <p:cNvSpPr/>
-          <p:nvPr>
-            <p:ph type="body" idx="8"/>
-          </p:nvPr>
-        </p:nvSpPr>
-        <p:spPr>
-          <a:xfrm>
-            <a:off x="457200" y="4268418"/>
-            <a:ext cx="951348" cy="518159"/>
-          </a:xfrm>
-          <a:prstGeom prst="rect">
-            <a:avLst/>
-          </a:prstGeom>
-          <a:noFill/>
-        </p:spPr>
-        <p:txBody>
-          <a:bodyPr wrap="none" lIns="0" rIns="0">
-            <a:noAutofit/>
-          </a:bodyPr>
-          <a:lstStyle/>
-          <a:p>
-            <a:pPr algn="l"/>
-            <a:r>
-              <a:rPr sz="3400" b="1" i="0">
-                <a:solidFill>
-                  <a:srgbClr val="0072CE"/>
-                </a:solidFill>
-                <a:latin typeface="Arial"/>
-              </a:rPr>
-              <a:t>04</a:t>
-            </a:r>
-          </a:p>
-        </p:txBody>
-      </p:sp>
-      <p:sp>
-        <p:nvSpPr>
-          <p:cNvPr id="14" name="TextBox 13"/>
-          <p:cNvSpPr/>
-          <p:nvPr>
-            <p:ph type="body" idx="9"/>
-          </p:nvPr>
-        </p:nvSpPr>
-        <p:spPr>
-          <a:xfrm>
-            <a:off x="1371600" y="4268418"/>
-            <a:ext cx="10363200" cy="518159"/>
-          </a:xfrm>
-          <a:prstGeom prst="rect">
-            <a:avLst/>
-          </a:prstGeom>
-          <a:noFill/>
-        </p:spPr>
-        <p:txBody>
-          <a:bodyPr wrap="none" lIns="0" rIns="0">
-            <a:noAutofit/>
-          </a:bodyPr>
-          <a:lstStyle/>
-          <a:p>
-            <a:pPr algn="l"/>
-            <a:r>
-              <a:rPr sz="3400" b="0" i="0">
-                <a:solidFill>
-                  <a:srgbClr val="0A2240"/>
-                </a:solidFill>
-                <a:latin typeface="Arial"/>
-              </a:rPr>
-              <a:t>Roadmap for next quarter</a:t>
-            </a:r>
-          </a:p>
-        </p:txBody>
-      </p:sp>
-      <p:sp>
-        <p:nvSpPr>
-          <p:cNvPr id="15" name="TextBox 14"/>
-          <p:cNvSpPr/>
-          <p:nvPr>
-            <p:ph type="body" idx="13"/>
-          </p:nvPr>
-        </p:nvSpPr>
-        <p:spPr>
-          <a:xfrm>
-            <a:off x="457200" y="5151728"/>
-            <a:ext cx="951348" cy="518159"/>
-          </a:xfrm>
-          <a:prstGeom prst="rect">
-            <a:avLst/>
-          </a:prstGeom>
-          <a:noFill/>
-        </p:spPr>
-        <p:txBody>
-          <a:bodyPr wrap="none" lIns="0" rIns="0">
-            <a:noAutofit/>
-          </a:bodyPr>
-          <a:lstStyle/>
-          <a:p>
-            <a:pPr algn="l"/>
-            <a:r>
-              <a:rPr sz="3400" b="1" i="0">
-                <a:solidFill>
-                  <a:srgbClr val="0072CE"/>
-                </a:solidFill>
-                <a:latin typeface="Arial"/>
-              </a:rPr>
-              <a:t>05</a:t>
-            </a:r>
-          </a:p>
-        </p:txBody>
-      </p:sp>
-      <p:sp>
-        <p:nvSpPr>
-          <p:cNvPr id="16" name="TextBox 15"/>
-          <p:cNvSpPr/>
-          <p:nvPr>
-            <p:ph type="body" idx="14"/>
-          </p:nvPr>
-        </p:nvSpPr>
-        <p:spPr>
-          <a:xfrm>
-            <a:off x="1371600" y="5151728"/>
-            <a:ext cx="10363200" cy="518159"/>
-          </a:xfrm>
-          <a:prstGeom prst="rect">
-            <a:avLst/>
-          </a:prstGeom>
-          <a:noFill/>
-        </p:spPr>
-        <p:txBody>
-          <a:bodyPr wrap="none" lIns="0" rIns="0">
-            <a:noAutofit/>
-          </a:bodyPr>
-          <a:lstStyle/>
-          <a:p>
-            <a:pPr algn="l"/>
-            <a:r>
-              <a:rPr sz="3400" b="0" i="0">
-                <a:solidFill>
-                  <a:srgbClr val="0A2240"/>
-                </a:solidFill>
-                <a:latin typeface="Arial"/>
-              </a:rPr>
-              <a:t>Decisions we need today</a:t>
-            </a:r>
-          </a:p>
-        </p:txBody>
-      </p:sp>
-    </p:spTree>
-    <p:extLst>
-      <p:ext uri="{BB962C8B-B14F-4D97-AF65-F5344CB8AC3E}">
-        <p14:creationId xmlns:p14="http://schemas.microsoft.com/office/powerpoint/2010/main" val="1212999818"/>
-      </p:ext>
-    </p:extLst>
-  </p:cSld>
-  <p:clrMapOvr>
-    <a:masterClrMapping/>
-  </p:clrMapOvr>
-</p:sldLayout>
-</file>
-
-<file path=ppt/slideLayouts/slideLayout21.xml><?xml version="1.0" encoding="utf-8"?>
-<p:sldLayout xmlns:a="http://schemas.openxmlformats.org/drawingml/2006/main" xmlns:r="http://schemas.openxmlformats.org/officeDocument/2006/relationships" xmlns:p="http://schemas.openxmlformats.org/presentationml/2006/main" type="blank" preserve="1">
   <p:cSld name="slidekit · Big Number">
     <p:bg>
       <p:bgPr>
@@ -8034,7 +7564,7 @@
 </p:sldLayout>
 </file>
 
-<file path=ppt/slideLayouts/slideLayout22.xml><?xml version="1.0" encoding="utf-8"?>
+<file path=ppt/slideLayouts/slideLayout21.xml><?xml version="1.0" encoding="utf-8"?>
 <p:sldLayout xmlns:a="http://schemas.openxmlformats.org/drawingml/2006/main" xmlns:r="http://schemas.openxmlformats.org/officeDocument/2006/relationships" xmlns:p="http://schemas.openxmlformats.org/presentationml/2006/main" type="blank" preserve="1">
   <p:cSld name="slidekit · Pull Quote">
     <p:bg>
@@ -8097,8 +7627,8 @@
         </p:nvSpPr>
         <p:spPr>
           <a:xfrm>
-            <a:off x="457200" y="2301240"/>
-            <a:ext cx="128016" cy="2255520"/>
+            <a:off x="457200" y="2621280"/>
+            <a:ext cx="128016" cy="1615440"/>
           </a:xfrm>
           <a:prstGeom prst="rect">
             <a:avLst/>
@@ -8129,16 +7659,16 @@
         </p:nvSpPr>
         <p:spPr>
           <a:xfrm>
-            <a:off x="996696" y="2301240"/>
-            <a:ext cx="10738104" cy="1371600"/>
-          </a:xfrm>
-          <a:prstGeom prst="rect">
-            <a:avLst/>
-          </a:prstGeom>
-          <a:noFill/>
-        </p:spPr>
-        <p:txBody>
-          <a:bodyPr wrap="square" lIns="0" rIns="0">
+            <a:off x="996696" y="2621280"/>
+            <a:ext cx="11195304" cy="731520"/>
+          </a:xfrm>
+          <a:prstGeom prst="rect">
+            <a:avLst/>
+          </a:prstGeom>
+          <a:noFill/>
+        </p:spPr>
+        <p:txBody>
+          <a:bodyPr wrap="none" lIns="0" rIns="0">
             <a:noAutofit/>
           </a:bodyPr>
           <a:lstStyle/>
@@ -8151,7 +7681,7 @@
                 </a:solidFill>
                 <a:latin typeface="Arial"/>
               </a:rPr>
-              <a:t>"We stopped buying tools and started buying outcomes."</a:t>
+              <a:t>"We buy outcomes, not tools."</a:t>
             </a:r>
           </a:p>
         </p:txBody>
@@ -8166,7 +7696,7 @@
         </p:nvSpPr>
         <p:spPr>
           <a:xfrm>
-            <a:off x="996696" y="3947160"/>
+            <a:off x="996696" y="3627120"/>
             <a:ext cx="11195304" cy="609600"/>
           </a:xfrm>
           <a:prstGeom prst="rect">
@@ -8184,7 +7714,7 @@
             <a:r>
               <a:rPr sz="3400" b="0" i="0">
                 <a:solidFill>
-                  <a:srgbClr val="5B6B82"/>
+                  <a:srgbClr val="0A2240"/>
                 </a:solidFill>
                 <a:latin typeface="Arial"/>
               </a:rPr>
@@ -8206,7 +7736,7 @@
 </p:sldLayout>
 </file>
 
-<file path=ppt/slideLayouts/slideLayout23.xml><?xml version="1.0" encoding="utf-8"?>
+<file path=ppt/slideLayouts/slideLayout22.xml><?xml version="1.0" encoding="utf-8"?>
 <p:sldLayout xmlns:a="http://schemas.openxmlformats.org/drawingml/2006/main" xmlns:r="http://schemas.openxmlformats.org/officeDocument/2006/relationships" xmlns:p="http://schemas.openxmlformats.org/presentationml/2006/main" type="blank" preserve="1">
   <p:cSld name="slidekit · Definition">
     <p:bg>
@@ -8269,8 +7799,8 @@
         </p:nvSpPr>
         <p:spPr>
           <a:xfrm>
-            <a:off x="457200" y="1965960"/>
-            <a:ext cx="128016" cy="2926080"/>
+            <a:off x="457200" y="2484120"/>
+            <a:ext cx="128016" cy="1889760"/>
           </a:xfrm>
           <a:prstGeom prst="rect">
             <a:avLst/>
@@ -8301,7 +7831,7 @@
         </p:nvSpPr>
         <p:spPr>
           <a:xfrm>
-            <a:off x="996696" y="1965960"/>
+            <a:off x="996696" y="2484120"/>
             <a:ext cx="11195304" cy="1005840"/>
           </a:xfrm>
           <a:prstGeom prst="rect">
@@ -8338,16 +7868,16 @@
         </p:nvSpPr>
         <p:spPr>
           <a:xfrm>
-            <a:off x="996696" y="3246120"/>
-            <a:ext cx="10738104" cy="1645920"/>
-          </a:xfrm>
-          <a:prstGeom prst="rect">
-            <a:avLst/>
-          </a:prstGeom>
-          <a:noFill/>
-        </p:spPr>
-        <p:txBody>
-          <a:bodyPr wrap="square" lIns="0" rIns="0">
+            <a:off x="996696" y="3764280"/>
+            <a:ext cx="11195304" cy="609600"/>
+          </a:xfrm>
+          <a:prstGeom prst="rect">
+            <a:avLst/>
+          </a:prstGeom>
+          <a:noFill/>
+        </p:spPr>
+        <p:txBody>
+          <a:bodyPr wrap="none" lIns="0" rIns="0">
             <a:noAutofit/>
           </a:bodyPr>
           <a:lstStyle/>
@@ -8360,7 +7890,7 @@
                 </a:solidFill>
                 <a:latin typeface="Arial"/>
               </a:rPr>
-              <a:t>The percentage of recurring revenue retained from existing customers over a period, including expansion and after churn.</a:t>
+              <a:t>Revenue kept from existing customers.</a:t>
             </a:r>
           </a:p>
         </p:txBody>
@@ -8378,7 +7908,7 @@
 </p:sldLayout>
 </file>
 
-<file path=ppt/slideLayouts/slideLayout24.xml><?xml version="1.0" encoding="utf-8"?>
+<file path=ppt/slideLayouts/slideLayout23.xml><?xml version="1.0" encoding="utf-8"?>
 <p:sldLayout xmlns:a="http://schemas.openxmlformats.org/drawingml/2006/main" xmlns:r="http://schemas.openxmlformats.org/officeDocument/2006/relationships" xmlns:p="http://schemas.openxmlformats.org/presentationml/2006/main" type="blank" preserve="1">
   <p:cSld name="slidekit · Question">
     <p:bg>
@@ -8441,8 +7971,8 @@
         </p:nvSpPr>
         <p:spPr>
           <a:xfrm>
-            <a:off x="457200" y="2011680"/>
-            <a:ext cx="128016" cy="2834640"/>
+            <a:off x="457200" y="2926080"/>
+            <a:ext cx="128016" cy="1005840"/>
           </a:xfrm>
           <a:prstGeom prst="rect">
             <a:avLst/>
@@ -8473,16 +8003,16 @@
         </p:nvSpPr>
         <p:spPr>
           <a:xfrm>
-            <a:off x="996696" y="2011680"/>
-            <a:ext cx="10738104" cy="2834640"/>
-          </a:xfrm>
-          <a:prstGeom prst="rect">
-            <a:avLst/>
-          </a:prstGeom>
-          <a:noFill/>
-        </p:spPr>
-        <p:txBody>
-          <a:bodyPr wrap="square" lIns="0" rIns="0">
+            <a:off x="996696" y="2926080"/>
+            <a:ext cx="11195304" cy="1005840"/>
+          </a:xfrm>
+          <a:prstGeom prst="rect">
+            <a:avLst/>
+          </a:prstGeom>
+          <a:noFill/>
+        </p:spPr>
+        <p:txBody>
+          <a:bodyPr wrap="none" lIns="0" rIns="0">
             <a:noAutofit/>
           </a:bodyPr>
           <a:lstStyle/>
@@ -8495,7 +8025,7 @@
                 </a:solidFill>
                 <a:latin typeface="Arial"/>
               </a:rPr>
-              <a:t>What would we build if we trusted our customers completely?</a:t>
+              <a:t>What if we trusted users?</a:t>
             </a:r>
           </a:p>
         </p:txBody>
@@ -8513,7 +8043,7 @@
 </p:sldLayout>
 </file>
 
-<file path=ppt/slideLayouts/slideLayout25.xml><?xml version="1.0" encoding="utf-8"?>
+<file path=ppt/slideLayouts/slideLayout24.xml><?xml version="1.0" encoding="utf-8"?>
 <p:sldLayout xmlns:a="http://schemas.openxmlformats.org/drawingml/2006/main" xmlns:r="http://schemas.openxmlformats.org/officeDocument/2006/relationships" xmlns:p="http://schemas.openxmlformats.org/presentationml/2006/main" type="blank" preserve="1">
   <p:cSld name="slidekit · Bullet List">
     <p:bg>
@@ -8727,7 +8257,7 @@
 </p:sldLayout>
 </file>
 
-<file path=ppt/slideLayouts/slideLayout26.xml><?xml version="1.0" encoding="utf-8"?>
+<file path=ppt/slideLayouts/slideLayout25.xml><?xml version="1.0" encoding="utf-8"?>
 <p:sldLayout xmlns:a="http://schemas.openxmlformats.org/drawingml/2006/main" xmlns:r="http://schemas.openxmlformats.org/officeDocument/2006/relationships" xmlns:p="http://schemas.openxmlformats.org/presentationml/2006/main" type="blank" preserve="1">
   <p:cSld name="slidekit · Code Block">
     <p:bg>
@@ -8797,7 +8327,7 @@
             <a:avLst/>
           </a:prstGeom>
           <a:solidFill>
-            <a:srgbClr val="FF5F56"/>
+            <a:srgbClr val="FFFFFF"/>
           </a:solidFill>
           <a:ln>
             <a:noFill/>
@@ -8829,7 +8359,7 @@
             <a:avLst/>
           </a:prstGeom>
           <a:solidFill>
-            <a:srgbClr val="FFBD2E"/>
+            <a:srgbClr val="FFFFFF"/>
           </a:solidFill>
           <a:ln>
             <a:noFill/>
@@ -8861,7 +8391,7 @@
             <a:avLst/>
           </a:prstGeom>
           <a:solidFill>
-            <a:srgbClr val="27C93F"/>
+            <a:srgbClr val="FFFFFF"/>
           </a:solidFill>
           <a:ln>
             <a:noFill/>
@@ -8904,7 +8434,7 @@
             <a:r>
               <a:rPr sz="4200" b="0" i="0">
                 <a:solidFill>
-                  <a:srgbClr val="D4D4D4"/>
+                  <a:srgbClr val="FFFFFF"/>
                 </a:solidFill>
                 <a:latin typeface="Arial"/>
               </a:rPr>
@@ -8941,7 +8471,7 @@
             <a:r>
               <a:rPr sz="3400" b="0" i="0">
                 <a:solidFill>
-                  <a:srgbClr val="6A9955"/>
+                  <a:srgbClr val="FFFFFF"/>
                 </a:solidFill>
                 <a:latin typeface="Arial"/>
               </a:rPr>
@@ -8998,7 +8528,7 @@
         <p:spPr>
           <a:xfrm>
             <a:off x="1057461" y="2356103"/>
-            <a:ext cx="302848" cy="518159"/>
+            <a:ext cx="2524382" cy="518159"/>
           </a:xfrm>
           <a:prstGeom prst="rect">
             <a:avLst/>
@@ -9015,11 +8545,11 @@
             <a:r>
               <a:rPr sz="3400" b="0" i="0">
                 <a:solidFill>
-                  <a:srgbClr val="D4D4D4"/>
-                </a:solidFill>
-                <a:latin typeface="Arial"/>
-              </a:rPr>
-              <a:t> </a:t>
+                  <a:srgbClr val="FFFFFF"/>
+                </a:solidFill>
+                <a:latin typeface="Arial"/>
+              </a:rPr>
+              <a:t> main():</a:t>
             </a:r>
           </a:p>
         </p:txBody>
@@ -9034,8 +8564,8 @@
         </p:nvSpPr>
         <p:spPr>
           <a:xfrm>
-            <a:off x="1177429" y="2356103"/>
-            <a:ext cx="1680348" cy="518159"/>
+            <a:off x="457200" y="2874262"/>
+            <a:ext cx="7046475" cy="518159"/>
           </a:xfrm>
           <a:prstGeom prst="rect">
             <a:avLst/>
@@ -9052,11 +8582,11 @@
             <a:r>
               <a:rPr sz="3400" b="0" i="0">
                 <a:solidFill>
-                  <a:srgbClr val="DCDCAA"/>
-                </a:solidFill>
-                <a:latin typeface="Arial"/>
-              </a:rPr>
-              <a:t>main</a:t>
+                  <a:srgbClr val="FFFFFF"/>
+                </a:solidFill>
+                <a:latin typeface="Arial"/>
+              </a:rPr>
+              <a:t>    print("Hello, world!")</a:t>
             </a:r>
           </a:p>
         </p:txBody>
@@ -9071,8 +8601,8 @@
         </p:nvSpPr>
         <p:spPr>
           <a:xfrm>
-            <a:off x="2113347" y="2356103"/>
-            <a:ext cx="834964" cy="518159"/>
+            <a:off x="457200" y="3910580"/>
+            <a:ext cx="2140486" cy="518159"/>
           </a:xfrm>
           <a:prstGeom prst="rect">
             <a:avLst/>
@@ -9089,11 +8619,11 @@
             <a:r>
               <a:rPr sz="3400" b="0" i="0">
                 <a:solidFill>
-                  <a:srgbClr val="D4D4D4"/>
-                </a:solidFill>
-                <a:latin typeface="Arial"/>
-              </a:rPr>
-              <a:t>():</a:t>
+                  <a:srgbClr val="FFFFFF"/>
+                </a:solidFill>
+                <a:latin typeface="Arial"/>
+              </a:rPr>
+              <a:t>main()</a:t>
             </a:r>
           </a:p>
         </p:txBody>
@@ -9104,265 +8634,6 @@
           <p:cNvSpPr/>
           <p:nvPr>
             <p:ph type="body" idx="13"/>
-          </p:nvPr>
-        </p:nvSpPr>
-        <p:spPr>
-          <a:xfrm>
-            <a:off x="457200" y="2874262"/>
-            <a:ext cx="662751" cy="518159"/>
-          </a:xfrm>
-          <a:prstGeom prst="rect">
-            <a:avLst/>
-          </a:prstGeom>
-          <a:noFill/>
-        </p:spPr>
-        <p:txBody>
-          <a:bodyPr wrap="none" lIns="0" rIns="0">
-            <a:noAutofit/>
-          </a:bodyPr>
-          <a:lstStyle/>
-          <a:p>
-            <a:pPr algn="l"/>
-            <a:r>
-              <a:rPr sz="3400" b="0" i="0">
-                <a:solidFill>
-                  <a:srgbClr val="D4D4D4"/>
-                </a:solidFill>
-                <a:latin typeface="Arial"/>
-              </a:rPr>
-              <a:t>    </a:t>
-            </a:r>
-          </a:p>
-        </p:txBody>
-      </p:sp>
-      <p:sp>
-        <p:nvSpPr>
-          <p:cNvPr id="15" name="TextBox 14"/>
-          <p:cNvSpPr/>
-          <p:nvPr>
-            <p:ph type="body" idx="14"/>
-          </p:nvPr>
-        </p:nvSpPr>
-        <p:spPr>
-          <a:xfrm>
-            <a:off x="937071" y="2874262"/>
-            <a:ext cx="1526857" cy="518159"/>
-          </a:xfrm>
-          <a:prstGeom prst="rect">
-            <a:avLst/>
-          </a:prstGeom>
-          <a:noFill/>
-        </p:spPr>
-        <p:txBody>
-          <a:bodyPr wrap="none" lIns="0" rIns="0">
-            <a:noAutofit/>
-          </a:bodyPr>
-          <a:lstStyle/>
-          <a:p>
-            <a:pPr algn="l"/>
-            <a:r>
-              <a:rPr sz="3400" b="0" i="0">
-                <a:solidFill>
-                  <a:srgbClr val="DCDCAA"/>
-                </a:solidFill>
-                <a:latin typeface="Arial"/>
-              </a:rPr>
-              <a:t>print</a:t>
-            </a:r>
-          </a:p>
-        </p:txBody>
-      </p:sp>
-      <p:sp>
-        <p:nvSpPr>
-          <p:cNvPr id="16" name="TextBox 15"/>
-          <p:cNvSpPr/>
-          <p:nvPr>
-            <p:ph type="body" idx="15"/>
-          </p:nvPr>
-        </p:nvSpPr>
-        <p:spPr>
-          <a:xfrm>
-            <a:off x="1777057" y="2874262"/>
-            <a:ext cx="412948" cy="518159"/>
-          </a:xfrm>
-          <a:prstGeom prst="rect">
-            <a:avLst/>
-          </a:prstGeom>
-          <a:noFill/>
-        </p:spPr>
-        <p:txBody>
-          <a:bodyPr wrap="none" lIns="0" rIns="0">
-            <a:noAutofit/>
-          </a:bodyPr>
-          <a:lstStyle/>
-          <a:p>
-            <a:pPr algn="l"/>
-            <a:r>
-              <a:rPr sz="3400" b="0" i="0">
-                <a:solidFill>
-                  <a:srgbClr val="D4D4D4"/>
-                </a:solidFill>
-                <a:latin typeface="Arial"/>
-              </a:rPr>
-              <a:t>(</a:t>
-            </a:r>
-          </a:p>
-        </p:txBody>
-      </p:sp>
-      <p:sp>
-        <p:nvSpPr>
-          <p:cNvPr id="17" name="TextBox 16"/>
-          <p:cNvSpPr/>
-          <p:nvPr>
-            <p:ph type="body" idx="16"/>
-          </p:nvPr>
-        </p:nvSpPr>
-        <p:spPr>
-          <a:xfrm>
-            <a:off x="1920850" y="2874262"/>
-            <a:ext cx="4474566" cy="518159"/>
-          </a:xfrm>
-          <a:prstGeom prst="rect">
-            <a:avLst/>
-          </a:prstGeom>
-          <a:noFill/>
-        </p:spPr>
-        <p:txBody>
-          <a:bodyPr wrap="none" lIns="0" rIns="0">
-            <a:noAutofit/>
-          </a:bodyPr>
-          <a:lstStyle/>
-          <a:p>
-            <a:pPr algn="l"/>
-            <a:r>
-              <a:rPr sz="3400" b="0" i="0">
-                <a:solidFill>
-                  <a:srgbClr val="CE9178"/>
-                </a:solidFill>
-                <a:latin typeface="Arial"/>
-              </a:rPr>
-              <a:t>"Hello, world!"</a:t>
-            </a:r>
-          </a:p>
-        </p:txBody>
-      </p:sp>
-      <p:sp>
-        <p:nvSpPr>
-          <p:cNvPr id="18" name="TextBox 17"/>
-          <p:cNvSpPr/>
-          <p:nvPr>
-            <p:ph type="body" idx="17"/>
-          </p:nvPr>
-        </p:nvSpPr>
-        <p:spPr>
-          <a:xfrm>
-            <a:off x="4603155" y="2874262"/>
-            <a:ext cx="412948" cy="518159"/>
-          </a:xfrm>
-          <a:prstGeom prst="rect">
-            <a:avLst/>
-          </a:prstGeom>
-          <a:noFill/>
-        </p:spPr>
-        <p:txBody>
-          <a:bodyPr wrap="none" lIns="0" rIns="0">
-            <a:noAutofit/>
-          </a:bodyPr>
-          <a:lstStyle/>
-          <a:p>
-            <a:pPr algn="l"/>
-            <a:r>
-              <a:rPr sz="3400" b="0" i="0">
-                <a:solidFill>
-                  <a:srgbClr val="D4D4D4"/>
-                </a:solidFill>
-                <a:latin typeface="Arial"/>
-              </a:rPr>
-              <a:t>)</a:t>
-            </a:r>
-          </a:p>
-        </p:txBody>
-      </p:sp>
-      <p:sp>
-        <p:nvSpPr>
-          <p:cNvPr id="19" name="TextBox 18"/>
-          <p:cNvSpPr/>
-          <p:nvPr>
-            <p:ph type="body" idx="18"/>
-          </p:nvPr>
-        </p:nvSpPr>
-        <p:spPr>
-          <a:xfrm>
-            <a:off x="457200" y="3910580"/>
-            <a:ext cx="1680348" cy="518159"/>
-          </a:xfrm>
-          <a:prstGeom prst="rect">
-            <a:avLst/>
-          </a:prstGeom>
-          <a:noFill/>
-        </p:spPr>
-        <p:txBody>
-          <a:bodyPr wrap="none" lIns="0" rIns="0">
-            <a:noAutofit/>
-          </a:bodyPr>
-          <a:lstStyle/>
-          <a:p>
-            <a:pPr algn="l"/>
-            <a:r>
-              <a:rPr sz="3400" b="0" i="0">
-                <a:solidFill>
-                  <a:srgbClr val="DCDCAA"/>
-                </a:solidFill>
-                <a:latin typeface="Arial"/>
-              </a:rPr>
-              <a:t>main</a:t>
-            </a:r>
-          </a:p>
-        </p:txBody>
-      </p:sp>
-      <p:sp>
-        <p:nvSpPr>
-          <p:cNvPr id="20" name="TextBox 19"/>
-          <p:cNvSpPr/>
-          <p:nvPr>
-            <p:ph type="body" idx="19"/>
-          </p:nvPr>
-        </p:nvSpPr>
-        <p:spPr>
-          <a:xfrm>
-            <a:off x="1393118" y="3910580"/>
-            <a:ext cx="643017" cy="518159"/>
-          </a:xfrm>
-          <a:prstGeom prst="rect">
-            <a:avLst/>
-          </a:prstGeom>
-          <a:noFill/>
-        </p:spPr>
-        <p:txBody>
-          <a:bodyPr wrap="none" lIns="0" rIns="0">
-            <a:noAutofit/>
-          </a:bodyPr>
-          <a:lstStyle/>
-          <a:p>
-            <a:pPr algn="l"/>
-            <a:r>
-              <a:rPr sz="3400" b="0" i="0">
-                <a:solidFill>
-                  <a:srgbClr val="D4D4D4"/>
-                </a:solidFill>
-                <a:latin typeface="Arial"/>
-              </a:rPr>
-              <a:t>()</a:t>
-            </a:r>
-          </a:p>
-        </p:txBody>
-      </p:sp>
-      <p:sp>
-        <p:nvSpPr>
-          <p:cNvPr id="21" name="TextBox 20"/>
-          <p:cNvSpPr/>
-          <p:nvPr>
-            <p:ph type="body" idx="20"/>
           </p:nvPr>
         </p:nvSpPr>
         <p:spPr>
@@ -9385,7 +8656,7 @@
             <a:r>
               <a:rPr sz="3400" b="0" i="0">
                 <a:solidFill>
-                  <a:srgbClr val="4EC9B0"/>
+                  <a:srgbClr val="569CD6"/>
                 </a:solidFill>
                 <a:latin typeface="Arial"/>
               </a:rPr>
@@ -9396,10 +8667,10 @@
       </p:sp>
       <p:sp>
         <p:nvSpPr>
-          <p:cNvPr id="22" name="TextBox 21"/>
-          <p:cNvSpPr/>
-          <p:nvPr>
-            <p:ph type="body" idx="21"/>
+          <p:cNvPr id="15" name="TextBox 14"/>
+          <p:cNvSpPr/>
+          <p:nvPr>
+            <p:ph type="body" idx="14"/>
           </p:nvPr>
         </p:nvSpPr>
         <p:spPr>
@@ -9422,7 +8693,7 @@
             <a:r>
               <a:rPr sz="3400" b="0" i="0">
                 <a:solidFill>
-                  <a:srgbClr val="D4D4D4"/>
+                  <a:srgbClr val="FFFFFF"/>
                 </a:solidFill>
                 <a:latin typeface="Arial"/>
               </a:rPr>
@@ -9433,10 +8704,10 @@
       </p:sp>
       <p:sp>
         <p:nvSpPr>
-          <p:cNvPr id="23" name="TextBox 22"/>
-          <p:cNvSpPr/>
-          <p:nvPr>
-            <p:ph type="body" idx="22"/>
+          <p:cNvPr id="16" name="TextBox 15"/>
+          <p:cNvSpPr/>
+          <p:nvPr>
+            <p:ph type="body" idx="15"/>
           </p:nvPr>
         </p:nvSpPr>
         <p:spPr>
@@ -9459,7 +8730,7 @@
             <a:r>
               <a:rPr sz="3400" b="0" i="0">
                 <a:solidFill>
-                  <a:srgbClr val="D4D4D4"/>
+                  <a:srgbClr val="FFFFFF"/>
                 </a:solidFill>
                 <a:latin typeface="Arial"/>
               </a:rPr>
@@ -9481,7 +8752,7 @@
 </p:sldLayout>
 </file>
 
-<file path=ppt/slideLayouts/slideLayout27.xml><?xml version="1.0" encoding="utf-8"?>
+<file path=ppt/slideLayouts/slideLayout26.xml><?xml version="1.0" encoding="utf-8"?>
 <p:sldLayout xmlns:a="http://schemas.openxmlformats.org/drawingml/2006/main" xmlns:r="http://schemas.openxmlformats.org/officeDocument/2006/relationships" xmlns:p="http://schemas.openxmlformats.org/presentationml/2006/main" type="blank" preserve="1">
   <p:cSld name="slidekit · File Tree">
     <p:bg>
@@ -9590,7 +8861,7 @@
             </a:avLst>
           </a:prstGeom>
           <a:solidFill>
-            <a:srgbClr val="0C1A1C"/>
+            <a:srgbClr val="0A2240"/>
           </a:solidFill>
           <a:ln>
             <a:noFill/>
@@ -9633,7 +8904,7 @@
             <a:r>
               <a:rPr sz="2600" b="1" i="0">
                 <a:solidFill>
-                  <a:srgbClr val="569CD6"/>
+                  <a:srgbClr val="0072CE"/>
                 </a:solidFill>
                 <a:latin typeface="Courier New"/>
               </a:rPr>
@@ -9670,7 +8941,7 @@
             <a:r>
               <a:rPr sz="2600" b="0" i="0">
                 <a:solidFill>
-                  <a:srgbClr val="55707A"/>
+                  <a:srgbClr val="0072CE"/>
                 </a:solidFill>
                 <a:latin typeface="Courier New"/>
               </a:rPr>
@@ -9707,7 +8978,7 @@
             <a:r>
               <a:rPr sz="2600" b="1" i="0">
                 <a:solidFill>
-                  <a:srgbClr val="569CD6"/>
+                  <a:srgbClr val="0072CE"/>
                 </a:solidFill>
                 <a:latin typeface="Courier New"/>
               </a:rPr>
@@ -9744,7 +9015,7 @@
             <a:r>
               <a:rPr sz="2600" b="0" i="0">
                 <a:solidFill>
-                  <a:srgbClr val="55707A"/>
+                  <a:srgbClr val="0072CE"/>
                 </a:solidFill>
                 <a:latin typeface="Courier New"/>
               </a:rPr>
@@ -9781,7 +9052,7 @@
             <a:r>
               <a:rPr sz="2600" b="1" i="0">
                 <a:solidFill>
-                  <a:srgbClr val="569CD6"/>
+                  <a:srgbClr val="0072CE"/>
                 </a:solidFill>
                 <a:latin typeface="Courier New"/>
               </a:rPr>
@@ -9818,7 +9089,7 @@
             <a:r>
               <a:rPr sz="2600" b="0" i="0">
                 <a:solidFill>
-                  <a:srgbClr val="55707A"/>
+                  <a:srgbClr val="0072CE"/>
                 </a:solidFill>
                 <a:latin typeface="Courier New"/>
               </a:rPr>
@@ -9855,7 +9126,7 @@
             <a:r>
               <a:rPr sz="2600" b="0" i="0">
                 <a:solidFill>
-                  <a:srgbClr val="D4D4D4"/>
+                  <a:srgbClr val="FFFFFF"/>
                 </a:solidFill>
                 <a:latin typeface="Courier New"/>
               </a:rPr>
@@ -9892,7 +9163,7 @@
             <a:r>
               <a:rPr sz="2600" b="0" i="0">
                 <a:solidFill>
-                  <a:srgbClr val="55707A"/>
+                  <a:srgbClr val="0072CE"/>
                 </a:solidFill>
                 <a:latin typeface="Courier New"/>
               </a:rPr>
@@ -9929,7 +9200,7 @@
             <a:r>
               <a:rPr sz="2600" b="0" i="0">
                 <a:solidFill>
-                  <a:srgbClr val="D4D4D4"/>
+                  <a:srgbClr val="FFFFFF"/>
                 </a:solidFill>
                 <a:latin typeface="Courier New"/>
               </a:rPr>
@@ -9966,7 +9237,7 @@
             <a:r>
               <a:rPr sz="2600" b="0" i="0">
                 <a:solidFill>
-                  <a:srgbClr val="55707A"/>
+                  <a:srgbClr val="0072CE"/>
                 </a:solidFill>
                 <a:latin typeface="Courier New"/>
               </a:rPr>
@@ -10003,7 +9274,7 @@
             <a:r>
               <a:rPr sz="2600" b="0" i="0">
                 <a:solidFill>
-                  <a:srgbClr val="D4D4D4"/>
+                  <a:srgbClr val="FFFFFF"/>
                 </a:solidFill>
                 <a:latin typeface="Courier New"/>
               </a:rPr>
@@ -10040,7 +9311,7 @@
             <a:r>
               <a:rPr sz="2600" b="0" i="0">
                 <a:solidFill>
-                  <a:srgbClr val="55707A"/>
+                  <a:srgbClr val="0072CE"/>
                 </a:solidFill>
                 <a:latin typeface="Courier New"/>
               </a:rPr>
@@ -10077,7 +9348,7 @@
             <a:r>
               <a:rPr sz="2600" b="0" i="0">
                 <a:solidFill>
-                  <a:srgbClr val="D4D4D4"/>
+                  <a:srgbClr val="FFFFFF"/>
                 </a:solidFill>
                 <a:latin typeface="Courier New"/>
               </a:rPr>
@@ -10114,7 +9385,7 @@
             <a:r>
               <a:rPr sz="2600" b="0" i="0">
                 <a:solidFill>
-                  <a:srgbClr val="55707A"/>
+                  <a:srgbClr val="0072CE"/>
                 </a:solidFill>
                 <a:latin typeface="Courier New"/>
               </a:rPr>
@@ -10151,7 +9422,7 @@
             <a:r>
               <a:rPr sz="2600" b="0" i="0">
                 <a:solidFill>
-                  <a:srgbClr val="D4D4D4"/>
+                  <a:srgbClr val="FFFFFF"/>
                 </a:solidFill>
                 <a:latin typeface="Courier New"/>
               </a:rPr>
@@ -10173,7 +9444,7 @@
 </p:sldLayout>
 </file>
 
-<file path=ppt/slideLayouts/slideLayout28.xml><?xml version="1.0" encoding="utf-8"?>
+<file path=ppt/slideLayouts/slideLayout27.xml><?xml version="1.0" encoding="utf-8"?>
 <p:sldLayout xmlns:a="http://schemas.openxmlformats.org/drawingml/2006/main" xmlns:r="http://schemas.openxmlformats.org/officeDocument/2006/relationships" xmlns:p="http://schemas.openxmlformats.org/presentationml/2006/main" type="blank" preserve="1">
   <p:cSld name="slidekit · Numbered Steps">
     <p:bg>
@@ -10291,7 +9562,7 @@
             <a:r>
               <a:rPr sz="4200" b="1" i="0">
                 <a:solidFill>
-                  <a:srgbClr val="123A6B"/>
+                  <a:srgbClr val="0072CE"/>
                 </a:solidFill>
                 <a:latin typeface="Arial"/>
               </a:rPr>
@@ -10328,7 +9599,7 @@
             <a:r>
               <a:rPr sz="4200" b="1" i="0">
                 <a:solidFill>
-                  <a:srgbClr val="123A6B"/>
+                  <a:srgbClr val="0072CE"/>
                 </a:solidFill>
                 <a:latin typeface="Arial"/>
               </a:rPr>
@@ -10402,7 +9673,7 @@
             <a:r>
               <a:rPr sz="4200" b="1" i="0">
                 <a:solidFill>
-                  <a:srgbClr val="123A6B"/>
+                  <a:srgbClr val="0072CE"/>
                 </a:solidFill>
                 <a:latin typeface="Arial"/>
               </a:rPr>
@@ -10439,7 +9710,7 @@
             <a:r>
               <a:rPr sz="4200" b="1" i="0">
                 <a:solidFill>
-                  <a:srgbClr val="123A6B"/>
+                  <a:srgbClr val="0072CE"/>
                 </a:solidFill>
                 <a:latin typeface="Arial"/>
               </a:rPr>
@@ -10513,7 +9784,7 @@
             <a:r>
               <a:rPr sz="4200" b="1" i="0">
                 <a:solidFill>
-                  <a:srgbClr val="123A6B"/>
+                  <a:srgbClr val="0072CE"/>
                 </a:solidFill>
                 <a:latin typeface="Arial"/>
               </a:rPr>
@@ -10550,7 +9821,7 @@
             <a:r>
               <a:rPr sz="4200" b="1" i="0">
                 <a:solidFill>
-                  <a:srgbClr val="123A6B"/>
+                  <a:srgbClr val="0072CE"/>
                 </a:solidFill>
                 <a:latin typeface="Arial"/>
               </a:rPr>
@@ -10609,7 +9880,7 @@
 </p:sldLayout>
 </file>
 
-<file path=ppt/slideLayouts/slideLayout29.xml><?xml version="1.0" encoding="utf-8"?>
+<file path=ppt/slideLayouts/slideLayout28.xml><?xml version="1.0" encoding="utf-8"?>
 <p:sldLayout xmlns:a="http://schemas.openxmlformats.org/drawingml/2006/main" xmlns:r="http://schemas.openxmlformats.org/officeDocument/2006/relationships" xmlns:p="http://schemas.openxmlformats.org/presentationml/2006/main" type="blank" preserve="1">
   <p:cSld name="slidekit · Two Panel List">
     <p:bg>
@@ -10727,7 +9998,7 @@
             <a:r>
               <a:rPr sz="3400" b="1" i="0">
                 <a:solidFill>
-                  <a:srgbClr val="123A6B"/>
+                  <a:srgbClr val="0072CE"/>
                 </a:solidFill>
                 <a:latin typeface="Arial"/>
               </a:rPr>
@@ -10746,14 +10017,14 @@
         </p:nvSpPr>
         <p:spPr>
           <a:xfrm>
-            <a:off x="548640" y="2176271"/>
-            <a:ext cx="1650492" cy="54864"/>
+            <a:off x="457200" y="2176271"/>
+            <a:ext cx="1367718" cy="54864"/>
           </a:xfrm>
           <a:prstGeom prst="rect">
             <a:avLst/>
           </a:prstGeom>
           <a:solidFill>
-            <a:srgbClr val="123A6B"/>
+            <a:srgbClr val="0072CE"/>
           </a:solidFill>
           <a:ln>
             <a:noFill/>
@@ -10796,7 +10067,7 @@
             <a:r>
               <a:rPr sz="3400" b="1" i="0">
                 <a:solidFill>
-                  <a:srgbClr val="5B6B82"/>
+                  <a:srgbClr val="0A2240"/>
                 </a:solidFill>
                 <a:latin typeface="Arial"/>
               </a:rPr>
@@ -10815,14 +10086,14 @@
         </p:nvSpPr>
         <p:spPr>
           <a:xfrm>
-            <a:off x="6324600" y="2176271"/>
-            <a:ext cx="1650492" cy="54864"/>
+            <a:off x="6233160" y="2176271"/>
+            <a:ext cx="1007604" cy="54864"/>
           </a:xfrm>
           <a:prstGeom prst="rect">
             <a:avLst/>
           </a:prstGeom>
           <a:solidFill>
-            <a:srgbClr val="5B6B82"/>
+            <a:srgbClr val="0A2240"/>
           </a:solidFill>
           <a:ln>
             <a:noFill/>
@@ -11055,6 +10326,294 @@
                 <a:latin typeface="Arial"/>
               </a:rPr>
               <a:t>In-product live chat</a:t>
+            </a:r>
+          </a:p>
+        </p:txBody>
+      </p:sp>
+    </p:spTree>
+    <p:extLst>
+      <p:ext uri="{BB962C8B-B14F-4D97-AF65-F5344CB8AC3E}">
+        <p14:creationId xmlns:p14="http://schemas.microsoft.com/office/powerpoint/2010/main" val="1212999818"/>
+      </p:ext>
+    </p:extLst>
+  </p:cSld>
+  <p:clrMapOvr>
+    <a:masterClrMapping/>
+  </p:clrMapOvr>
+</p:sldLayout>
+</file>
+
+<file path=ppt/slideLayouts/slideLayout29.xml><?xml version="1.0" encoding="utf-8"?>
+<p:sldLayout xmlns:a="http://schemas.openxmlformats.org/drawingml/2006/main" xmlns:r="http://schemas.openxmlformats.org/officeDocument/2006/relationships" xmlns:p="http://schemas.openxmlformats.org/presentationml/2006/main" type="blank" preserve="1">
+  <p:cSld name="slidekit · This vs That">
+    <p:bg>
+      <p:bgPr>
+        <a:solidFill>
+          <a:srgbClr val="FFFFFF"/>
+        </a:solidFill>
+        <a:effectLst/>
+      </p:bgPr>
+    </p:bg>
+    <p:spTree>
+      <p:nvGrpSpPr>
+        <p:cNvPr id="1" name=""/>
+        <p:cNvGrpSpPr/>
+        <p:nvPr/>
+      </p:nvGrpSpPr>
+      <p:grpSpPr>
+        <a:xfrm>
+          <a:off x="0" y="0"/>
+          <a:ext cx="0" cy="0"/>
+          <a:chOff x="0" y="0"/>
+          <a:chExt cx="0" cy="0"/>
+        </a:xfrm>
+      </p:grpSpPr>
+      <p:sp>
+        <p:nvSpPr>
+          <p:cNvPr id="4" name="Slide Number Placeholder 3"/>
+          <p:cNvSpPr>
+            <a:spLocks noGrp="1"/>
+          </p:cNvSpPr>
+          <p:nvPr>
+            <p:ph type="sldNum" sz="quarter" idx="12"/>
+          </p:nvPr>
+        </p:nvSpPr>
+        <p:spPr>
+          <a:xfrm>
+            <a:off x="11186160" y="6035040"/>
+            <a:ext cx="548640" cy="365760"/>
+          </a:xfrm>
+        </p:spPr>
+        <p:txBody>
+          <a:bodyPr/>
+          <a:lstStyle/>
+          <a:p>
+            <a:fld id="{C1FF6DA9-008F-8B48-92A6-B652298478BF}" type="slidenum">
+              <a:rPr lang="en-US" smtClean="0"/>
+              <a:t>‹#›</a:t>
+            </a:fld>
+            <a:endParaRPr lang="en-US"/>
+          </a:p>
+        </p:txBody>
+      </p:sp>
+      <p:sp>
+        <p:nvSpPr>
+          <p:cNvPr id="5" name="TextBox 4"/>
+          <p:cNvSpPr/>
+          <p:nvPr>
+            <p:ph type="title"/>
+          </p:nvPr>
+        </p:nvSpPr>
+        <p:spPr>
+          <a:xfrm>
+            <a:off x="457200" y="457200"/>
+            <a:ext cx="11277600" cy="768096"/>
+          </a:xfrm>
+          <a:prstGeom prst="rect">
+            <a:avLst/>
+          </a:prstGeom>
+          <a:noFill/>
+        </p:spPr>
+        <p:txBody>
+          <a:bodyPr wrap="none" lIns="0" rIns="0">
+            <a:noAutofit/>
+          </a:bodyPr>
+          <a:lstStyle/>
+          <a:p>
+            <a:pPr algn="l"/>
+            <a:r>
+              <a:rPr sz="4200" b="1" i="0">
+                <a:solidFill>
+                  <a:srgbClr val="0072CE"/>
+                </a:solidFill>
+                <a:latin typeface="Arial"/>
+              </a:rPr>
+              <a:t>Cloud or On-Prem</a:t>
+            </a:r>
+          </a:p>
+        </p:txBody>
+      </p:sp>
+      <p:sp>
+        <p:nvSpPr>
+          <p:cNvPr id="6" name="TextBox 5"/>
+          <p:cNvSpPr/>
+          <p:nvPr>
+            <p:ph type="body" idx="1"/>
+          </p:nvPr>
+        </p:nvSpPr>
+        <p:spPr>
+          <a:xfrm>
+            <a:off x="457200" y="2776728"/>
+            <a:ext cx="4792980" cy="914400"/>
+          </a:xfrm>
+          <a:prstGeom prst="rect">
+            <a:avLst/>
+          </a:prstGeom>
+          <a:noFill/>
+        </p:spPr>
+        <p:txBody>
+          <a:bodyPr wrap="none" lIns="0" rIns="0">
+            <a:noAutofit/>
+          </a:bodyPr>
+          <a:lstStyle/>
+          <a:p>
+            <a:pPr algn="ctr"/>
+            <a:r>
+              <a:rPr sz="6000" b="1" i="0">
+                <a:solidFill>
+                  <a:srgbClr val="0A2240"/>
+                </a:solidFill>
+                <a:latin typeface="Arial"/>
+              </a:rPr>
+              <a:t>3 wks</a:t>
+            </a:r>
+          </a:p>
+        </p:txBody>
+      </p:sp>
+      <p:sp>
+        <p:nvSpPr>
+          <p:cNvPr id="7" name="TextBox 6"/>
+          <p:cNvSpPr/>
+          <p:nvPr>
+            <p:ph type="body" idx="2"/>
+          </p:nvPr>
+        </p:nvSpPr>
+        <p:spPr>
+          <a:xfrm>
+            <a:off x="0" y="3965448"/>
+            <a:ext cx="5707380" cy="518159"/>
+          </a:xfrm>
+          <a:prstGeom prst="rect">
+            <a:avLst/>
+          </a:prstGeom>
+          <a:noFill/>
+        </p:spPr>
+        <p:txBody>
+          <a:bodyPr wrap="none" lIns="0" rIns="0">
+            <a:noAutofit/>
+          </a:bodyPr>
+          <a:lstStyle/>
+          <a:p>
+            <a:pPr algn="ctr"/>
+            <a:r>
+              <a:rPr sz="3400" b="0" i="0">
+                <a:solidFill>
+                  <a:srgbClr val="0A2240"/>
+                </a:solidFill>
+                <a:latin typeface="Arial"/>
+              </a:rPr>
+              <a:t>Cloud time-to-launch</a:t>
+            </a:r>
+          </a:p>
+        </p:txBody>
+      </p:sp>
+      <p:sp>
+        <p:nvSpPr>
+          <p:cNvPr id="8" name="TextBox 7"/>
+          <p:cNvSpPr/>
+          <p:nvPr>
+            <p:ph type="body" idx="3"/>
+          </p:nvPr>
+        </p:nvSpPr>
+        <p:spPr>
+          <a:xfrm>
+            <a:off x="6941820" y="2776728"/>
+            <a:ext cx="4792980" cy="914400"/>
+          </a:xfrm>
+          <a:prstGeom prst="rect">
+            <a:avLst/>
+          </a:prstGeom>
+          <a:noFill/>
+        </p:spPr>
+        <p:txBody>
+          <a:bodyPr wrap="none" lIns="0" rIns="0">
+            <a:noAutofit/>
+          </a:bodyPr>
+          <a:lstStyle/>
+          <a:p>
+            <a:pPr algn="ctr"/>
+            <a:r>
+              <a:rPr sz="6000" b="1" i="0">
+                <a:solidFill>
+                  <a:srgbClr val="0A2240"/>
+                </a:solidFill>
+                <a:latin typeface="Arial"/>
+              </a:rPr>
+              <a:t>6 mo</a:t>
+            </a:r>
+          </a:p>
+        </p:txBody>
+      </p:sp>
+      <p:sp>
+        <p:nvSpPr>
+          <p:cNvPr id="9" name="TextBox 8"/>
+          <p:cNvSpPr/>
+          <p:nvPr>
+            <p:ph type="body" idx="4"/>
+          </p:nvPr>
+        </p:nvSpPr>
+        <p:spPr>
+          <a:xfrm>
+            <a:off x="6484620" y="3965448"/>
+            <a:ext cx="5707380" cy="518159"/>
+          </a:xfrm>
+          <a:prstGeom prst="rect">
+            <a:avLst/>
+          </a:prstGeom>
+          <a:noFill/>
+        </p:spPr>
+        <p:txBody>
+          <a:bodyPr wrap="none" lIns="0" rIns="0">
+            <a:noAutofit/>
+          </a:bodyPr>
+          <a:lstStyle/>
+          <a:p>
+            <a:pPr algn="ctr"/>
+            <a:r>
+              <a:rPr sz="3400" b="0" i="0">
+                <a:solidFill>
+                  <a:srgbClr val="0A2240"/>
+                </a:solidFill>
+                <a:latin typeface="Arial"/>
+              </a:rPr>
+              <a:t>On-prem time-to-launch</a:t>
+            </a:r>
+          </a:p>
+        </p:txBody>
+      </p:sp>
+      <p:sp>
+        <p:nvSpPr>
+          <p:cNvPr id="10" name="TextBox 9"/>
+          <p:cNvSpPr/>
+          <p:nvPr>
+            <p:ph type="body" idx="5"/>
+          </p:nvPr>
+        </p:nvSpPr>
+        <p:spPr>
+          <a:xfrm>
+            <a:off x="5435323" y="3310127"/>
+            <a:ext cx="1321354" cy="640080"/>
+          </a:xfrm>
+          <a:prstGeom prst="rect">
+            <a:avLst/>
+          </a:prstGeom>
+          <a:noFill/>
+        </p:spPr>
+        <p:txBody>
+          <a:bodyPr wrap="none" lIns="0" rIns="0">
+            <a:noAutofit/>
+          </a:bodyPr>
+          <a:lstStyle/>
+          <a:p>
+            <a:pPr algn="ctr"/>
+            <a:r>
+              <a:rPr sz="4200" b="1" i="0">
+                <a:solidFill>
+                  <a:srgbClr val="0A2240"/>
+                </a:solidFill>
+                <a:latin typeface="Arial"/>
+              </a:rPr>
+              <a:t>VS</a:t>
             </a:r>
           </a:p>
         </p:txBody>
@@ -11320,294 +10879,6 @@
 
 <file path=ppt/slideLayouts/slideLayout30.xml><?xml version="1.0" encoding="utf-8"?>
 <p:sldLayout xmlns:a="http://schemas.openxmlformats.org/drawingml/2006/main" xmlns:r="http://schemas.openxmlformats.org/officeDocument/2006/relationships" xmlns:p="http://schemas.openxmlformats.org/presentationml/2006/main" type="blank" preserve="1">
-  <p:cSld name="slidekit · This vs That">
-    <p:bg>
-      <p:bgPr>
-        <a:solidFill>
-          <a:srgbClr val="FFFFFF"/>
-        </a:solidFill>
-        <a:effectLst/>
-      </p:bgPr>
-    </p:bg>
-    <p:spTree>
-      <p:nvGrpSpPr>
-        <p:cNvPr id="1" name=""/>
-        <p:cNvGrpSpPr/>
-        <p:nvPr/>
-      </p:nvGrpSpPr>
-      <p:grpSpPr>
-        <a:xfrm>
-          <a:off x="0" y="0"/>
-          <a:ext cx="0" cy="0"/>
-          <a:chOff x="0" y="0"/>
-          <a:chExt cx="0" cy="0"/>
-        </a:xfrm>
-      </p:grpSpPr>
-      <p:sp>
-        <p:nvSpPr>
-          <p:cNvPr id="4" name="Slide Number Placeholder 3"/>
-          <p:cNvSpPr>
-            <a:spLocks noGrp="1"/>
-          </p:cNvSpPr>
-          <p:nvPr>
-            <p:ph type="sldNum" sz="quarter" idx="12"/>
-          </p:nvPr>
-        </p:nvSpPr>
-        <p:spPr>
-          <a:xfrm>
-            <a:off x="11186160" y="6035040"/>
-            <a:ext cx="548640" cy="365760"/>
-          </a:xfrm>
-        </p:spPr>
-        <p:txBody>
-          <a:bodyPr/>
-          <a:lstStyle/>
-          <a:p>
-            <a:fld id="{C1FF6DA9-008F-8B48-92A6-B652298478BF}" type="slidenum">
-              <a:rPr lang="en-US" smtClean="0"/>
-              <a:t>‹#›</a:t>
-            </a:fld>
-            <a:endParaRPr lang="en-US"/>
-          </a:p>
-        </p:txBody>
-      </p:sp>
-      <p:sp>
-        <p:nvSpPr>
-          <p:cNvPr id="5" name="TextBox 4"/>
-          <p:cNvSpPr/>
-          <p:nvPr>
-            <p:ph type="title"/>
-          </p:nvPr>
-        </p:nvSpPr>
-        <p:spPr>
-          <a:xfrm>
-            <a:off x="457200" y="457200"/>
-            <a:ext cx="11277600" cy="768096"/>
-          </a:xfrm>
-          <a:prstGeom prst="rect">
-            <a:avLst/>
-          </a:prstGeom>
-          <a:noFill/>
-        </p:spPr>
-        <p:txBody>
-          <a:bodyPr wrap="none" lIns="0" rIns="0">
-            <a:noAutofit/>
-          </a:bodyPr>
-          <a:lstStyle/>
-          <a:p>
-            <a:pPr algn="l"/>
-            <a:r>
-              <a:rPr sz="4200" b="1" i="0">
-                <a:solidFill>
-                  <a:srgbClr val="0072CE"/>
-                </a:solidFill>
-                <a:latin typeface="Arial"/>
-              </a:rPr>
-              <a:t>Cloud or On-Prem</a:t>
-            </a:r>
-          </a:p>
-        </p:txBody>
-      </p:sp>
-      <p:sp>
-        <p:nvSpPr>
-          <p:cNvPr id="6" name="TextBox 5"/>
-          <p:cNvSpPr/>
-          <p:nvPr>
-            <p:ph type="body" idx="1"/>
-          </p:nvPr>
-        </p:nvSpPr>
-        <p:spPr>
-          <a:xfrm>
-            <a:off x="457200" y="2776728"/>
-            <a:ext cx="4792980" cy="914400"/>
-          </a:xfrm>
-          <a:prstGeom prst="rect">
-            <a:avLst/>
-          </a:prstGeom>
-          <a:noFill/>
-        </p:spPr>
-        <p:txBody>
-          <a:bodyPr wrap="none" lIns="0" rIns="0">
-            <a:noAutofit/>
-          </a:bodyPr>
-          <a:lstStyle/>
-          <a:p>
-            <a:pPr algn="ctr"/>
-            <a:r>
-              <a:rPr sz="6000" b="1" i="0">
-                <a:solidFill>
-                  <a:srgbClr val="0A2240"/>
-                </a:solidFill>
-                <a:latin typeface="Arial"/>
-              </a:rPr>
-              <a:t>3 wks</a:t>
-            </a:r>
-          </a:p>
-        </p:txBody>
-      </p:sp>
-      <p:sp>
-        <p:nvSpPr>
-          <p:cNvPr id="7" name="TextBox 6"/>
-          <p:cNvSpPr/>
-          <p:nvPr>
-            <p:ph type="body" idx="2"/>
-          </p:nvPr>
-        </p:nvSpPr>
-        <p:spPr>
-          <a:xfrm>
-            <a:off x="0" y="3965448"/>
-            <a:ext cx="5707380" cy="518159"/>
-          </a:xfrm>
-          <a:prstGeom prst="rect">
-            <a:avLst/>
-          </a:prstGeom>
-          <a:noFill/>
-        </p:spPr>
-        <p:txBody>
-          <a:bodyPr wrap="none" lIns="0" rIns="0">
-            <a:noAutofit/>
-          </a:bodyPr>
-          <a:lstStyle/>
-          <a:p>
-            <a:pPr algn="ctr"/>
-            <a:r>
-              <a:rPr sz="3400" b="0" i="0">
-                <a:solidFill>
-                  <a:srgbClr val="0A2240"/>
-                </a:solidFill>
-                <a:latin typeface="Arial"/>
-              </a:rPr>
-              <a:t>Cloud time-to-launch</a:t>
-            </a:r>
-          </a:p>
-        </p:txBody>
-      </p:sp>
-      <p:sp>
-        <p:nvSpPr>
-          <p:cNvPr id="8" name="TextBox 7"/>
-          <p:cNvSpPr/>
-          <p:nvPr>
-            <p:ph type="body" idx="3"/>
-          </p:nvPr>
-        </p:nvSpPr>
-        <p:spPr>
-          <a:xfrm>
-            <a:off x="6941820" y="2776728"/>
-            <a:ext cx="4792980" cy="914400"/>
-          </a:xfrm>
-          <a:prstGeom prst="rect">
-            <a:avLst/>
-          </a:prstGeom>
-          <a:noFill/>
-        </p:spPr>
-        <p:txBody>
-          <a:bodyPr wrap="none" lIns="0" rIns="0">
-            <a:noAutofit/>
-          </a:bodyPr>
-          <a:lstStyle/>
-          <a:p>
-            <a:pPr algn="ctr"/>
-            <a:r>
-              <a:rPr sz="6000" b="1" i="0">
-                <a:solidFill>
-                  <a:srgbClr val="0A2240"/>
-                </a:solidFill>
-                <a:latin typeface="Arial"/>
-              </a:rPr>
-              <a:t>6 mo</a:t>
-            </a:r>
-          </a:p>
-        </p:txBody>
-      </p:sp>
-      <p:sp>
-        <p:nvSpPr>
-          <p:cNvPr id="9" name="TextBox 8"/>
-          <p:cNvSpPr/>
-          <p:nvPr>
-            <p:ph type="body" idx="4"/>
-          </p:nvPr>
-        </p:nvSpPr>
-        <p:spPr>
-          <a:xfrm>
-            <a:off x="6484620" y="3965448"/>
-            <a:ext cx="5707380" cy="518159"/>
-          </a:xfrm>
-          <a:prstGeom prst="rect">
-            <a:avLst/>
-          </a:prstGeom>
-          <a:noFill/>
-        </p:spPr>
-        <p:txBody>
-          <a:bodyPr wrap="none" lIns="0" rIns="0">
-            <a:noAutofit/>
-          </a:bodyPr>
-          <a:lstStyle/>
-          <a:p>
-            <a:pPr algn="ctr"/>
-            <a:r>
-              <a:rPr sz="3400" b="0" i="0">
-                <a:solidFill>
-                  <a:srgbClr val="0A2240"/>
-                </a:solidFill>
-                <a:latin typeface="Arial"/>
-              </a:rPr>
-              <a:t>On-prem time-to-launch</a:t>
-            </a:r>
-          </a:p>
-        </p:txBody>
-      </p:sp>
-      <p:sp>
-        <p:nvSpPr>
-          <p:cNvPr id="10" name="TextBox 9"/>
-          <p:cNvSpPr/>
-          <p:nvPr>
-            <p:ph type="body" idx="5"/>
-          </p:nvPr>
-        </p:nvSpPr>
-        <p:spPr>
-          <a:xfrm>
-            <a:off x="5435323" y="3310127"/>
-            <a:ext cx="1321354" cy="640080"/>
-          </a:xfrm>
-          <a:prstGeom prst="rect">
-            <a:avLst/>
-          </a:prstGeom>
-          <a:noFill/>
-        </p:spPr>
-        <p:txBody>
-          <a:bodyPr wrap="none" lIns="0" rIns="0">
-            <a:noAutofit/>
-          </a:bodyPr>
-          <a:lstStyle/>
-          <a:p>
-            <a:pPr algn="ctr"/>
-            <a:r>
-              <a:rPr sz="4200" b="1" i="0">
-                <a:solidFill>
-                  <a:srgbClr val="5B6B82"/>
-                </a:solidFill>
-                <a:latin typeface="Arial"/>
-              </a:rPr>
-              <a:t>VS</a:t>
-            </a:r>
-          </a:p>
-        </p:txBody>
-      </p:sp>
-    </p:spTree>
-    <p:extLst>
-      <p:ext uri="{BB962C8B-B14F-4D97-AF65-F5344CB8AC3E}">
-        <p14:creationId xmlns:p14="http://schemas.microsoft.com/office/powerpoint/2010/main" val="1212999818"/>
-      </p:ext>
-    </p:extLst>
-  </p:cSld>
-  <p:clrMapOvr>
-    <a:masterClrMapping/>
-  </p:clrMapOvr>
-</p:sldLayout>
-</file>
-
-<file path=ppt/slideLayouts/slideLayout31.xml><?xml version="1.0" encoding="utf-8"?>
-<p:sldLayout xmlns:a="http://schemas.openxmlformats.org/drawingml/2006/main" xmlns:r="http://schemas.openxmlformats.org/officeDocument/2006/relationships" xmlns:p="http://schemas.openxmlformats.org/presentationml/2006/main" type="blank" preserve="1">
   <p:cSld name="slidekit · KPI Grid">
     <p:bg>
       <p:bgPr>
@@ -12130,7 +11401,7 @@
         </p:nvSpPr>
         <p:spPr>
           <a:xfrm>
-            <a:off x="4307840" y="3797808"/>
+            <a:off x="4307840" y="4056888"/>
             <a:ext cx="3576320" cy="640080"/>
           </a:xfrm>
           <a:prstGeom prst="rect">
@@ -12167,7 +11438,7 @@
         </p:nvSpPr>
         <p:spPr>
           <a:xfrm>
-            <a:off x="5559552" y="4492752"/>
+            <a:off x="5559552" y="4751832"/>
             <a:ext cx="1072896" cy="54864"/>
           </a:xfrm>
           <a:prstGeom prst="rect">
@@ -12199,16 +11470,16 @@
         </p:nvSpPr>
         <p:spPr>
           <a:xfrm>
-            <a:off x="4307840" y="4602480"/>
-            <a:ext cx="3576320" cy="1127760"/>
-          </a:xfrm>
-          <a:prstGeom prst="rect">
-            <a:avLst/>
-          </a:prstGeom>
-          <a:noFill/>
-        </p:spPr>
-        <p:txBody>
-          <a:bodyPr wrap="square" lIns="0" rIns="0">
+            <a:off x="3943896" y="4861560"/>
+            <a:ext cx="4304208" cy="609600"/>
+          </a:xfrm>
+          <a:prstGeom prst="rect">
+            <a:avLst/>
+          </a:prstGeom>
+          <a:noFill/>
+        </p:spPr>
+        <p:txBody>
+          <a:bodyPr wrap="none" lIns="0" rIns="0">
             <a:noAutofit/>
           </a:bodyPr>
           <a:lstStyle/>
@@ -12221,7 +11492,7 @@
                 </a:solidFill>
                 <a:latin typeface="Arial"/>
               </a:rPr>
-              <a:t>Avg. time to value</a:t>
+              <a:t>Time to value</a:t>
             </a:r>
           </a:p>
         </p:txBody>
@@ -12345,7 +11616,7 @@
 </p:sldLayout>
 </file>
 
-<file path=ppt/slideLayouts/slideLayout32.xml><?xml version="1.0" encoding="utf-8"?>
+<file path=ppt/slideLayouts/slideLayout31.xml><?xml version="1.0" encoding="utf-8"?>
 <p:sldLayout xmlns:a="http://schemas.openxmlformats.org/drawingml/2006/main" xmlns:r="http://schemas.openxmlformats.org/officeDocument/2006/relationships" xmlns:p="http://schemas.openxmlformats.org/presentationml/2006/main" type="blank" preserve="1">
   <p:cSld name="slidekit · Chart With Insight">
     <p:bg>
@@ -12532,7 +11803,7 @@
             <a:r>
               <a:rPr sz="2500" b="0" i="0">
                 <a:solidFill>
-                  <a:srgbClr val="5B6B82"/>
+                  <a:srgbClr val="0A2240"/>
                 </a:solidFill>
                 <a:latin typeface="Arial"/>
               </a:rPr>
@@ -12638,7 +11909,7 @@
             <a:r>
               <a:rPr sz="2500" b="0" i="0">
                 <a:solidFill>
-                  <a:srgbClr val="5B6B82"/>
+                  <a:srgbClr val="0A2240"/>
                 </a:solidFill>
                 <a:latin typeface="Arial"/>
               </a:rPr>
@@ -12744,7 +12015,7 @@
             <a:r>
               <a:rPr sz="2500" b="0" i="0">
                 <a:solidFill>
-                  <a:srgbClr val="5B6B82"/>
+                  <a:srgbClr val="0A2240"/>
                 </a:solidFill>
                 <a:latin typeface="Arial"/>
               </a:rPr>
@@ -12850,7 +12121,7 @@
             <a:r>
               <a:rPr sz="2500" b="0" i="0">
                 <a:solidFill>
-                  <a:srgbClr val="5B6B82"/>
+                  <a:srgbClr val="0A2240"/>
                 </a:solidFill>
                 <a:latin typeface="Arial"/>
               </a:rPr>
@@ -12869,8 +12140,8 @@
         </p:nvSpPr>
         <p:spPr>
           <a:xfrm>
-            <a:off x="7498080" y="1770888"/>
-            <a:ext cx="128016" cy="3718560"/>
+            <a:off x="7498080" y="3325368"/>
+            <a:ext cx="128016" cy="609600"/>
           </a:xfrm>
           <a:prstGeom prst="rect">
             <a:avLst/>
@@ -12901,16 +12172,16 @@
         </p:nvSpPr>
         <p:spPr>
           <a:xfrm>
-            <a:off x="8037576" y="1770888"/>
-            <a:ext cx="3697224" cy="3718560"/>
-          </a:xfrm>
-          <a:prstGeom prst="rect">
-            <a:avLst/>
-          </a:prstGeom>
-          <a:noFill/>
-        </p:spPr>
-        <p:txBody>
-          <a:bodyPr wrap="square" lIns="0" rIns="0">
+            <a:off x="8037576" y="3325368"/>
+            <a:ext cx="4154424" cy="609600"/>
+          </a:xfrm>
+          <a:prstGeom prst="rect">
+            <a:avLst/>
+          </a:prstGeom>
+          <a:noFill/>
+        </p:spPr>
+        <p:txBody>
+          <a:bodyPr wrap="none" lIns="0" rIns="0">
             <a:noAutofit/>
           </a:bodyPr>
           <a:lstStyle/>
@@ -12923,7 +12194,7 @@
                 </a:solidFill>
                 <a:latin typeface="Arial"/>
               </a:rPr>
-              <a:t>Activations nearly quadrupled once self-serve onboarding shipped in February.</a:t>
+              <a:t>Activations 4x.</a:t>
             </a:r>
           </a:p>
         </p:txBody>
@@ -12941,7 +12212,7 @@
 </p:sldLayout>
 </file>
 
-<file path=ppt/slideLayouts/slideLayout33.xml><?xml version="1.0" encoding="utf-8"?>
+<file path=ppt/slideLayouts/slideLayout32.xml><?xml version="1.0" encoding="utf-8"?>
 <p:sldLayout xmlns:a="http://schemas.openxmlformats.org/drawingml/2006/main" xmlns:r="http://schemas.openxmlformats.org/officeDocument/2006/relationships" xmlns:p="http://schemas.openxmlformats.org/presentationml/2006/main" type="blank" preserve="1">
   <p:cSld name="slidekit · Table">
     <p:bg>
@@ -13059,7 +12330,7 @@
             <a:r>
               <a:rPr sz="3400" b="1" i="0">
                 <a:solidFill>
-                  <a:srgbClr val="123A6B"/>
+                  <a:srgbClr val="0072CE"/>
                 </a:solidFill>
                 <a:latin typeface="Arial"/>
               </a:rPr>
@@ -13096,7 +12367,7 @@
             <a:r>
               <a:rPr sz="3400" b="1" i="0">
                 <a:solidFill>
-                  <a:srgbClr val="123A6B"/>
+                  <a:srgbClr val="0072CE"/>
                 </a:solidFill>
                 <a:latin typeface="Arial"/>
               </a:rPr>
@@ -13133,7 +12404,7 @@
             <a:r>
               <a:rPr sz="3400" b="1" i="0">
                 <a:solidFill>
-                  <a:srgbClr val="123A6B"/>
+                  <a:srgbClr val="0072CE"/>
                 </a:solidFill>
                 <a:latin typeface="Arial"/>
               </a:rPr>
@@ -13631,7 +12902,7 @@
 </p:sldLayout>
 </file>
 
-<file path=ppt/slideLayouts/slideLayout34.xml><?xml version="1.0" encoding="utf-8"?>
+<file path=ppt/slideLayouts/slideLayout33.xml><?xml version="1.0" encoding="utf-8"?>
 <p:sldLayout xmlns:a="http://schemas.openxmlformats.org/drawingml/2006/main" xmlns:r="http://schemas.openxmlformats.org/officeDocument/2006/relationships" xmlns:p="http://schemas.openxmlformats.org/presentationml/2006/main" type="blank" preserve="1">
   <p:cSld name="slidekit · Metric Comparison">
     <p:bg>
@@ -13731,7 +13002,7 @@
         </p:nvSpPr>
         <p:spPr>
           <a:xfrm>
-            <a:off x="457200" y="2075688"/>
+            <a:off x="457200" y="2334768"/>
             <a:ext cx="3576320" cy="914400"/>
           </a:xfrm>
           <a:prstGeom prst="rect">
@@ -13768,16 +13039,16 @@
         </p:nvSpPr>
         <p:spPr>
           <a:xfrm>
-            <a:off x="457200" y="3264408"/>
-            <a:ext cx="3576320" cy="1127760"/>
-          </a:xfrm>
-          <a:prstGeom prst="rect">
-            <a:avLst/>
-          </a:prstGeom>
-          <a:noFill/>
-        </p:spPr>
-        <p:txBody>
-          <a:bodyPr wrap="square" lIns="0" rIns="0">
+            <a:off x="457200" y="3523488"/>
+            <a:ext cx="3576320" cy="609600"/>
+          </a:xfrm>
+          <a:prstGeom prst="rect">
+            <a:avLst/>
+          </a:prstGeom>
+          <a:noFill/>
+        </p:spPr>
+        <p:txBody>
+          <a:bodyPr wrap="none" lIns="0" rIns="0">
             <a:noAutofit/>
           </a:bodyPr>
           <a:lstStyle/>
@@ -13790,7 +13061,7 @@
                 </a:solidFill>
                 <a:latin typeface="Arial"/>
               </a:rPr>
-              <a:t>Annual recurring revenue</a:t>
+              <a:t>Revenue</a:t>
             </a:r>
           </a:p>
         </p:txBody>
@@ -13805,7 +13076,7 @@
         </p:nvSpPr>
         <p:spPr>
           <a:xfrm>
-            <a:off x="1522569" y="4666488"/>
+            <a:off x="1522569" y="4407408"/>
             <a:ext cx="1445581" cy="518159"/>
           </a:xfrm>
           <a:prstGeom prst="rect">
@@ -13837,7 +13108,7 @@
         </p:nvSpPr>
         <p:spPr>
           <a:xfrm>
-            <a:off x="1260802" y="4666488"/>
+            <a:off x="1260802" y="4407408"/>
             <a:ext cx="1969115" cy="518159"/>
           </a:xfrm>
           <a:prstGeom prst="rect">
@@ -13874,7 +13145,7 @@
         </p:nvSpPr>
         <p:spPr>
           <a:xfrm>
-            <a:off x="4307840" y="2075688"/>
+            <a:off x="4307840" y="2334768"/>
             <a:ext cx="3576320" cy="914400"/>
           </a:xfrm>
           <a:prstGeom prst="rect">
@@ -13911,8 +13182,8 @@
         </p:nvSpPr>
         <p:spPr>
           <a:xfrm>
-            <a:off x="3834934" y="3264408"/>
-            <a:ext cx="4522132" cy="1127760"/>
+            <a:off x="3834934" y="3523488"/>
+            <a:ext cx="4522132" cy="609600"/>
           </a:xfrm>
           <a:prstGeom prst="rect">
             <a:avLst/>
@@ -13948,7 +13219,7 @@
         </p:nvSpPr>
         <p:spPr>
           <a:xfrm>
-            <a:off x="5175547" y="4666488"/>
+            <a:off x="5175547" y="4407408"/>
             <a:ext cx="1840906" cy="518159"/>
           </a:xfrm>
           <a:prstGeom prst="rect">
@@ -13980,7 +13251,7 @@
         </p:nvSpPr>
         <p:spPr>
           <a:xfrm>
-            <a:off x="4795183" y="4666488"/>
+            <a:off x="4795183" y="4407408"/>
             <a:ext cx="2601634" cy="518159"/>
           </a:xfrm>
           <a:prstGeom prst="rect">
@@ -14017,7 +13288,7 @@
         </p:nvSpPr>
         <p:spPr>
           <a:xfrm>
-            <a:off x="8158480" y="2075688"/>
+            <a:off x="8158480" y="2334768"/>
             <a:ext cx="3576320" cy="914400"/>
           </a:xfrm>
           <a:prstGeom prst="rect">
@@ -14054,16 +13325,16 @@
         </p:nvSpPr>
         <p:spPr>
           <a:xfrm>
-            <a:off x="8158480" y="3264408"/>
-            <a:ext cx="3576320" cy="1127760"/>
-          </a:xfrm>
-          <a:prstGeom prst="rect">
-            <a:avLst/>
-          </a:prstGeom>
-          <a:noFill/>
-        </p:spPr>
-        <p:txBody>
-          <a:bodyPr wrap="square" lIns="0" rIns="0">
+            <a:off x="7701280" y="3523488"/>
+            <a:ext cx="4490720" cy="609600"/>
+          </a:xfrm>
+          <a:prstGeom prst="rect">
+            <a:avLst/>
+          </a:prstGeom>
+          <a:noFill/>
+        </p:spPr>
+        <p:txBody>
+          <a:bodyPr wrap="none" lIns="0" rIns="0">
             <a:noAutofit/>
           </a:bodyPr>
           <a:lstStyle/>
@@ -14076,7 +13347,7 @@
                 </a:solidFill>
                 <a:latin typeface="Arial"/>
               </a:rPr>
-              <a:t>Net promoter score</a:t>
+              <a:t>Promoter score</a:t>
             </a:r>
           </a:p>
         </p:txBody>
@@ -14091,7 +13362,7 @@
         </p:nvSpPr>
         <p:spPr>
           <a:xfrm>
-            <a:off x="9427731" y="4666488"/>
+            <a:off x="9427731" y="4407408"/>
             <a:ext cx="1037817" cy="518159"/>
           </a:xfrm>
           <a:prstGeom prst="rect">
@@ -14123,7 +13394,7 @@
         </p:nvSpPr>
         <p:spPr>
           <a:xfrm>
-            <a:off x="9288294" y="4666488"/>
+            <a:off x="9288294" y="4407408"/>
             <a:ext cx="1316691" cy="518159"/>
           </a:xfrm>
           <a:prstGeom prst="rect">
@@ -14163,7 +13434,7 @@
 </p:sldLayout>
 </file>
 
-<file path=ppt/slideLayouts/slideLayout35.xml><?xml version="1.0" encoding="utf-8"?>
+<file path=ppt/slideLayouts/slideLayout34.xml><?xml version="1.0" encoding="utf-8"?>
 <p:sldLayout xmlns:a="http://schemas.openxmlformats.org/drawingml/2006/main" xmlns:r="http://schemas.openxmlformats.org/officeDocument/2006/relationships" xmlns:p="http://schemas.openxmlformats.org/presentationml/2006/main" type="blank" preserve="1">
   <p:cSld name="slidekit · Process Steps">
     <p:bg>
@@ -14281,7 +13552,7 @@
             <a:r>
               <a:rPr sz="4200" b="1" i="0">
                 <a:solidFill>
-                  <a:srgbClr val="123A6B"/>
+                  <a:srgbClr val="0072CE"/>
                 </a:solidFill>
                 <a:latin typeface="Arial"/>
               </a:rPr>
@@ -14301,13 +13572,13 @@
         <p:spPr>
           <a:xfrm>
             <a:off x="457200" y="2194560"/>
-            <a:ext cx="784098" cy="54864"/>
+            <a:ext cx="593303" cy="54864"/>
           </a:xfrm>
           <a:prstGeom prst="rect">
             <a:avLst/>
           </a:prstGeom>
           <a:solidFill>
-            <a:srgbClr val="123A6B"/>
+            <a:srgbClr val="0072CE"/>
           </a:solidFill>
           <a:ln>
             <a:noFill/>
@@ -14350,7 +13621,7 @@
             <a:r>
               <a:rPr sz="3400" b="1" i="0">
                 <a:solidFill>
-                  <a:srgbClr val="123A6B"/>
+                  <a:srgbClr val="0072CE"/>
                 </a:solidFill>
                 <a:latin typeface="Arial"/>
               </a:rPr>
@@ -14424,7 +13695,7 @@
             <a:r>
               <a:rPr sz="4200" b="1" i="0">
                 <a:solidFill>
-                  <a:srgbClr val="123A6B"/>
+                  <a:srgbClr val="0072CE"/>
                 </a:solidFill>
                 <a:latin typeface="Arial"/>
               </a:rPr>
@@ -14444,13 +13715,13 @@
         <p:spPr>
           <a:xfrm>
             <a:off x="3345180" y="2194560"/>
-            <a:ext cx="784098" cy="54864"/>
+            <a:ext cx="593303" cy="54864"/>
           </a:xfrm>
           <a:prstGeom prst="rect">
             <a:avLst/>
           </a:prstGeom>
           <a:solidFill>
-            <a:srgbClr val="123A6B"/>
+            <a:srgbClr val="0072CE"/>
           </a:solidFill>
           <a:ln>
             <a:noFill/>
@@ -14493,7 +13764,7 @@
             <a:r>
               <a:rPr sz="3400" b="1" i="0">
                 <a:solidFill>
-                  <a:srgbClr val="123A6B"/>
+                  <a:srgbClr val="0072CE"/>
                 </a:solidFill>
                 <a:latin typeface="Arial"/>
               </a:rPr>
@@ -14567,7 +13838,7 @@
             <a:r>
               <a:rPr sz="4200" b="1" i="0">
                 <a:solidFill>
-                  <a:srgbClr val="123A6B"/>
+                  <a:srgbClr val="0072CE"/>
                 </a:solidFill>
                 <a:latin typeface="Arial"/>
               </a:rPr>
@@ -14587,13 +13858,13 @@
         <p:spPr>
           <a:xfrm>
             <a:off x="6233160" y="2194560"/>
-            <a:ext cx="784098" cy="54864"/>
+            <a:ext cx="593303" cy="54864"/>
           </a:xfrm>
           <a:prstGeom prst="rect">
             <a:avLst/>
           </a:prstGeom>
           <a:solidFill>
-            <a:srgbClr val="123A6B"/>
+            <a:srgbClr val="0072CE"/>
           </a:solidFill>
           <a:ln>
             <a:noFill/>
@@ -14636,7 +13907,7 @@
             <a:r>
               <a:rPr sz="3400" b="1" i="0">
                 <a:solidFill>
-                  <a:srgbClr val="123A6B"/>
+                  <a:srgbClr val="0072CE"/>
                 </a:solidFill>
                 <a:latin typeface="Arial"/>
               </a:rPr>
@@ -14710,7 +13981,7 @@
             <a:r>
               <a:rPr sz="4200" b="1" i="0">
                 <a:solidFill>
-                  <a:srgbClr val="123A6B"/>
+                  <a:srgbClr val="0072CE"/>
                 </a:solidFill>
                 <a:latin typeface="Arial"/>
               </a:rPr>
@@ -14730,13 +14001,13 @@
         <p:spPr>
           <a:xfrm>
             <a:off x="9121140" y="2194560"/>
-            <a:ext cx="784098" cy="54864"/>
+            <a:ext cx="593303" cy="54864"/>
           </a:xfrm>
           <a:prstGeom prst="rect">
             <a:avLst/>
           </a:prstGeom>
           <a:solidFill>
-            <a:srgbClr val="123A6B"/>
+            <a:srgbClr val="0072CE"/>
           </a:solidFill>
           <a:ln>
             <a:noFill/>
@@ -14779,7 +14050,7 @@
             <a:r>
               <a:rPr sz="3400" b="1" i="0">
                 <a:solidFill>
-                  <a:srgbClr val="123A6B"/>
+                  <a:srgbClr val="0072CE"/>
                 </a:solidFill>
                 <a:latin typeface="Arial"/>
               </a:rPr>
@@ -14838,7 +14109,7 @@
 </p:sldLayout>
 </file>
 
-<file path=ppt/slideLayouts/slideLayout36.xml><?xml version="1.0" encoding="utf-8"?>
+<file path=ppt/slideLayouts/slideLayout35.xml><?xml version="1.0" encoding="utf-8"?>
 <p:sldLayout xmlns:a="http://schemas.openxmlformats.org/drawingml/2006/main" xmlns:r="http://schemas.openxmlformats.org/officeDocument/2006/relationships" xmlns:p="http://schemas.openxmlformats.org/presentationml/2006/main" type="blank" preserve="1">
   <p:cSld name="slidekit · Roadmap">
     <p:bg>
@@ -15370,7 +14641,7 @@
 </p:sldLayout>
 </file>
 
-<file path=ppt/slideLayouts/slideLayout37.xml><?xml version="1.0" encoding="utf-8"?>
+<file path=ppt/slideLayouts/slideLayout36.xml><?xml version="1.0" encoding="utf-8"?>
 <p:sldLayout xmlns:a="http://schemas.openxmlformats.org/drawingml/2006/main" xmlns:r="http://schemas.openxmlformats.org/officeDocument/2006/relationships" xmlns:p="http://schemas.openxmlformats.org/presentationml/2006/main" type="blank" preserve="1">
   <p:cSld name="slidekit · Funnel">
     <p:bg>
@@ -15749,7 +15020,7 @@
 </p:sldLayout>
 </file>
 
-<file path=ppt/slideLayouts/slideLayout38.xml><?xml version="1.0" encoding="utf-8"?>
+<file path=ppt/slideLayouts/slideLayout37.xml><?xml version="1.0" encoding="utf-8"?>
 <p:sldLayout xmlns:a="http://schemas.openxmlformats.org/drawingml/2006/main" xmlns:r="http://schemas.openxmlformats.org/officeDocument/2006/relationships" xmlns:p="http://schemas.openxmlformats.org/presentationml/2006/main" type="blank" preserve="1">
   <p:cSld name="slidekit · Nested Circles">
     <p:bg>
@@ -15856,7 +15127,7 @@
             <a:avLst/>
           </a:prstGeom>
           <a:solidFill>
-            <a:srgbClr val="5B6B82"/>
+            <a:srgbClr val="0A2240"/>
           </a:solidFill>
           <a:ln>
             <a:noFill/>
@@ -15920,7 +15191,7 @@
             <a:avLst/>
           </a:prstGeom>
           <a:solidFill>
-            <a:srgbClr val="123A6B"/>
+            <a:srgbClr val="0A2240"/>
           </a:solidFill>
           <a:ln>
             <a:noFill/>
@@ -16170,7 +15441,7 @@
 </p:sldLayout>
 </file>
 
-<file path=ppt/slideLayouts/slideLayout39.xml><?xml version="1.0" encoding="utf-8"?>
+<file path=ppt/slideLayouts/slideLayout38.xml><?xml version="1.0" encoding="utf-8"?>
 <p:sldLayout xmlns:a="http://schemas.openxmlformats.org/drawingml/2006/main" xmlns:r="http://schemas.openxmlformats.org/officeDocument/2006/relationships" xmlns:p="http://schemas.openxmlformats.org/presentationml/2006/main" type="blank" preserve="1">
   <p:cSld name="slidekit · Pyramid">
     <p:bg>
@@ -16277,7 +15548,7 @@
             <a:avLst/>
           </a:prstGeom>
           <a:solidFill>
-            <a:srgbClr val="123A6B"/>
+            <a:srgbClr val="0072CE"/>
           </a:solidFill>
           <a:ln>
             <a:noFill/>
@@ -16415,7 +15686,7 @@
             <a:avLst/>
           </a:prstGeom>
           <a:solidFill>
-            <a:srgbClr val="123A6B"/>
+            <a:srgbClr val="0072CE"/>
           </a:solidFill>
           <a:ln>
             <a:noFill/>
@@ -16532,6 +15803,533 @@
                 <a:latin typeface="Arial"/>
               </a:rPr>
               <a:t>Tactics</a:t>
+            </a:r>
+          </a:p>
+        </p:txBody>
+      </p:sp>
+    </p:spTree>
+    <p:extLst>
+      <p:ext uri="{BB962C8B-B14F-4D97-AF65-F5344CB8AC3E}">
+        <p14:creationId xmlns:p14="http://schemas.microsoft.com/office/powerpoint/2010/main" val="1212999818"/>
+      </p:ext>
+    </p:extLst>
+  </p:cSld>
+  <p:clrMapOvr>
+    <a:masterClrMapping/>
+  </p:clrMapOvr>
+</p:sldLayout>
+</file>
+
+<file path=ppt/slideLayouts/slideLayout39.xml><?xml version="1.0" encoding="utf-8"?>
+<p:sldLayout xmlns:a="http://schemas.openxmlformats.org/drawingml/2006/main" xmlns:r="http://schemas.openxmlformats.org/officeDocument/2006/relationships" xmlns:p="http://schemas.openxmlformats.org/presentationml/2006/main" type="blank" preserve="1">
+  <p:cSld name="slidekit · SWOT">
+    <p:bg>
+      <p:bgPr>
+        <a:solidFill>
+          <a:srgbClr val="FFFFFF"/>
+        </a:solidFill>
+        <a:effectLst/>
+      </p:bgPr>
+    </p:bg>
+    <p:spTree>
+      <p:nvGrpSpPr>
+        <p:cNvPr id="1" name=""/>
+        <p:cNvGrpSpPr/>
+        <p:nvPr/>
+      </p:nvGrpSpPr>
+      <p:grpSpPr>
+        <a:xfrm>
+          <a:off x="0" y="0"/>
+          <a:ext cx="0" cy="0"/>
+          <a:chOff x="0" y="0"/>
+          <a:chExt cx="0" cy="0"/>
+        </a:xfrm>
+      </p:grpSpPr>
+      <p:sp>
+        <p:nvSpPr>
+          <p:cNvPr id="4" name="Slide Number Placeholder 3"/>
+          <p:cNvSpPr>
+            <a:spLocks noGrp="1"/>
+          </p:cNvSpPr>
+          <p:nvPr>
+            <p:ph type="sldNum" sz="quarter" idx="12"/>
+          </p:nvPr>
+        </p:nvSpPr>
+        <p:spPr>
+          <a:xfrm>
+            <a:off x="11186160" y="6035040"/>
+            <a:ext cx="548640" cy="365760"/>
+          </a:xfrm>
+        </p:spPr>
+        <p:txBody>
+          <a:bodyPr/>
+          <a:lstStyle/>
+          <a:p>
+            <a:fld id="{C1FF6DA9-008F-8B48-92A6-B652298478BF}" type="slidenum">
+              <a:rPr lang="en-US" smtClean="0"/>
+              <a:t>‹#›</a:t>
+            </a:fld>
+            <a:endParaRPr lang="en-US"/>
+          </a:p>
+        </p:txBody>
+      </p:sp>
+      <p:sp>
+        <p:nvSpPr>
+          <p:cNvPr id="5" name="TextBox 4"/>
+          <p:cNvSpPr/>
+          <p:nvPr>
+            <p:ph type="title"/>
+          </p:nvPr>
+        </p:nvSpPr>
+        <p:spPr>
+          <a:xfrm>
+            <a:off x="457200" y="457200"/>
+            <a:ext cx="11277600" cy="768096"/>
+          </a:xfrm>
+          <a:prstGeom prst="rect">
+            <a:avLst/>
+          </a:prstGeom>
+          <a:noFill/>
+        </p:spPr>
+        <p:txBody>
+          <a:bodyPr wrap="none" lIns="0" rIns="0">
+            <a:noAutofit/>
+          </a:bodyPr>
+          <a:lstStyle/>
+          <a:p>
+            <a:pPr algn="l"/>
+            <a:r>
+              <a:rPr sz="4200" b="1" i="0">
+                <a:solidFill>
+                  <a:srgbClr val="0072CE"/>
+                </a:solidFill>
+                <a:latin typeface="Arial"/>
+              </a:rPr>
+              <a:t>SWOT Analysis</a:t>
+            </a:r>
+          </a:p>
+        </p:txBody>
+      </p:sp>
+      <p:sp>
+        <p:nvSpPr>
+          <p:cNvPr id="6" name="TextBox 5"/>
+          <p:cNvSpPr/>
+          <p:nvPr>
+            <p:ph type="body" idx="1"/>
+          </p:nvPr>
+        </p:nvSpPr>
+        <p:spPr>
+          <a:xfrm>
+            <a:off x="457200" y="1499616"/>
+            <a:ext cx="5501640" cy="621791"/>
+          </a:xfrm>
+          <a:prstGeom prst="rect">
+            <a:avLst/>
+          </a:prstGeom>
+          <a:noFill/>
+        </p:spPr>
+        <p:txBody>
+          <a:bodyPr wrap="none" lIns="0" rIns="0">
+            <a:noAutofit/>
+          </a:bodyPr>
+          <a:lstStyle/>
+          <a:p>
+            <a:pPr algn="l"/>
+            <a:r>
+              <a:rPr sz="3400" b="1" i="0">
+                <a:solidFill>
+                  <a:srgbClr val="0072CE"/>
+                </a:solidFill>
+                <a:latin typeface="Arial"/>
+              </a:rPr>
+              <a:t>Strengths</a:t>
+            </a:r>
+          </a:p>
+        </p:txBody>
+      </p:sp>
+      <p:sp>
+        <p:nvSpPr>
+          <p:cNvPr id="7" name="Rectangle 6"/>
+          <p:cNvSpPr/>
+          <p:nvPr>
+            <p:ph type="body" idx="2"/>
+          </p:nvPr>
+        </p:nvSpPr>
+        <p:spPr>
+          <a:xfrm>
+            <a:off x="457200" y="2176271"/>
+            <a:ext cx="2015207" cy="54864"/>
+          </a:xfrm>
+          <a:prstGeom prst="rect">
+            <a:avLst/>
+          </a:prstGeom>
+          <a:solidFill>
+            <a:srgbClr val="0072CE"/>
+          </a:solidFill>
+          <a:ln>
+            <a:noFill/>
+          </a:ln>
+          <a:effectLst/>
+        </p:spPr>
+        <p:txBody>
+          <a:bodyPr rtlCol="0" anchor="ctr"/>
+          <a:lstStyle/>
+          <a:p>
+            <a:pPr algn="ctr"/>
+          </a:p>
+        </p:txBody>
+      </p:sp>
+      <p:sp>
+        <p:nvSpPr>
+          <p:cNvPr id="8" name="TextBox 7"/>
+          <p:cNvSpPr/>
+          <p:nvPr>
+            <p:ph type="body" idx="3"/>
+          </p:nvPr>
+        </p:nvSpPr>
+        <p:spPr>
+          <a:xfrm>
+            <a:off x="457200" y="2395727"/>
+            <a:ext cx="7863523" cy="609600"/>
+          </a:xfrm>
+          <a:prstGeom prst="rect">
+            <a:avLst/>
+          </a:prstGeom>
+          <a:noFill/>
+        </p:spPr>
+        <p:txBody>
+          <a:bodyPr wrap="none" lIns="0" rIns="0">
+            <a:noAutofit/>
+          </a:bodyPr>
+          <a:lstStyle/>
+          <a:p>
+            <a:pPr algn="l"/>
+            <a:r>
+              <a:rPr sz="3400" b="0" i="0">
+                <a:solidFill>
+                  <a:srgbClr val="0A2240"/>
+                </a:solidFill>
+                <a:latin typeface="Arial"/>
+              </a:rPr>
+              <a:t>Strong brand, loyal users</a:t>
+            </a:r>
+          </a:p>
+        </p:txBody>
+      </p:sp>
+      <p:sp>
+        <p:nvSpPr>
+          <p:cNvPr id="9" name="TextBox 8"/>
+          <p:cNvSpPr/>
+          <p:nvPr>
+            <p:ph type="body" idx="4"/>
+          </p:nvPr>
+        </p:nvSpPr>
+        <p:spPr>
+          <a:xfrm>
+            <a:off x="6233160" y="1499616"/>
+            <a:ext cx="5501640" cy="621791"/>
+          </a:xfrm>
+          <a:prstGeom prst="rect">
+            <a:avLst/>
+          </a:prstGeom>
+          <a:noFill/>
+        </p:spPr>
+        <p:txBody>
+          <a:bodyPr wrap="none" lIns="0" rIns="0">
+            <a:noAutofit/>
+          </a:bodyPr>
+          <a:lstStyle/>
+          <a:p>
+            <a:pPr algn="l"/>
+            <a:r>
+              <a:rPr sz="3400" b="1" i="0">
+                <a:solidFill>
+                  <a:srgbClr val="0A2240"/>
+                </a:solidFill>
+                <a:latin typeface="Arial"/>
+              </a:rPr>
+              <a:t>Weaknesses</a:t>
+            </a:r>
+          </a:p>
+        </p:txBody>
+      </p:sp>
+      <p:sp>
+        <p:nvSpPr>
+          <p:cNvPr id="10" name="Rectangle 9"/>
+          <p:cNvSpPr/>
+          <p:nvPr>
+            <p:ph type="body" idx="5"/>
+          </p:nvPr>
+        </p:nvSpPr>
+        <p:spPr>
+          <a:xfrm>
+            <a:off x="6233160" y="2176271"/>
+            <a:ext cx="2584686" cy="54864"/>
+          </a:xfrm>
+          <a:prstGeom prst="rect">
+            <a:avLst/>
+          </a:prstGeom>
+          <a:solidFill>
+            <a:srgbClr val="0A2240"/>
+          </a:solidFill>
+          <a:ln>
+            <a:noFill/>
+          </a:ln>
+          <a:effectLst/>
+        </p:spPr>
+        <p:txBody>
+          <a:bodyPr rtlCol="0" anchor="ctr"/>
+          <a:lstStyle/>
+          <a:p>
+            <a:pPr algn="ctr"/>
+          </a:p>
+        </p:txBody>
+      </p:sp>
+      <p:sp>
+        <p:nvSpPr>
+          <p:cNvPr id="11" name="TextBox 10"/>
+          <p:cNvSpPr/>
+          <p:nvPr>
+            <p:ph type="body" idx="6"/>
+          </p:nvPr>
+        </p:nvSpPr>
+        <p:spPr>
+          <a:xfrm>
+            <a:off x="6233160" y="2395727"/>
+            <a:ext cx="5958840" cy="609600"/>
+          </a:xfrm>
+          <a:prstGeom prst="rect">
+            <a:avLst/>
+          </a:prstGeom>
+          <a:noFill/>
+        </p:spPr>
+        <p:txBody>
+          <a:bodyPr wrap="none" lIns="0" rIns="0">
+            <a:noAutofit/>
+          </a:bodyPr>
+          <a:lstStyle/>
+          <a:p>
+            <a:pPr algn="l"/>
+            <a:r>
+              <a:rPr sz="3400" b="0" i="0">
+                <a:solidFill>
+                  <a:srgbClr val="0A2240"/>
+                </a:solidFill>
+                <a:latin typeface="Arial"/>
+              </a:rPr>
+              <a:t>Thin margins, small team</a:t>
+            </a:r>
+          </a:p>
+        </p:txBody>
+      </p:sp>
+      <p:sp>
+        <p:nvSpPr>
+          <p:cNvPr id="12" name="TextBox 11"/>
+          <p:cNvSpPr/>
+          <p:nvPr>
+            <p:ph type="body" idx="7"/>
+          </p:nvPr>
+        </p:nvSpPr>
+        <p:spPr>
+          <a:xfrm>
+            <a:off x="457200" y="3767328"/>
+            <a:ext cx="5501640" cy="621791"/>
+          </a:xfrm>
+          <a:prstGeom prst="rect">
+            <a:avLst/>
+          </a:prstGeom>
+          <a:noFill/>
+        </p:spPr>
+        <p:txBody>
+          <a:bodyPr wrap="none" lIns="0" rIns="0">
+            <a:noAutofit/>
+          </a:bodyPr>
+          <a:lstStyle/>
+          <a:p>
+            <a:pPr algn="l"/>
+            <a:r>
+              <a:rPr sz="3400" b="1" i="0">
+                <a:solidFill>
+                  <a:srgbClr val="0072CE"/>
+                </a:solidFill>
+                <a:latin typeface="Arial"/>
+              </a:rPr>
+              <a:t>Opportunities</a:t>
+            </a:r>
+          </a:p>
+        </p:txBody>
+      </p:sp>
+      <p:sp>
+        <p:nvSpPr>
+          <p:cNvPr id="13" name="Rectangle 12"/>
+          <p:cNvSpPr/>
+          <p:nvPr>
+            <p:ph type="body" idx="8"/>
+          </p:nvPr>
+        </p:nvSpPr>
+        <p:spPr>
+          <a:xfrm>
+            <a:off x="457200" y="4443983"/>
+            <a:ext cx="2830525" cy="54864"/>
+          </a:xfrm>
+          <a:prstGeom prst="rect">
+            <a:avLst/>
+          </a:prstGeom>
+          <a:solidFill>
+            <a:srgbClr val="0072CE"/>
+          </a:solidFill>
+          <a:ln>
+            <a:noFill/>
+          </a:ln>
+          <a:effectLst/>
+        </p:spPr>
+        <p:txBody>
+          <a:bodyPr rtlCol="0" anchor="ctr"/>
+          <a:lstStyle/>
+          <a:p>
+            <a:pPr algn="ctr"/>
+          </a:p>
+        </p:txBody>
+      </p:sp>
+      <p:sp>
+        <p:nvSpPr>
+          <p:cNvPr id="14" name="TextBox 13"/>
+          <p:cNvSpPr/>
+          <p:nvPr>
+            <p:ph type="body" idx="9"/>
+          </p:nvPr>
+        </p:nvSpPr>
+        <p:spPr>
+          <a:xfrm>
+            <a:off x="457200" y="4663439"/>
+            <a:ext cx="8015326" cy="609600"/>
+          </a:xfrm>
+          <a:prstGeom prst="rect">
+            <a:avLst/>
+          </a:prstGeom>
+          <a:noFill/>
+        </p:spPr>
+        <p:txBody>
+          <a:bodyPr wrap="none" lIns="0" rIns="0">
+            <a:noAutofit/>
+          </a:bodyPr>
+          <a:lstStyle/>
+          <a:p>
+            <a:pPr algn="l"/>
+            <a:r>
+              <a:rPr sz="3400" b="0" i="0">
+                <a:solidFill>
+                  <a:srgbClr val="0A2240"/>
+                </a:solidFill>
+                <a:latin typeface="Arial"/>
+              </a:rPr>
+              <a:t>New markets via partners</a:t>
+            </a:r>
+          </a:p>
+        </p:txBody>
+      </p:sp>
+      <p:sp>
+        <p:nvSpPr>
+          <p:cNvPr id="15" name="TextBox 14"/>
+          <p:cNvSpPr/>
+          <p:nvPr>
+            <p:ph type="body" idx="13"/>
+          </p:nvPr>
+        </p:nvSpPr>
+        <p:spPr>
+          <a:xfrm>
+            <a:off x="6233160" y="3767328"/>
+            <a:ext cx="5501640" cy="621791"/>
+          </a:xfrm>
+          <a:prstGeom prst="rect">
+            <a:avLst/>
+          </a:prstGeom>
+          <a:noFill/>
+        </p:spPr>
+        <p:txBody>
+          <a:bodyPr wrap="none" lIns="0" rIns="0">
+            <a:noAutofit/>
+          </a:bodyPr>
+          <a:lstStyle/>
+          <a:p>
+            <a:pPr algn="l"/>
+            <a:r>
+              <a:rPr sz="3400" b="1" i="0">
+                <a:solidFill>
+                  <a:srgbClr val="0A2240"/>
+                </a:solidFill>
+                <a:latin typeface="Arial"/>
+              </a:rPr>
+              <a:t>Threats</a:t>
+            </a:r>
+          </a:p>
+        </p:txBody>
+      </p:sp>
+      <p:sp>
+        <p:nvSpPr>
+          <p:cNvPr id="16" name="Rectangle 15"/>
+          <p:cNvSpPr/>
+          <p:nvPr>
+            <p:ph type="body" idx="14"/>
+          </p:nvPr>
+        </p:nvSpPr>
+        <p:spPr>
+          <a:xfrm>
+            <a:off x="6233160" y="4443983"/>
+            <a:ext cx="1559793" cy="54864"/>
+          </a:xfrm>
+          <a:prstGeom prst="rect">
+            <a:avLst/>
+          </a:prstGeom>
+          <a:solidFill>
+            <a:srgbClr val="0A2240"/>
+          </a:solidFill>
+          <a:ln>
+            <a:noFill/>
+          </a:ln>
+          <a:effectLst/>
+        </p:spPr>
+        <p:txBody>
+          <a:bodyPr rtlCol="0" anchor="ctr"/>
+          <a:lstStyle/>
+          <a:p>
+            <a:pPr algn="ctr"/>
+          </a:p>
+        </p:txBody>
+      </p:sp>
+      <p:sp>
+        <p:nvSpPr>
+          <p:cNvPr id="17" name="TextBox 16"/>
+          <p:cNvSpPr/>
+          <p:nvPr>
+            <p:ph type="body" idx="15"/>
+          </p:nvPr>
+        </p:nvSpPr>
+        <p:spPr>
+          <a:xfrm>
+            <a:off x="6233160" y="4663439"/>
+            <a:ext cx="5958840" cy="609600"/>
+          </a:xfrm>
+          <a:prstGeom prst="rect">
+            <a:avLst/>
+          </a:prstGeom>
+          <a:noFill/>
+        </p:spPr>
+        <p:txBody>
+          <a:bodyPr wrap="none" lIns="0" rIns="0">
+            <a:noAutofit/>
+          </a:bodyPr>
+          <a:lstStyle/>
+          <a:p>
+            <a:pPr algn="l"/>
+            <a:r>
+              <a:rPr sz="3400" b="0" i="0">
+                <a:solidFill>
+                  <a:srgbClr val="0A2240"/>
+                </a:solidFill>
+                <a:latin typeface="Arial"/>
+              </a:rPr>
+              <a:t>New entrants cut prices</a:t>
             </a:r>
           </a:p>
         </p:txBody>
@@ -16838,533 +16636,6 @@
 </file>
 
 <file path=ppt/slideLayouts/slideLayout40.xml><?xml version="1.0" encoding="utf-8"?>
-<p:sldLayout xmlns:a="http://schemas.openxmlformats.org/drawingml/2006/main" xmlns:r="http://schemas.openxmlformats.org/officeDocument/2006/relationships" xmlns:p="http://schemas.openxmlformats.org/presentationml/2006/main" type="blank" preserve="1">
-  <p:cSld name="slidekit · SWOT">
-    <p:bg>
-      <p:bgPr>
-        <a:solidFill>
-          <a:srgbClr val="FFFFFF"/>
-        </a:solidFill>
-        <a:effectLst/>
-      </p:bgPr>
-    </p:bg>
-    <p:spTree>
-      <p:nvGrpSpPr>
-        <p:cNvPr id="1" name=""/>
-        <p:cNvGrpSpPr/>
-        <p:nvPr/>
-      </p:nvGrpSpPr>
-      <p:grpSpPr>
-        <a:xfrm>
-          <a:off x="0" y="0"/>
-          <a:ext cx="0" cy="0"/>
-          <a:chOff x="0" y="0"/>
-          <a:chExt cx="0" cy="0"/>
-        </a:xfrm>
-      </p:grpSpPr>
-      <p:sp>
-        <p:nvSpPr>
-          <p:cNvPr id="4" name="Slide Number Placeholder 3"/>
-          <p:cNvSpPr>
-            <a:spLocks noGrp="1"/>
-          </p:cNvSpPr>
-          <p:nvPr>
-            <p:ph type="sldNum" sz="quarter" idx="12"/>
-          </p:nvPr>
-        </p:nvSpPr>
-        <p:spPr>
-          <a:xfrm>
-            <a:off x="11186160" y="6035040"/>
-            <a:ext cx="548640" cy="365760"/>
-          </a:xfrm>
-        </p:spPr>
-        <p:txBody>
-          <a:bodyPr/>
-          <a:lstStyle/>
-          <a:p>
-            <a:fld id="{C1FF6DA9-008F-8B48-92A6-B652298478BF}" type="slidenum">
-              <a:rPr lang="en-US" smtClean="0"/>
-              <a:t>‹#›</a:t>
-            </a:fld>
-            <a:endParaRPr lang="en-US"/>
-          </a:p>
-        </p:txBody>
-      </p:sp>
-      <p:sp>
-        <p:nvSpPr>
-          <p:cNvPr id="5" name="TextBox 4"/>
-          <p:cNvSpPr/>
-          <p:nvPr>
-            <p:ph type="title"/>
-          </p:nvPr>
-        </p:nvSpPr>
-        <p:spPr>
-          <a:xfrm>
-            <a:off x="457200" y="457200"/>
-            <a:ext cx="11277600" cy="768096"/>
-          </a:xfrm>
-          <a:prstGeom prst="rect">
-            <a:avLst/>
-          </a:prstGeom>
-          <a:noFill/>
-        </p:spPr>
-        <p:txBody>
-          <a:bodyPr wrap="none" lIns="0" rIns="0">
-            <a:noAutofit/>
-          </a:bodyPr>
-          <a:lstStyle/>
-          <a:p>
-            <a:pPr algn="l"/>
-            <a:r>
-              <a:rPr sz="4200" b="1" i="0">
-                <a:solidFill>
-                  <a:srgbClr val="0072CE"/>
-                </a:solidFill>
-                <a:latin typeface="Arial"/>
-              </a:rPr>
-              <a:t>SWOT Analysis</a:t>
-            </a:r>
-          </a:p>
-        </p:txBody>
-      </p:sp>
-      <p:sp>
-        <p:nvSpPr>
-          <p:cNvPr id="6" name="TextBox 5"/>
-          <p:cNvSpPr/>
-          <p:nvPr>
-            <p:ph type="body" idx="1"/>
-          </p:nvPr>
-        </p:nvSpPr>
-        <p:spPr>
-          <a:xfrm>
-            <a:off x="457200" y="1499616"/>
-            <a:ext cx="5501640" cy="621791"/>
-          </a:xfrm>
-          <a:prstGeom prst="rect">
-            <a:avLst/>
-          </a:prstGeom>
-          <a:noFill/>
-        </p:spPr>
-        <p:txBody>
-          <a:bodyPr wrap="none" lIns="0" rIns="0">
-            <a:noAutofit/>
-          </a:bodyPr>
-          <a:lstStyle/>
-          <a:p>
-            <a:pPr algn="l"/>
-            <a:r>
-              <a:rPr sz="3400" b="1" i="0">
-                <a:solidFill>
-                  <a:srgbClr val="0072CE"/>
-                </a:solidFill>
-                <a:latin typeface="Arial"/>
-              </a:rPr>
-              <a:t>Strengths</a:t>
-            </a:r>
-          </a:p>
-        </p:txBody>
-      </p:sp>
-      <p:sp>
-        <p:nvSpPr>
-          <p:cNvPr id="7" name="Rectangle 6"/>
-          <p:cNvSpPr/>
-          <p:nvPr>
-            <p:ph type="body" idx="2"/>
-          </p:nvPr>
-        </p:nvSpPr>
-        <p:spPr>
-          <a:xfrm>
-            <a:off x="457200" y="2176271"/>
-            <a:ext cx="1650492" cy="54864"/>
-          </a:xfrm>
-          <a:prstGeom prst="rect">
-            <a:avLst/>
-          </a:prstGeom>
-          <a:solidFill>
-            <a:srgbClr val="0072CE"/>
-          </a:solidFill>
-          <a:ln>
-            <a:noFill/>
-          </a:ln>
-          <a:effectLst/>
-        </p:spPr>
-        <p:txBody>
-          <a:bodyPr rtlCol="0" anchor="ctr"/>
-          <a:lstStyle/>
-          <a:p>
-            <a:pPr algn="ctr"/>
-          </a:p>
-        </p:txBody>
-      </p:sp>
-      <p:sp>
-        <p:nvSpPr>
-          <p:cNvPr id="8" name="TextBox 7"/>
-          <p:cNvSpPr/>
-          <p:nvPr>
-            <p:ph type="body" idx="3"/>
-          </p:nvPr>
-        </p:nvSpPr>
-        <p:spPr>
-          <a:xfrm>
-            <a:off x="457200" y="2395727"/>
-            <a:ext cx="5501640" cy="1097281"/>
-          </a:xfrm>
-          <a:prstGeom prst="rect">
-            <a:avLst/>
-          </a:prstGeom>
-          <a:noFill/>
-        </p:spPr>
-        <p:txBody>
-          <a:bodyPr wrap="square" lIns="0" rIns="0">
-            <a:noAutofit/>
-          </a:bodyPr>
-          <a:lstStyle/>
-          <a:p>
-            <a:pPr algn="l"/>
-            <a:r>
-              <a:rPr sz="3400" b="0" i="0">
-                <a:solidFill>
-                  <a:srgbClr val="0A2240"/>
-                </a:solidFill>
-                <a:latin typeface="Arial"/>
-              </a:rPr>
-              <a:t>A strong brand with loyal users</a:t>
-            </a:r>
-          </a:p>
-        </p:txBody>
-      </p:sp>
-      <p:sp>
-        <p:nvSpPr>
-          <p:cNvPr id="9" name="TextBox 8"/>
-          <p:cNvSpPr/>
-          <p:nvPr>
-            <p:ph type="body" idx="4"/>
-          </p:nvPr>
-        </p:nvSpPr>
-        <p:spPr>
-          <a:xfrm>
-            <a:off x="6233160" y="1499616"/>
-            <a:ext cx="5501640" cy="621791"/>
-          </a:xfrm>
-          <a:prstGeom prst="rect">
-            <a:avLst/>
-          </a:prstGeom>
-          <a:noFill/>
-        </p:spPr>
-        <p:txBody>
-          <a:bodyPr wrap="none" lIns="0" rIns="0">
-            <a:noAutofit/>
-          </a:bodyPr>
-          <a:lstStyle/>
-          <a:p>
-            <a:pPr algn="l"/>
-            <a:r>
-              <a:rPr sz="3400" b="1" i="0">
-                <a:solidFill>
-                  <a:srgbClr val="5B6B82"/>
-                </a:solidFill>
-                <a:latin typeface="Arial"/>
-              </a:rPr>
-              <a:t>Weaknesses</a:t>
-            </a:r>
-          </a:p>
-        </p:txBody>
-      </p:sp>
-      <p:sp>
-        <p:nvSpPr>
-          <p:cNvPr id="10" name="Rectangle 9"/>
-          <p:cNvSpPr/>
-          <p:nvPr>
-            <p:ph type="body" idx="5"/>
-          </p:nvPr>
-        </p:nvSpPr>
-        <p:spPr>
-          <a:xfrm>
-            <a:off x="6233160" y="2176271"/>
-            <a:ext cx="1650492" cy="54864"/>
-          </a:xfrm>
-          <a:prstGeom prst="rect">
-            <a:avLst/>
-          </a:prstGeom>
-          <a:solidFill>
-            <a:srgbClr val="5B6B82"/>
-          </a:solidFill>
-          <a:ln>
-            <a:noFill/>
-          </a:ln>
-          <a:effectLst/>
-        </p:spPr>
-        <p:txBody>
-          <a:bodyPr rtlCol="0" anchor="ctr"/>
-          <a:lstStyle/>
-          <a:p>
-            <a:pPr algn="ctr"/>
-          </a:p>
-        </p:txBody>
-      </p:sp>
-      <p:sp>
-        <p:nvSpPr>
-          <p:cNvPr id="11" name="TextBox 10"/>
-          <p:cNvSpPr/>
-          <p:nvPr>
-            <p:ph type="body" idx="6"/>
-          </p:nvPr>
-        </p:nvSpPr>
-        <p:spPr>
-          <a:xfrm>
-            <a:off x="6233160" y="2395727"/>
-            <a:ext cx="5501640" cy="1097281"/>
-          </a:xfrm>
-          <a:prstGeom prst="rect">
-            <a:avLst/>
-          </a:prstGeom>
-          <a:noFill/>
-        </p:spPr>
-        <p:txBody>
-          <a:bodyPr wrap="square" lIns="0" rIns="0">
-            <a:noAutofit/>
-          </a:bodyPr>
-          <a:lstStyle/>
-          <a:p>
-            <a:pPr algn="l"/>
-            <a:r>
-              <a:rPr sz="3400" b="0" i="0">
-                <a:solidFill>
-                  <a:srgbClr val="0A2240"/>
-                </a:solidFill>
-                <a:latin typeface="Arial"/>
-              </a:rPr>
-              <a:t>Thin margins and a small team</a:t>
-            </a:r>
-          </a:p>
-        </p:txBody>
-      </p:sp>
-      <p:sp>
-        <p:nvSpPr>
-          <p:cNvPr id="12" name="TextBox 11"/>
-          <p:cNvSpPr/>
-          <p:nvPr>
-            <p:ph type="body" idx="7"/>
-          </p:nvPr>
-        </p:nvSpPr>
-        <p:spPr>
-          <a:xfrm>
-            <a:off x="457200" y="3767328"/>
-            <a:ext cx="5501640" cy="621791"/>
-          </a:xfrm>
-          <a:prstGeom prst="rect">
-            <a:avLst/>
-          </a:prstGeom>
-          <a:noFill/>
-        </p:spPr>
-        <p:txBody>
-          <a:bodyPr wrap="none" lIns="0" rIns="0">
-            <a:noAutofit/>
-          </a:bodyPr>
-          <a:lstStyle/>
-          <a:p>
-            <a:pPr algn="l"/>
-            <a:r>
-              <a:rPr sz="3400" b="1" i="0">
-                <a:solidFill>
-                  <a:srgbClr val="0072CE"/>
-                </a:solidFill>
-                <a:latin typeface="Arial"/>
-              </a:rPr>
-              <a:t>Opportunities</a:t>
-            </a:r>
-          </a:p>
-        </p:txBody>
-      </p:sp>
-      <p:sp>
-        <p:nvSpPr>
-          <p:cNvPr id="13" name="Rectangle 12"/>
-          <p:cNvSpPr/>
-          <p:nvPr>
-            <p:ph type="body" idx="8"/>
-          </p:nvPr>
-        </p:nvSpPr>
-        <p:spPr>
-          <a:xfrm>
-            <a:off x="457200" y="4443983"/>
-            <a:ext cx="1650492" cy="54864"/>
-          </a:xfrm>
-          <a:prstGeom prst="rect">
-            <a:avLst/>
-          </a:prstGeom>
-          <a:solidFill>
-            <a:srgbClr val="0072CE"/>
-          </a:solidFill>
-          <a:ln>
-            <a:noFill/>
-          </a:ln>
-          <a:effectLst/>
-        </p:spPr>
-        <p:txBody>
-          <a:bodyPr rtlCol="0" anchor="ctr"/>
-          <a:lstStyle/>
-          <a:p>
-            <a:pPr algn="ctr"/>
-          </a:p>
-        </p:txBody>
-      </p:sp>
-      <p:sp>
-        <p:nvSpPr>
-          <p:cNvPr id="14" name="TextBox 13"/>
-          <p:cNvSpPr/>
-          <p:nvPr>
-            <p:ph type="body" idx="9"/>
-          </p:nvPr>
-        </p:nvSpPr>
-        <p:spPr>
-          <a:xfrm>
-            <a:off x="457200" y="4663439"/>
-            <a:ext cx="5501640" cy="1097281"/>
-          </a:xfrm>
-          <a:prstGeom prst="rect">
-            <a:avLst/>
-          </a:prstGeom>
-          <a:noFill/>
-        </p:spPr>
-        <p:txBody>
-          <a:bodyPr wrap="square" lIns="0" rIns="0">
-            <a:noAutofit/>
-          </a:bodyPr>
-          <a:lstStyle/>
-          <a:p>
-            <a:pPr algn="l"/>
-            <a:r>
-              <a:rPr sz="3400" b="0" i="0">
-                <a:solidFill>
-                  <a:srgbClr val="0A2240"/>
-                </a:solidFill>
-                <a:latin typeface="Arial"/>
-              </a:rPr>
-              <a:t>New markets through partnerships</a:t>
-            </a:r>
-          </a:p>
-        </p:txBody>
-      </p:sp>
-      <p:sp>
-        <p:nvSpPr>
-          <p:cNvPr id="15" name="TextBox 14"/>
-          <p:cNvSpPr/>
-          <p:nvPr>
-            <p:ph type="body" idx="13"/>
-          </p:nvPr>
-        </p:nvSpPr>
-        <p:spPr>
-          <a:xfrm>
-            <a:off x="6233160" y="3767328"/>
-            <a:ext cx="5501640" cy="621791"/>
-          </a:xfrm>
-          <a:prstGeom prst="rect">
-            <a:avLst/>
-          </a:prstGeom>
-          <a:noFill/>
-        </p:spPr>
-        <p:txBody>
-          <a:bodyPr wrap="none" lIns="0" rIns="0">
-            <a:noAutofit/>
-          </a:bodyPr>
-          <a:lstStyle/>
-          <a:p>
-            <a:pPr algn="l"/>
-            <a:r>
-              <a:rPr sz="3400" b="1" i="0">
-                <a:solidFill>
-                  <a:srgbClr val="5B6B82"/>
-                </a:solidFill>
-                <a:latin typeface="Arial"/>
-              </a:rPr>
-              <a:t>Threats</a:t>
-            </a:r>
-          </a:p>
-        </p:txBody>
-      </p:sp>
-      <p:sp>
-        <p:nvSpPr>
-          <p:cNvPr id="16" name="Rectangle 15"/>
-          <p:cNvSpPr/>
-          <p:nvPr>
-            <p:ph type="body" idx="14"/>
-          </p:nvPr>
-        </p:nvSpPr>
-        <p:spPr>
-          <a:xfrm>
-            <a:off x="6233160" y="4443983"/>
-            <a:ext cx="1650492" cy="54864"/>
-          </a:xfrm>
-          <a:prstGeom prst="rect">
-            <a:avLst/>
-          </a:prstGeom>
-          <a:solidFill>
-            <a:srgbClr val="5B6B82"/>
-          </a:solidFill>
-          <a:ln>
-            <a:noFill/>
-          </a:ln>
-          <a:effectLst/>
-        </p:spPr>
-        <p:txBody>
-          <a:bodyPr rtlCol="0" anchor="ctr"/>
-          <a:lstStyle/>
-          <a:p>
-            <a:pPr algn="ctr"/>
-          </a:p>
-        </p:txBody>
-      </p:sp>
-      <p:sp>
-        <p:nvSpPr>
-          <p:cNvPr id="17" name="TextBox 16"/>
-          <p:cNvSpPr/>
-          <p:nvPr>
-            <p:ph type="body" idx="15"/>
-          </p:nvPr>
-        </p:nvSpPr>
-        <p:spPr>
-          <a:xfrm>
-            <a:off x="6233160" y="4663439"/>
-            <a:ext cx="5501640" cy="1097281"/>
-          </a:xfrm>
-          <a:prstGeom prst="rect">
-            <a:avLst/>
-          </a:prstGeom>
-          <a:noFill/>
-        </p:spPr>
-        <p:txBody>
-          <a:bodyPr wrap="square" lIns="0" rIns="0">
-            <a:noAutofit/>
-          </a:bodyPr>
-          <a:lstStyle/>
-          <a:p>
-            <a:pPr algn="l"/>
-            <a:r>
-              <a:rPr sz="3400" b="0" i="0">
-                <a:solidFill>
-                  <a:srgbClr val="0A2240"/>
-                </a:solidFill>
-                <a:latin typeface="Arial"/>
-              </a:rPr>
-              <a:t>New entrants driving price pressure</a:t>
-            </a:r>
-          </a:p>
-        </p:txBody>
-      </p:sp>
-    </p:spTree>
-    <p:extLst>
-      <p:ext uri="{BB962C8B-B14F-4D97-AF65-F5344CB8AC3E}">
-        <p14:creationId xmlns:p14="http://schemas.microsoft.com/office/powerpoint/2010/main" val="1212999818"/>
-      </p:ext>
-    </p:extLst>
-  </p:cSld>
-  <p:clrMapOvr>
-    <a:masterClrMapping/>
-  </p:clrMapOvr>
-</p:sldLayout>
-</file>
-
-<file path=ppt/slideLayouts/slideLayout41.xml><?xml version="1.0" encoding="utf-8"?>
 <p:sldLayout xmlns:a="http://schemas.openxmlformats.org/drawingml/2006/main" xmlns:r="http://schemas.openxmlformats.org/officeDocument/2006/relationships" xmlns:p="http://schemas.openxmlformats.org/presentationml/2006/main" type="blank" preserve="1">
   <p:cSld name="slidekit · Comparison Matrix">
     <p:bg>
@@ -19568,7 +18839,6 @@
     <p:sldLayoutId id="2147483738" r:id="rId39"/>
     <p:sldLayoutId id="2147483739" r:id="rId40"/>
     <p:sldLayoutId id="2147483740" r:id="rId41"/>
-    <p:sldLayoutId id="2147483741" r:id="rId42"/>
   </p:sldLayoutIdLst>
   <p:txStyles>
     <p:titleStyle>
@@ -20079,7 +19349,7 @@
             <a:fld id="{4B0E1F8A-6C1D-4E2A-9F3B-7A5C8D2E1F60}" type="slidenum">
               <a:rPr sz="1600" b="0" i="0">
                 <a:solidFill>
-                  <a:srgbClr val="5B6B82"/>
+                  <a:srgbClr val="0A2240"/>
                 </a:solidFill>
                 <a:latin typeface="Arial"/>
               </a:rPr>
@@ -20317,7 +19587,7 @@
             <a:fld id="{4B0E1F8A-6C1D-4E2A-9F3B-7A5C8D2E1F60}" type="slidenum">
               <a:rPr sz="1600" b="0" i="0">
                 <a:solidFill>
-                  <a:srgbClr val="5B6B82"/>
+                  <a:srgbClr val="0A2240"/>
                 </a:solidFill>
                 <a:latin typeface="Arial"/>
               </a:rPr>
@@ -20413,7 +19683,7 @@
             <a:r>
               <a:rPr sz="3400" b="1" i="0">
                 <a:solidFill>
-                  <a:srgbClr val="123A6B"/>
+                  <a:srgbClr val="0072CE"/>
                 </a:solidFill>
                 <a:latin typeface="Arial"/>
               </a:rPr>
@@ -20448,7 +19718,7 @@
             <a:r>
               <a:rPr sz="3400" b="1" i="0">
                 <a:solidFill>
-                  <a:srgbClr val="123A6B"/>
+                  <a:srgbClr val="0072CE"/>
                 </a:solidFill>
                 <a:latin typeface="Arial"/>
               </a:rPr>
@@ -20669,7 +19939,7 @@
             <a:fld id="{4B0E1F8A-6C1D-4E2A-9F3B-7A5C8D2E1F60}" type="slidenum">
               <a:rPr sz="1600" b="0" i="0">
                 <a:solidFill>
-                  <a:srgbClr val="5B6B82"/>
+                  <a:srgbClr val="0A2240"/>
                 </a:solidFill>
                 <a:latin typeface="Arial"/>
               </a:rPr>
@@ -21284,7 +20554,7 @@
             <a:fld id="{4B0E1F8A-6C1D-4E2A-9F3B-7A5C8D2E1F60}" type="slidenum">
               <a:rPr sz="1600" b="0" i="0">
                 <a:solidFill>
-                  <a:srgbClr val="5B6B82"/>
+                  <a:srgbClr val="0A2240"/>
                 </a:solidFill>
                 <a:latin typeface="Arial"/>
               </a:rPr>
@@ -21461,7 +20731,7 @@
             <a:fld id="{4B0E1F8A-6C1D-4E2A-9F3B-7A5C8D2E1F60}" type="slidenum">
               <a:rPr sz="1600" b="0" i="0">
                 <a:solidFill>
-                  <a:srgbClr val="5B6B82"/>
+                  <a:srgbClr val="0A2240"/>
                 </a:solidFill>
                 <a:latin typeface="Arial"/>
               </a:rPr>
@@ -21557,7 +20827,7 @@
             <a:r>
               <a:rPr sz="4200" b="1" i="0">
                 <a:solidFill>
-                  <a:srgbClr val="123A6B"/>
+                  <a:srgbClr val="0072CE"/>
                 </a:solidFill>
                 <a:latin typeface="Arial"/>
               </a:rPr>
@@ -21592,7 +20862,7 @@
             <a:r>
               <a:rPr sz="4200" b="1" i="0">
                 <a:solidFill>
-                  <a:srgbClr val="123A6B"/>
+                  <a:srgbClr val="0072CE"/>
                 </a:solidFill>
                 <a:latin typeface="Arial"/>
               </a:rPr>
@@ -21662,7 +20932,7 @@
             <a:r>
               <a:rPr sz="4200" b="1" i="0">
                 <a:solidFill>
-                  <a:srgbClr val="123A6B"/>
+                  <a:srgbClr val="0072CE"/>
                 </a:solidFill>
                 <a:latin typeface="Arial"/>
               </a:rPr>
@@ -21697,7 +20967,7 @@
             <a:r>
               <a:rPr sz="4200" b="1" i="0">
                 <a:solidFill>
-                  <a:srgbClr val="123A6B"/>
+                  <a:srgbClr val="0072CE"/>
                 </a:solidFill>
                 <a:latin typeface="Arial"/>
               </a:rPr>
@@ -21767,7 +21037,7 @@
             <a:r>
               <a:rPr sz="4200" b="1" i="0">
                 <a:solidFill>
-                  <a:srgbClr val="123A6B"/>
+                  <a:srgbClr val="0072CE"/>
                 </a:solidFill>
                 <a:latin typeface="Arial"/>
               </a:rPr>
@@ -21802,7 +21072,7 @@
             <a:r>
               <a:rPr sz="4200" b="1" i="0">
                 <a:solidFill>
-                  <a:srgbClr val="123A6B"/>
+                  <a:srgbClr val="0072CE"/>
                 </a:solidFill>
                 <a:latin typeface="Arial"/>
               </a:rPr>
@@ -21874,7 +21144,7 @@
             <a:fld id="{4B0E1F8A-6C1D-4E2A-9F3B-7A5C8D2E1F60}" type="slidenum">
               <a:rPr sz="1600" b="0" i="0">
                 <a:solidFill>
-                  <a:srgbClr val="5B6B82"/>
+                  <a:srgbClr val="0A2240"/>
                 </a:solidFill>
                 <a:latin typeface="Arial"/>
               </a:rPr>
@@ -22112,7 +21382,7 @@
             <a:fld id="{4B0E1F8A-6C1D-4E2A-9F3B-7A5C8D2E1F60}" type="slidenum">
               <a:rPr sz="1600" b="0" i="0">
                 <a:solidFill>
-                  <a:srgbClr val="5B6B82"/>
+                  <a:srgbClr val="0A2240"/>
                 </a:solidFill>
                 <a:latin typeface="Arial"/>
               </a:rPr>
@@ -22350,7 +21620,7 @@
             <a:fld id="{4B0E1F8A-6C1D-4E2A-9F3B-7A5C8D2E1F60}" type="slidenum">
               <a:rPr sz="1600" b="0" i="0">
                 <a:solidFill>
-                  <a:srgbClr val="5B6B82"/>
+                  <a:srgbClr val="0A2240"/>
                 </a:solidFill>
                 <a:latin typeface="Arial"/>
               </a:rPr>
@@ -22588,7 +21858,7 @@
             <a:fld id="{4B0E1F8A-6C1D-4E2A-9F3B-7A5C8D2E1F60}" type="slidenum">
               <a:rPr sz="1600" b="0" i="0">
                 <a:solidFill>
-                  <a:srgbClr val="5B6B82"/>
+                  <a:srgbClr val="0A2240"/>
                 </a:solidFill>
                 <a:latin typeface="Arial"/>
               </a:rPr>
@@ -22684,7 +21954,7 @@
             <a:r>
               <a:rPr sz="3400" b="1" i="0">
                 <a:solidFill>
-                  <a:srgbClr val="5B6B82"/>
+                  <a:srgbClr val="0A2240"/>
                 </a:solidFill>
                 <a:latin typeface="Arial"/>
               </a:rPr>
@@ -22701,14 +21971,14 @@
         </p:nvSpPr>
         <p:spPr>
           <a:xfrm>
-            <a:off x="548640" y="2176271"/>
-            <a:ext cx="1650492" cy="54864"/>
+            <a:off x="457200" y="2176271"/>
+            <a:ext cx="2826519" cy="54864"/>
           </a:xfrm>
           <a:prstGeom prst="rect">
             <a:avLst/>
           </a:prstGeom>
           <a:solidFill>
-            <a:srgbClr val="5B6B82"/>
+            <a:srgbClr val="0A2240"/>
           </a:solidFill>
           <a:ln>
             <a:noFill/>
@@ -22780,8 +22050,8 @@
         </p:nvSpPr>
         <p:spPr>
           <a:xfrm>
-            <a:off x="6324600" y="2176271"/>
-            <a:ext cx="1650492" cy="54864"/>
+            <a:off x="6233160" y="2176271"/>
+            <a:ext cx="2155205" cy="54864"/>
           </a:xfrm>
           <a:prstGeom prst="rect">
             <a:avLst/>
@@ -23054,7 +22324,7 @@
             <a:fld id="{4B0E1F8A-6C1D-4E2A-9F3B-7A5C8D2E1F60}" type="slidenum">
               <a:rPr sz="1600" b="0" i="0">
                 <a:solidFill>
-                  <a:srgbClr val="5B6B82"/>
+                  <a:srgbClr val="0A2240"/>
                 </a:solidFill>
                 <a:latin typeface="Arial"/>
               </a:rPr>
@@ -23229,7 +22499,7 @@
             <a:r>
               <a:rPr sz="3400" b="0" i="0">
                 <a:solidFill>
-                  <a:srgbClr val="5B6B82"/>
+                  <a:srgbClr val="0A2240"/>
                 </a:solidFill>
                 <a:latin typeface="Arial"/>
               </a:rPr>
@@ -23266,7 +22536,7 @@
             <a:fld id="{4B0E1F8A-6C1D-4E2A-9F3B-7A5C8D2E1F60}" type="slidenum">
               <a:rPr sz="1600" b="0" i="0">
                 <a:solidFill>
-                  <a:srgbClr val="5B6B82"/>
+                  <a:srgbClr val="0A2240"/>
                 </a:solidFill>
                 <a:latin typeface="Arial"/>
               </a:rPr>
@@ -23504,7 +22774,7 @@
             <a:fld id="{4B0E1F8A-6C1D-4E2A-9F3B-7A5C8D2E1F60}" type="slidenum">
               <a:rPr sz="1600" b="0" i="0">
                 <a:solidFill>
-                  <a:srgbClr val="5B6B82"/>
+                  <a:srgbClr val="0A2240"/>
                 </a:solidFill>
                 <a:latin typeface="Arial"/>
               </a:rPr>
@@ -23812,7 +23082,7 @@
             <a:fld id="{4B0E1F8A-6C1D-4E2A-9F3B-7A5C8D2E1F60}" type="slidenum">
               <a:rPr sz="1600" b="0" i="0">
                 <a:solidFill>
-                  <a:srgbClr val="5B6B82"/>
+                  <a:srgbClr val="0A2240"/>
                 </a:solidFill>
                 <a:latin typeface="Arial"/>
               </a:rPr>
@@ -23862,7 +23132,7 @@
             <a:avLst/>
           </a:prstGeom>
           <a:solidFill>
-            <a:srgbClr val="FF5F56"/>
+            <a:srgbClr val="FFFFFF"/>
           </a:solidFill>
           <a:ln>
             <a:noFill/>
@@ -23906,7 +23176,7 @@
             <a:avLst/>
           </a:prstGeom>
           <a:solidFill>
-            <a:srgbClr val="FFBD2E"/>
+            <a:srgbClr val="FFFFFF"/>
           </a:solidFill>
           <a:ln>
             <a:noFill/>
@@ -23950,7 +23220,7 @@
             <a:avLst/>
           </a:prstGeom>
           <a:solidFill>
-            <a:srgbClr val="27C93F"/>
+            <a:srgbClr val="FFFFFF"/>
           </a:solidFill>
           <a:ln>
             <a:noFill/>
@@ -24005,7 +23275,7 @@
             <a:r>
               <a:rPr sz="4200" b="0" i="0">
                 <a:solidFill>
-                  <a:srgbClr val="D4D4D4"/>
+                  <a:srgbClr val="FFFFFF"/>
                 </a:solidFill>
                 <a:latin typeface="Arial"/>
               </a:rPr>
@@ -24040,7 +23310,7 @@
             <a:r>
               <a:rPr sz="3400" b="0" i="0">
                 <a:solidFill>
-                  <a:srgbClr val="6A9955"/>
+                  <a:srgbClr val="FFFFFF"/>
                 </a:solidFill>
                 <a:latin typeface="Arial"/>
               </a:rPr>
@@ -24075,7 +23345,7 @@
             <a:r>
               <a:rPr sz="3400" b="0" i="0">
                 <a:solidFill>
-                  <a:srgbClr val="D4D4D4"/>
+                  <a:srgbClr val="FFFFFF"/>
                 </a:solidFill>
                 <a:latin typeface="Arial"/>
               </a:rPr>
@@ -24093,7 +23363,7 @@
         <p:spPr>
           <a:xfrm>
             <a:off x="457200" y="2874262"/>
-            <a:ext cx="1218862" cy="518159"/>
+            <a:ext cx="11510883" cy="518159"/>
           </a:xfrm>
           <a:prstGeom prst="rect">
             <a:avLst/>
@@ -24110,11 +23380,11 @@
             <a:r>
               <a:rPr sz="3400" b="0" i="0">
                 <a:solidFill>
-                  <a:srgbClr val="D4D4D4"/>
-                </a:solidFill>
-                <a:latin typeface="Arial"/>
-              </a:rPr>
-              <a:t>  F-</a:t>
+                  <a:srgbClr val="FFFFFF"/>
+                </a:solidFill>
+                <a:latin typeface="Arial"/>
+              </a:rPr>
+              <a:t>  F-03 wrong year, F-07 empty hangs</a:t>
             </a:r>
           </a:p>
         </p:txBody>
@@ -24127,8 +23397,8 @@
         </p:nvSpPr>
         <p:spPr>
           <a:xfrm>
-            <a:off x="1104689" y="2874262"/>
-            <a:ext cx="951348" cy="518159"/>
+            <a:off x="457200" y="3392421"/>
+            <a:ext cx="3100228" cy="518159"/>
           </a:xfrm>
           <a:prstGeom prst="rect">
             <a:avLst/>
@@ -24145,11 +23415,11 @@
             <a:r>
               <a:rPr sz="3400" b="0" i="0">
                 <a:solidFill>
-                  <a:srgbClr val="B5CEA8"/>
-                </a:solidFill>
-                <a:latin typeface="Arial"/>
-              </a:rPr>
-              <a:t>03</a:t>
+                  <a:srgbClr val="FFFFFF"/>
+                </a:solidFill>
+                <a:latin typeface="Arial"/>
+              </a:rPr>
+              <a:t>BELOW (</a:t>
             </a:r>
           </a:p>
         </p:txBody>
@@ -24162,8 +23432,8 @@
         </p:nvSpPr>
         <p:spPr>
           <a:xfrm>
-            <a:off x="1584982" y="2874262"/>
-            <a:ext cx="4790321" cy="518159"/>
+            <a:off x="2280543" y="3392421"/>
+            <a:ext cx="1143297" cy="518159"/>
           </a:xfrm>
           <a:prstGeom prst="rect">
             <a:avLst/>
@@ -24180,11 +23450,11 @@
             <a:r>
               <a:rPr sz="3400" b="0" i="0">
                 <a:solidFill>
-                  <a:srgbClr val="D4D4D4"/>
-                </a:solidFill>
-                <a:latin typeface="Arial"/>
-              </a:rPr>
-              <a:t> wrong year, F-</a:t>
+                  <a:srgbClr val="569CD6"/>
+                </a:solidFill>
+                <a:latin typeface="Arial"/>
+              </a:rPr>
+              <a:t>not</a:t>
             </a:r>
           </a:p>
         </p:txBody>
@@ -24197,8 +23467,8 @@
         </p:nvSpPr>
         <p:spPr>
           <a:xfrm>
-            <a:off x="4464633" y="2874262"/>
-            <a:ext cx="951348" cy="518159"/>
+            <a:off x="2880804" y="3392421"/>
+            <a:ext cx="6276657" cy="518159"/>
           </a:xfrm>
           <a:prstGeom prst="rect">
             <a:avLst/>
@@ -24215,11 +23485,11 @@
             <a:r>
               <a:rPr sz="3400" b="0" i="0">
                 <a:solidFill>
-                  <a:srgbClr val="B5CEA8"/>
-                </a:solidFill>
-                <a:latin typeface="Arial"/>
-              </a:rPr>
-              <a:t>07</a:t>
+                  <a:srgbClr val="FFFFFF"/>
+                </a:solidFill>
+                <a:latin typeface="Arial"/>
+              </a:rPr>
+              <a:t> today, on purpose):</a:t>
             </a:r>
           </a:p>
         </p:txBody>
@@ -24232,8 +23502,8 @@
         </p:nvSpPr>
         <p:spPr>
           <a:xfrm>
-            <a:off x="4944926" y="2874262"/>
-            <a:ext cx="4330521" cy="518159"/>
+            <a:off x="457200" y="3910580"/>
+            <a:ext cx="8975070" cy="518159"/>
           </a:xfrm>
           <a:prstGeom prst="rect">
             <a:avLst/>
@@ -24250,11 +23520,11 @@
             <a:r>
               <a:rPr sz="3400" b="0" i="0">
                 <a:solidFill>
-                  <a:srgbClr val="D4D4D4"/>
-                </a:solidFill>
-                <a:latin typeface="Arial"/>
-              </a:rPr>
-              <a:t> empty hangs</a:t>
+                  <a:srgbClr val="FFFFFF"/>
+                </a:solidFill>
+                <a:latin typeface="Arial"/>
+              </a:rPr>
+              <a:t>  F-01 slow, F-05 ugly errors,</a:t>
             </a:r>
           </a:p>
         </p:txBody>
@@ -24267,8 +23537,8 @@
         </p:nvSpPr>
         <p:spPr>
           <a:xfrm>
-            <a:off x="457200" y="3392421"/>
-            <a:ext cx="3100228" cy="518159"/>
+            <a:off x="457200" y="4428739"/>
+            <a:ext cx="9170054" cy="518159"/>
           </a:xfrm>
           <a:prstGeom prst="rect">
             <a:avLst/>
@@ -24285,11 +23555,11 @@
             <a:r>
               <a:rPr sz="3400" b="0" i="0">
                 <a:solidFill>
-                  <a:srgbClr val="D4D4D4"/>
-                </a:solidFill>
-                <a:latin typeface="Arial"/>
-              </a:rPr>
-              <a:t>BELOW (</a:t>
+                  <a:srgbClr val="FFFFFF"/>
+                </a:solidFill>
+                <a:latin typeface="Arial"/>
+              </a:rPr>
+              <a:t>  F-09 fails on 400-page input</a:t>
             </a:r>
           </a:p>
         </p:txBody>
@@ -24297,426 +23567,6 @@
       <p:sp>
         <p:nvSpPr>
           <p:cNvPr id="14" name="TextBox 13"/>
-          <p:cNvSpPr txBox="1"/>
-          <p:nvPr/>
-        </p:nvSpPr>
-        <p:spPr>
-          <a:xfrm>
-            <a:off x="2280543" y="3392421"/>
-            <a:ext cx="1143297" cy="518159"/>
-          </a:xfrm>
-          <a:prstGeom prst="rect">
-            <a:avLst/>
-          </a:prstGeom>
-          <a:noFill/>
-        </p:spPr>
-        <p:txBody>
-          <a:bodyPr wrap="none" lIns="0" rIns="0">
-            <a:noAutofit/>
-          </a:bodyPr>
-          <a:lstStyle/>
-          <a:p>
-            <a:pPr algn="l"/>
-            <a:r>
-              <a:rPr sz="3400" b="0" i="0">
-                <a:solidFill>
-                  <a:srgbClr val="569CD6"/>
-                </a:solidFill>
-                <a:latin typeface="Arial"/>
-              </a:rPr>
-              <a:t>not</a:t>
-            </a:r>
-          </a:p>
-        </p:txBody>
-      </p:sp>
-      <p:sp>
-        <p:nvSpPr>
-          <p:cNvPr id="15" name="TextBox 14"/>
-          <p:cNvSpPr txBox="1"/>
-          <p:nvPr/>
-        </p:nvSpPr>
-        <p:spPr>
-          <a:xfrm>
-            <a:off x="2880804" y="3392421"/>
-            <a:ext cx="6276657" cy="518159"/>
-          </a:xfrm>
-          <a:prstGeom prst="rect">
-            <a:avLst/>
-          </a:prstGeom>
-          <a:noFill/>
-        </p:spPr>
-        <p:txBody>
-          <a:bodyPr wrap="none" lIns="0" rIns="0">
-            <a:noAutofit/>
-          </a:bodyPr>
-          <a:lstStyle/>
-          <a:p>
-            <a:pPr algn="l"/>
-            <a:r>
-              <a:rPr sz="3400" b="0" i="0">
-                <a:solidFill>
-                  <a:srgbClr val="D4D4D4"/>
-                </a:solidFill>
-                <a:latin typeface="Arial"/>
-              </a:rPr>
-              <a:t> today, on purpose):</a:t>
-            </a:r>
-          </a:p>
-        </p:txBody>
-      </p:sp>
-      <p:sp>
-        <p:nvSpPr>
-          <p:cNvPr id="16" name="TextBox 15"/>
-          <p:cNvSpPr txBox="1"/>
-          <p:nvPr/>
-        </p:nvSpPr>
-        <p:spPr>
-          <a:xfrm>
-            <a:off x="457200" y="3910580"/>
-            <a:ext cx="1218862" cy="518159"/>
-          </a:xfrm>
-          <a:prstGeom prst="rect">
-            <a:avLst/>
-          </a:prstGeom>
-          <a:noFill/>
-        </p:spPr>
-        <p:txBody>
-          <a:bodyPr wrap="none" lIns="0" rIns="0">
-            <a:noAutofit/>
-          </a:bodyPr>
-          <a:lstStyle/>
-          <a:p>
-            <a:pPr algn="l"/>
-            <a:r>
-              <a:rPr sz="3400" b="0" i="0">
-                <a:solidFill>
-                  <a:srgbClr val="D4D4D4"/>
-                </a:solidFill>
-                <a:latin typeface="Arial"/>
-              </a:rPr>
-              <a:t>  F-</a:t>
-            </a:r>
-          </a:p>
-        </p:txBody>
-      </p:sp>
-      <p:sp>
-        <p:nvSpPr>
-          <p:cNvPr id="17" name="TextBox 16"/>
-          <p:cNvSpPr txBox="1"/>
-          <p:nvPr/>
-        </p:nvSpPr>
-        <p:spPr>
-          <a:xfrm>
-            <a:off x="1104689" y="3910580"/>
-            <a:ext cx="951348" cy="518159"/>
-          </a:xfrm>
-          <a:prstGeom prst="rect">
-            <a:avLst/>
-          </a:prstGeom>
-          <a:noFill/>
-        </p:spPr>
-        <p:txBody>
-          <a:bodyPr wrap="none" lIns="0" rIns="0">
-            <a:noAutofit/>
-          </a:bodyPr>
-          <a:lstStyle/>
-          <a:p>
-            <a:pPr algn="l"/>
-            <a:r>
-              <a:rPr sz="3400" b="0" i="0">
-                <a:solidFill>
-                  <a:srgbClr val="B5CEA8"/>
-                </a:solidFill>
-                <a:latin typeface="Arial"/>
-              </a:rPr>
-              <a:t>01</a:t>
-            </a:r>
-          </a:p>
-        </p:txBody>
-      </p:sp>
-      <p:sp>
-        <p:nvSpPr>
-          <p:cNvPr id="18" name="TextBox 17"/>
-          <p:cNvSpPr txBox="1"/>
-          <p:nvPr/>
-        </p:nvSpPr>
-        <p:spPr>
-          <a:xfrm>
-            <a:off x="1584982" y="3910580"/>
-            <a:ext cx="2754788" cy="518159"/>
-          </a:xfrm>
-          <a:prstGeom prst="rect">
-            <a:avLst/>
-          </a:prstGeom>
-          <a:noFill/>
-        </p:spPr>
-        <p:txBody>
-          <a:bodyPr wrap="none" lIns="0" rIns="0">
-            <a:noAutofit/>
-          </a:bodyPr>
-          <a:lstStyle/>
-          <a:p>
-            <a:pPr algn="l"/>
-            <a:r>
-              <a:rPr sz="3400" b="0" i="0">
-                <a:solidFill>
-                  <a:srgbClr val="D4D4D4"/>
-                </a:solidFill>
-                <a:latin typeface="Arial"/>
-              </a:rPr>
-              <a:t> slow, F-</a:t>
-            </a:r>
-          </a:p>
-        </p:txBody>
-      </p:sp>
-      <p:sp>
-        <p:nvSpPr>
-          <p:cNvPr id="19" name="TextBox 18"/>
-          <p:cNvSpPr txBox="1"/>
-          <p:nvPr/>
-        </p:nvSpPr>
-        <p:spPr>
-          <a:xfrm>
-            <a:off x="3192425" y="3910580"/>
-            <a:ext cx="951348" cy="518159"/>
-          </a:xfrm>
-          <a:prstGeom prst="rect">
-            <a:avLst/>
-          </a:prstGeom>
-          <a:noFill/>
-        </p:spPr>
-        <p:txBody>
-          <a:bodyPr wrap="none" lIns="0" rIns="0">
-            <a:noAutofit/>
-          </a:bodyPr>
-          <a:lstStyle/>
-          <a:p>
-            <a:pPr algn="l"/>
-            <a:r>
-              <a:rPr sz="3400" b="0" i="0">
-                <a:solidFill>
-                  <a:srgbClr val="B5CEA8"/>
-                </a:solidFill>
-                <a:latin typeface="Arial"/>
-              </a:rPr>
-              <a:t>05</a:t>
-            </a:r>
-          </a:p>
-        </p:txBody>
-      </p:sp>
-      <p:sp>
-        <p:nvSpPr>
-          <p:cNvPr id="20" name="TextBox 19"/>
-          <p:cNvSpPr txBox="1"/>
-          <p:nvPr/>
-        </p:nvSpPr>
-        <p:spPr>
-          <a:xfrm>
-            <a:off x="3672718" y="3910580"/>
-            <a:ext cx="3830240" cy="518159"/>
-          </a:xfrm>
-          <a:prstGeom prst="rect">
-            <a:avLst/>
-          </a:prstGeom>
-          <a:noFill/>
-        </p:spPr>
-        <p:txBody>
-          <a:bodyPr wrap="none" lIns="0" rIns="0">
-            <a:noAutofit/>
-          </a:bodyPr>
-          <a:lstStyle/>
-          <a:p>
-            <a:pPr algn="l"/>
-            <a:r>
-              <a:rPr sz="3400" b="0" i="0">
-                <a:solidFill>
-                  <a:srgbClr val="D4D4D4"/>
-                </a:solidFill>
-                <a:latin typeface="Arial"/>
-              </a:rPr>
-              <a:t> ugly errors,</a:t>
-            </a:r>
-          </a:p>
-        </p:txBody>
-      </p:sp>
-      <p:sp>
-        <p:nvSpPr>
-          <p:cNvPr id="21" name="TextBox 20"/>
-          <p:cNvSpPr txBox="1"/>
-          <p:nvPr/>
-        </p:nvSpPr>
-        <p:spPr>
-          <a:xfrm>
-            <a:off x="457200" y="4428739"/>
-            <a:ext cx="1218862" cy="518159"/>
-          </a:xfrm>
-          <a:prstGeom prst="rect">
-            <a:avLst/>
-          </a:prstGeom>
-          <a:noFill/>
-        </p:spPr>
-        <p:txBody>
-          <a:bodyPr wrap="none" lIns="0" rIns="0">
-            <a:noAutofit/>
-          </a:bodyPr>
-          <a:lstStyle/>
-          <a:p>
-            <a:pPr algn="l"/>
-            <a:r>
-              <a:rPr sz="3400" b="0" i="0">
-                <a:solidFill>
-                  <a:srgbClr val="D4D4D4"/>
-                </a:solidFill>
-                <a:latin typeface="Arial"/>
-              </a:rPr>
-              <a:t>  F-</a:t>
-            </a:r>
-          </a:p>
-        </p:txBody>
-      </p:sp>
-      <p:sp>
-        <p:nvSpPr>
-          <p:cNvPr id="22" name="TextBox 21"/>
-          <p:cNvSpPr txBox="1"/>
-          <p:nvPr/>
-        </p:nvSpPr>
-        <p:spPr>
-          <a:xfrm>
-            <a:off x="1104689" y="4428739"/>
-            <a:ext cx="951348" cy="518159"/>
-          </a:xfrm>
-          <a:prstGeom prst="rect">
-            <a:avLst/>
-          </a:prstGeom>
-          <a:noFill/>
-        </p:spPr>
-        <p:txBody>
-          <a:bodyPr wrap="none" lIns="0" rIns="0">
-            <a:noAutofit/>
-          </a:bodyPr>
-          <a:lstStyle/>
-          <a:p>
-            <a:pPr algn="l"/>
-            <a:r>
-              <a:rPr sz="3400" b="0" i="0">
-                <a:solidFill>
-                  <a:srgbClr val="B5CEA8"/>
-                </a:solidFill>
-                <a:latin typeface="Arial"/>
-              </a:rPr>
-              <a:t>09</a:t>
-            </a:r>
-          </a:p>
-        </p:txBody>
-      </p:sp>
-      <p:sp>
-        <p:nvSpPr>
-          <p:cNvPr id="23" name="TextBox 22"/>
-          <p:cNvSpPr txBox="1"/>
-          <p:nvPr/>
-        </p:nvSpPr>
-        <p:spPr>
-          <a:xfrm>
-            <a:off x="1584982" y="4428739"/>
-            <a:ext cx="2755800" cy="518159"/>
-          </a:xfrm>
-          <a:prstGeom prst="rect">
-            <a:avLst/>
-          </a:prstGeom>
-          <a:noFill/>
-        </p:spPr>
-        <p:txBody>
-          <a:bodyPr wrap="none" lIns="0" rIns="0">
-            <a:noAutofit/>
-          </a:bodyPr>
-          <a:lstStyle/>
-          <a:p>
-            <a:pPr algn="l"/>
-            <a:r>
-              <a:rPr sz="3400" b="0" i="0">
-                <a:solidFill>
-                  <a:srgbClr val="D4D4D4"/>
-                </a:solidFill>
-                <a:latin typeface="Arial"/>
-              </a:rPr>
-              <a:t> fails on </a:t>
-            </a:r>
-          </a:p>
-        </p:txBody>
-      </p:sp>
-      <p:sp>
-        <p:nvSpPr>
-          <p:cNvPr id="24" name="TextBox 23"/>
-          <p:cNvSpPr txBox="1"/>
-          <p:nvPr/>
-        </p:nvSpPr>
-        <p:spPr>
-          <a:xfrm>
-            <a:off x="3193058" y="4428739"/>
-            <a:ext cx="1335584" cy="518159"/>
-          </a:xfrm>
-          <a:prstGeom prst="rect">
-            <a:avLst/>
-          </a:prstGeom>
-          <a:noFill/>
-        </p:spPr>
-        <p:txBody>
-          <a:bodyPr wrap="none" lIns="0" rIns="0">
-            <a:noAutofit/>
-          </a:bodyPr>
-          <a:lstStyle/>
-          <a:p>
-            <a:pPr algn="l"/>
-            <a:r>
-              <a:rPr sz="3400" b="0" i="0">
-                <a:solidFill>
-                  <a:srgbClr val="B5CEA8"/>
-                </a:solidFill>
-                <a:latin typeface="Arial"/>
-              </a:rPr>
-              <a:t>400</a:t>
-            </a:r>
-          </a:p>
-        </p:txBody>
-      </p:sp>
-      <p:sp>
-        <p:nvSpPr>
-          <p:cNvPr id="25" name="TextBox 24"/>
-          <p:cNvSpPr txBox="1"/>
-          <p:nvPr/>
-        </p:nvSpPr>
-        <p:spPr>
-          <a:xfrm>
-            <a:off x="3913498" y="4428739"/>
-            <a:ext cx="3639979" cy="518159"/>
-          </a:xfrm>
-          <a:prstGeom prst="rect">
-            <a:avLst/>
-          </a:prstGeom>
-          <a:noFill/>
-        </p:spPr>
-        <p:txBody>
-          <a:bodyPr wrap="none" lIns="0" rIns="0">
-            <a:noAutofit/>
-          </a:bodyPr>
-          <a:lstStyle/>
-          <a:p>
-            <a:pPr algn="l"/>
-            <a:r>
-              <a:rPr sz="3400" b="0" i="0">
-                <a:solidFill>
-                  <a:srgbClr val="D4D4D4"/>
-                </a:solidFill>
-                <a:latin typeface="Arial"/>
-              </a:rPr>
-              <a:t>-page input</a:t>
-            </a:r>
-          </a:p>
-        </p:txBody>
-      </p:sp>
-      <p:sp>
-        <p:nvSpPr>
-          <p:cNvPr id="26" name="TextBox 25"/>
           <p:cNvSpPr/>
           <p:nvPr>
             <p:ph type="sldNum" idx="12"/>
@@ -24742,7 +23592,7 @@
             <a:fld id="{4B0E1F8A-6C1D-4E2A-9F3B-7A5C8D2E1F60}" type="slidenum">
               <a:rPr sz="1600" b="0" i="0">
                 <a:solidFill>
-                  <a:srgbClr val="5B6B82"/>
+                  <a:srgbClr val="0A2240"/>
                 </a:solidFill>
                 <a:latin typeface="Arial"/>
               </a:rPr>
@@ -24919,7 +23769,7 @@
             <a:fld id="{4B0E1F8A-6C1D-4E2A-9F3B-7A5C8D2E1F60}" type="slidenum">
               <a:rPr sz="1600" b="0" i="0">
                 <a:solidFill>
-                  <a:srgbClr val="5B6B82"/>
+                  <a:srgbClr val="0A2240"/>
                 </a:solidFill>
                 <a:latin typeface="Arial"/>
               </a:rPr>
@@ -25096,7 +23946,7 @@
             <a:fld id="{4B0E1F8A-6C1D-4E2A-9F3B-7A5C8D2E1F60}" type="slidenum">
               <a:rPr sz="1600" b="0" i="0">
                 <a:solidFill>
-                  <a:srgbClr val="5B6B82"/>
+                  <a:srgbClr val="0A2240"/>
                 </a:solidFill>
                 <a:latin typeface="Arial"/>
               </a:rPr>
@@ -25192,7 +24042,7 @@
             <a:r>
               <a:rPr sz="4200" b="1" i="0">
                 <a:solidFill>
-                  <a:srgbClr val="123A6B"/>
+                  <a:srgbClr val="0072CE"/>
                 </a:solidFill>
                 <a:latin typeface="Arial"/>
               </a:rPr>
@@ -25227,7 +24077,7 @@
             <a:r>
               <a:rPr sz="4200" b="1" i="0">
                 <a:solidFill>
-                  <a:srgbClr val="123A6B"/>
+                  <a:srgbClr val="0072CE"/>
                 </a:solidFill>
                 <a:latin typeface="Arial"/>
               </a:rPr>
@@ -25297,7 +24147,7 @@
             <a:r>
               <a:rPr sz="4200" b="1" i="0">
                 <a:solidFill>
-                  <a:srgbClr val="123A6B"/>
+                  <a:srgbClr val="0072CE"/>
                 </a:solidFill>
                 <a:latin typeface="Arial"/>
               </a:rPr>
@@ -25332,7 +24182,7 @@
             <a:r>
               <a:rPr sz="4200" b="1" i="0">
                 <a:solidFill>
-                  <a:srgbClr val="123A6B"/>
+                  <a:srgbClr val="0072CE"/>
                 </a:solidFill>
                 <a:latin typeface="Arial"/>
               </a:rPr>
@@ -25402,7 +24252,7 @@
             <a:r>
               <a:rPr sz="4200" b="1" i="0">
                 <a:solidFill>
-                  <a:srgbClr val="123A6B"/>
+                  <a:srgbClr val="0072CE"/>
                 </a:solidFill>
                 <a:latin typeface="Arial"/>
               </a:rPr>
@@ -25437,7 +24287,7 @@
             <a:r>
               <a:rPr sz="4200" b="1" i="0">
                 <a:solidFill>
-                  <a:srgbClr val="123A6B"/>
+                  <a:srgbClr val="0072CE"/>
                 </a:solidFill>
                 <a:latin typeface="Arial"/>
               </a:rPr>
@@ -25509,7 +24359,7 @@
             <a:fld id="{4B0E1F8A-6C1D-4E2A-9F3B-7A5C8D2E1F60}" type="slidenum">
               <a:rPr sz="1600" b="0" i="0">
                 <a:solidFill>
-                  <a:srgbClr val="5B6B82"/>
+                  <a:srgbClr val="0A2240"/>
                 </a:solidFill>
                 <a:latin typeface="Arial"/>
               </a:rPr>
@@ -25747,7 +24597,7 @@
             <a:fld id="{4B0E1F8A-6C1D-4E2A-9F3B-7A5C8D2E1F60}" type="slidenum">
               <a:rPr sz="1600" b="0" i="0">
                 <a:solidFill>
-                  <a:srgbClr val="5B6B82"/>
+                  <a:srgbClr val="0A2240"/>
                 </a:solidFill>
                 <a:latin typeface="Arial"/>
               </a:rPr>
@@ -25797,7 +24647,7 @@
             <a:avLst/>
           </a:prstGeom>
           <a:solidFill>
-            <a:srgbClr val="FF5F56"/>
+            <a:srgbClr val="FFFFFF"/>
           </a:solidFill>
           <a:ln>
             <a:noFill/>
@@ -25841,7 +24691,7 @@
             <a:avLst/>
           </a:prstGeom>
           <a:solidFill>
-            <a:srgbClr val="FFBD2E"/>
+            <a:srgbClr val="FFFFFF"/>
           </a:solidFill>
           <a:ln>
             <a:noFill/>
@@ -25885,7 +24735,7 @@
             <a:avLst/>
           </a:prstGeom>
           <a:solidFill>
-            <a:srgbClr val="27C93F"/>
+            <a:srgbClr val="FFFFFF"/>
           </a:solidFill>
           <a:ln>
             <a:noFill/>
@@ -25940,7 +24790,7 @@
             <a:r>
               <a:rPr sz="4200" b="0" i="0">
                 <a:solidFill>
-                  <a:srgbClr val="D4D4D4"/>
+                  <a:srgbClr val="FFFFFF"/>
                 </a:solidFill>
                 <a:latin typeface="Arial"/>
               </a:rPr>
@@ -25975,7 +24825,7 @@
             <a:r>
               <a:rPr sz="3400" b="0" i="0">
                 <a:solidFill>
-                  <a:srgbClr val="4EC9B0"/>
+                  <a:srgbClr val="569CD6"/>
                 </a:solidFill>
                 <a:latin typeface="Arial"/>
               </a:rPr>
@@ -26010,7 +24860,7 @@
             <a:r>
               <a:rPr sz="3400" b="0" i="0">
                 <a:solidFill>
-                  <a:srgbClr val="D4D4D4"/>
+                  <a:srgbClr val="FFFFFF"/>
                 </a:solidFill>
                 <a:latin typeface="Arial"/>
               </a:rPr>
@@ -26028,7 +24878,7 @@
         <p:spPr>
           <a:xfrm>
             <a:off x="457200" y="2356103"/>
-            <a:ext cx="6633904" cy="518159"/>
+            <a:ext cx="8554739" cy="518159"/>
           </a:xfrm>
           <a:prstGeom prst="rect">
             <a:avLst/>
@@ -26045,11 +24895,11 @@
             <a:r>
               <a:rPr sz="3400" b="0" i="0">
                 <a:solidFill>
-                  <a:srgbClr val="D4D4D4"/>
-                </a:solidFill>
-                <a:latin typeface="Arial"/>
-              </a:rPr>
-              <a:t>Refused: this covers </a:t>
+                  <a:srgbClr val="FFFFFF"/>
+                </a:solidFill>
+                <a:latin typeface="Arial"/>
+              </a:rPr>
+              <a:t>Refused: this covers 2019, </a:t>
             </a:r>
           </a:p>
         </p:txBody>
@@ -26062,8 +24912,8 @@
         </p:nvSpPr>
         <p:spPr>
           <a:xfrm>
-            <a:off x="4489090" y="2356103"/>
-            <a:ext cx="1719817" cy="518159"/>
+            <a:off x="5689612" y="2356103"/>
+            <a:ext cx="1143297" cy="518159"/>
           </a:xfrm>
           <a:prstGeom prst="rect">
             <a:avLst/>
@@ -26080,11 +24930,11 @@
             <a:r>
               <a:rPr sz="3400" b="0" i="0">
                 <a:solidFill>
-                  <a:srgbClr val="B5CEA8"/>
-                </a:solidFill>
-                <a:latin typeface="Arial"/>
-              </a:rPr>
-              <a:t>2019</a:t>
+                  <a:srgbClr val="569CD6"/>
+                </a:solidFill>
+                <a:latin typeface="Arial"/>
+              </a:rPr>
+              <a:t>not</a:t>
             </a:r>
           </a:p>
         </p:txBody>
@@ -26097,8 +24947,8 @@
         </p:nvSpPr>
         <p:spPr>
           <a:xfrm>
-            <a:off x="5449677" y="2356103"/>
-            <a:ext cx="566777" cy="518159"/>
+            <a:off x="6289873" y="2356103"/>
+            <a:ext cx="2103715" cy="518159"/>
           </a:xfrm>
           <a:prstGeom prst="rect">
             <a:avLst/>
@@ -26115,11 +24965,11 @@
             <a:r>
               <a:rPr sz="3400" b="0" i="0">
                 <a:solidFill>
-                  <a:srgbClr val="D4D4D4"/>
-                </a:solidFill>
-                <a:latin typeface="Arial"/>
-              </a:rPr>
-              <a:t>, </a:t>
+                  <a:srgbClr val="FFFFFF"/>
+                </a:solidFill>
+                <a:latin typeface="Arial"/>
+              </a:rPr>
+              <a:t> 2024.</a:t>
             </a:r>
           </a:p>
         </p:txBody>
@@ -26132,8 +24982,8 @@
         </p:nvSpPr>
         <p:spPr>
           <a:xfrm>
-            <a:off x="5689612" y="2356103"/>
-            <a:ext cx="1143297" cy="518159"/>
+            <a:off x="457200" y="3392421"/>
+            <a:ext cx="11734800" cy="518159"/>
           </a:xfrm>
           <a:prstGeom prst="rect">
             <a:avLst/>
@@ -26150,11 +25000,11 @@
             <a:r>
               <a:rPr sz="3400" b="0" i="0">
                 <a:solidFill>
-                  <a:srgbClr val="569CD6"/>
-                </a:solidFill>
-                <a:latin typeface="Arial"/>
-              </a:rPr>
-              <a:t>not</a:t>
+                  <a:srgbClr val="FFFFFF"/>
+                </a:solidFill>
+                <a:latin typeface="Arial"/>
+              </a:rPr>
+              <a:t># F-03 was: a confident 2024 summary.</a:t>
             </a:r>
           </a:p>
         </p:txBody>
@@ -26167,146 +25017,6 @@
         </p:nvSpPr>
         <p:spPr>
           <a:xfrm>
-            <a:off x="6289873" y="2356103"/>
-            <a:ext cx="302848" cy="518159"/>
-          </a:xfrm>
-          <a:prstGeom prst="rect">
-            <a:avLst/>
-          </a:prstGeom>
-          <a:noFill/>
-        </p:spPr>
-        <p:txBody>
-          <a:bodyPr wrap="none" lIns="0" rIns="0">
-            <a:noAutofit/>
-          </a:bodyPr>
-          <a:lstStyle/>
-          <a:p>
-            <a:pPr algn="l"/>
-            <a:r>
-              <a:rPr sz="3400" b="0" i="0">
-                <a:solidFill>
-                  <a:srgbClr val="D4D4D4"/>
-                </a:solidFill>
-                <a:latin typeface="Arial"/>
-              </a:rPr>
-              <a:t> </a:t>
-            </a:r>
-          </a:p>
-        </p:txBody>
-      </p:sp>
-      <p:sp>
-        <p:nvSpPr>
-          <p:cNvPr id="13" name="TextBox 12"/>
-          <p:cNvSpPr txBox="1"/>
-          <p:nvPr/>
-        </p:nvSpPr>
-        <p:spPr>
-          <a:xfrm>
-            <a:off x="6409841" y="2356103"/>
-            <a:ext cx="1719817" cy="518159"/>
-          </a:xfrm>
-          <a:prstGeom prst="rect">
-            <a:avLst/>
-          </a:prstGeom>
-          <a:noFill/>
-        </p:spPr>
-        <p:txBody>
-          <a:bodyPr wrap="none" lIns="0" rIns="0">
-            <a:noAutofit/>
-          </a:bodyPr>
-          <a:lstStyle/>
-          <a:p>
-            <a:pPr algn="l"/>
-            <a:r>
-              <a:rPr sz="3400" b="0" i="0">
-                <a:solidFill>
-                  <a:srgbClr val="B5CEA8"/>
-                </a:solidFill>
-                <a:latin typeface="Arial"/>
-              </a:rPr>
-              <a:t>2024</a:t>
-            </a:r>
-          </a:p>
-        </p:txBody>
-      </p:sp>
-      <p:sp>
-        <p:nvSpPr>
-          <p:cNvPr id="14" name="TextBox 13"/>
-          <p:cNvSpPr txBox="1"/>
-          <p:nvPr/>
-        </p:nvSpPr>
-        <p:spPr>
-          <a:xfrm>
-            <a:off x="7370428" y="2356103"/>
-            <a:ext cx="374828" cy="518159"/>
-          </a:xfrm>
-          <a:prstGeom prst="rect">
-            <a:avLst/>
-          </a:prstGeom>
-          <a:noFill/>
-        </p:spPr>
-        <p:txBody>
-          <a:bodyPr wrap="none" lIns="0" rIns="0">
-            <a:noAutofit/>
-          </a:bodyPr>
-          <a:lstStyle/>
-          <a:p>
-            <a:pPr algn="l"/>
-            <a:r>
-              <a:rPr sz="3400" b="0" i="0">
-                <a:solidFill>
-                  <a:srgbClr val="D4D4D4"/>
-                </a:solidFill>
-                <a:latin typeface="Arial"/>
-              </a:rPr>
-              <a:t>.</a:t>
-            </a:r>
-          </a:p>
-        </p:txBody>
-      </p:sp>
-      <p:sp>
-        <p:nvSpPr>
-          <p:cNvPr id="15" name="TextBox 14"/>
-          <p:cNvSpPr txBox="1"/>
-          <p:nvPr/>
-        </p:nvSpPr>
-        <p:spPr>
-          <a:xfrm>
-            <a:off x="457200" y="3392421"/>
-            <a:ext cx="11734800" cy="518159"/>
-          </a:xfrm>
-          <a:prstGeom prst="rect">
-            <a:avLst/>
-          </a:prstGeom>
-          <a:noFill/>
-        </p:spPr>
-        <p:txBody>
-          <a:bodyPr wrap="none" lIns="0" rIns="0">
-            <a:noAutofit/>
-          </a:bodyPr>
-          <a:lstStyle/>
-          <a:p>
-            <a:pPr algn="l"/>
-            <a:r>
-              <a:rPr sz="3400" b="0" i="0">
-                <a:solidFill>
-                  <a:srgbClr val="6A9955"/>
-                </a:solidFill>
-                <a:latin typeface="Arial"/>
-              </a:rPr>
-              <a:t># F-03 was: a confident 2024 summary.</a:t>
-            </a:r>
-          </a:p>
-        </p:txBody>
-      </p:sp>
-      <p:sp>
-        <p:nvSpPr>
-          <p:cNvPr id="16" name="TextBox 15"/>
-          <p:cNvSpPr txBox="1"/>
-          <p:nvPr/>
-        </p:nvSpPr>
-        <p:spPr>
-          <a:xfrm>
             <a:off x="457200" y="3910580"/>
             <a:ext cx="11318259" cy="518159"/>
           </a:xfrm>
@@ -26325,7 +25035,7 @@
             <a:r>
               <a:rPr sz="3400" b="0" i="0">
                 <a:solidFill>
-                  <a:srgbClr val="6A9955"/>
+                  <a:srgbClr val="FFFFFF"/>
                 </a:solidFill>
                 <a:latin typeface="Arial"/>
               </a:rPr>
@@ -26336,7 +25046,7 @@
       </p:sp>
       <p:sp>
         <p:nvSpPr>
-          <p:cNvPr id="17" name="TextBox 16"/>
+          <p:cNvPr id="13" name="TextBox 12"/>
           <p:cNvSpPr/>
           <p:nvPr>
             <p:ph type="sldNum" idx="12"/>
@@ -26362,7 +25072,7 @@
             <a:fld id="{4B0E1F8A-6C1D-4E2A-9F3B-7A5C8D2E1F60}" type="slidenum">
               <a:rPr sz="1600" b="0" i="0">
                 <a:solidFill>
-                  <a:srgbClr val="5B6B82"/>
+                  <a:srgbClr val="0A2240"/>
                 </a:solidFill>
                 <a:latin typeface="Arial"/>
               </a:rPr>
@@ -26598,7 +25308,7 @@
             <a:r>
               <a:rPr sz="4200" b="1" i="0">
                 <a:solidFill>
-                  <a:srgbClr val="5B6B82"/>
+                  <a:srgbClr val="0A2240"/>
                 </a:solidFill>
                 <a:latin typeface="Arial"/>
               </a:rPr>
@@ -26635,7 +25345,7 @@
             <a:fld id="{4B0E1F8A-6C1D-4E2A-9F3B-7A5C8D2E1F60}" type="slidenum">
               <a:rPr sz="1600" b="0" i="0">
                 <a:solidFill>
-                  <a:srgbClr val="5B6B82"/>
+                  <a:srgbClr val="0A2240"/>
                 </a:solidFill>
                 <a:latin typeface="Arial"/>
               </a:rPr>
@@ -26873,7 +25583,7 @@
             <a:fld id="{4B0E1F8A-6C1D-4E2A-9F3B-7A5C8D2E1F60}" type="slidenum">
               <a:rPr sz="1600" b="0" i="0">
                 <a:solidFill>
-                  <a:srgbClr val="5B6B82"/>
+                  <a:srgbClr val="0A2240"/>
                 </a:solidFill>
                 <a:latin typeface="Arial"/>
               </a:rPr>
@@ -27295,7 +26005,7 @@
             <a:fld id="{4B0E1F8A-6C1D-4E2A-9F3B-7A5C8D2E1F60}" type="slidenum">
               <a:rPr sz="1600" b="0" i="0">
                 <a:solidFill>
-                  <a:srgbClr val="5B6B82"/>
+                  <a:srgbClr val="0A2240"/>
                 </a:solidFill>
                 <a:latin typeface="Arial"/>
               </a:rPr>
@@ -27391,7 +26101,7 @@
             <a:r>
               <a:rPr sz="4200" b="1" i="0">
                 <a:solidFill>
-                  <a:srgbClr val="123A6B"/>
+                  <a:srgbClr val="0072CE"/>
                 </a:solidFill>
                 <a:latin typeface="Arial"/>
               </a:rPr>
@@ -27426,7 +26136,7 @@
             <a:r>
               <a:rPr sz="4200" b="1" i="0">
                 <a:solidFill>
-                  <a:srgbClr val="123A6B"/>
+                  <a:srgbClr val="0072CE"/>
                 </a:solidFill>
                 <a:latin typeface="Arial"/>
               </a:rPr>
@@ -27496,7 +26206,7 @@
             <a:r>
               <a:rPr sz="4200" b="1" i="0">
                 <a:solidFill>
-                  <a:srgbClr val="123A6B"/>
+                  <a:srgbClr val="0072CE"/>
                 </a:solidFill>
                 <a:latin typeface="Arial"/>
               </a:rPr>
@@ -27531,7 +26241,7 @@
             <a:r>
               <a:rPr sz="4200" b="1" i="0">
                 <a:solidFill>
-                  <a:srgbClr val="123A6B"/>
+                  <a:srgbClr val="0072CE"/>
                 </a:solidFill>
                 <a:latin typeface="Arial"/>
               </a:rPr>
@@ -27601,7 +26311,7 @@
             <a:r>
               <a:rPr sz="4200" b="1" i="0">
                 <a:solidFill>
-                  <a:srgbClr val="123A6B"/>
+                  <a:srgbClr val="0072CE"/>
                 </a:solidFill>
                 <a:latin typeface="Arial"/>
               </a:rPr>
@@ -27636,7 +26346,7 @@
             <a:r>
               <a:rPr sz="4200" b="1" i="0">
                 <a:solidFill>
-                  <a:srgbClr val="123A6B"/>
+                  <a:srgbClr val="0072CE"/>
                 </a:solidFill>
                 <a:latin typeface="Arial"/>
               </a:rPr>
@@ -27708,7 +26418,7 @@
             <a:fld id="{4B0E1F8A-6C1D-4E2A-9F3B-7A5C8D2E1F60}" type="slidenum">
               <a:rPr sz="1600" b="0" i="0">
                 <a:solidFill>
-                  <a:srgbClr val="5B6B82"/>
+                  <a:srgbClr val="0A2240"/>
                 </a:solidFill>
                 <a:latin typeface="Arial"/>
               </a:rPr>
@@ -27758,7 +26468,7 @@
             <a:avLst/>
           </a:prstGeom>
           <a:solidFill>
-            <a:srgbClr val="FF5F56"/>
+            <a:srgbClr val="FFFFFF"/>
           </a:solidFill>
           <a:ln>
             <a:noFill/>
@@ -27802,7 +26512,7 @@
             <a:avLst/>
           </a:prstGeom>
           <a:solidFill>
-            <a:srgbClr val="FFBD2E"/>
+            <a:srgbClr val="FFFFFF"/>
           </a:solidFill>
           <a:ln>
             <a:noFill/>
@@ -27846,7 +26556,7 @@
             <a:avLst/>
           </a:prstGeom>
           <a:solidFill>
-            <a:srgbClr val="27C93F"/>
+            <a:srgbClr val="FFFFFF"/>
           </a:solidFill>
           <a:ln>
             <a:noFill/>
@@ -27901,7 +26611,7 @@
             <a:r>
               <a:rPr sz="4200" b="0" i="0">
                 <a:solidFill>
-                  <a:srgbClr val="D4D4D4"/>
+                  <a:srgbClr val="FFFFFF"/>
                 </a:solidFill>
                 <a:latin typeface="Arial"/>
               </a:rPr>
@@ -27936,7 +26646,7 @@
             <a:r>
               <a:rPr sz="3400" b="0" i="0">
                 <a:solidFill>
-                  <a:srgbClr val="4EC9B0"/>
+                  <a:srgbClr val="569CD6"/>
                 </a:solidFill>
                 <a:latin typeface="Arial"/>
               </a:rPr>
@@ -27971,7 +26681,7 @@
             <a:r>
               <a:rPr sz="3400" b="0" i="0">
                 <a:solidFill>
-                  <a:srgbClr val="D4D4D4"/>
+                  <a:srgbClr val="FFFFFF"/>
                 </a:solidFill>
                 <a:latin typeface="Arial"/>
               </a:rPr>
@@ -28006,7 +26716,7 @@
             <a:r>
               <a:rPr sz="3400" b="0" i="0">
                 <a:solidFill>
-                  <a:srgbClr val="4EC9B0"/>
+                  <a:srgbClr val="569CD6"/>
                 </a:solidFill>
                 <a:latin typeface="Arial"/>
               </a:rPr>
@@ -28041,7 +26751,7 @@
             <a:r>
               <a:rPr sz="3400" b="0" i="0">
                 <a:solidFill>
-                  <a:srgbClr val="D4D4D4"/>
+                  <a:srgbClr val="FFFFFF"/>
                 </a:solidFill>
                 <a:latin typeface="Arial"/>
               </a:rPr>
@@ -28076,7 +26786,7 @@
             <a:r>
               <a:rPr sz="3400" b="0" i="0">
                 <a:solidFill>
-                  <a:srgbClr val="4EC9B0"/>
+                  <a:srgbClr val="569CD6"/>
                 </a:solidFill>
                 <a:latin typeface="Arial"/>
               </a:rPr>
@@ -28111,7 +26821,7 @@
             <a:r>
               <a:rPr sz="3400" b="0" i="0">
                 <a:solidFill>
-                  <a:srgbClr val="D4D4D4"/>
+                  <a:srgbClr val="FFFFFF"/>
                 </a:solidFill>
                 <a:latin typeface="Arial"/>
               </a:rPr>
@@ -28146,7 +26856,7 @@
             <a:r>
               <a:rPr sz="3400" b="0" i="0">
                 <a:solidFill>
-                  <a:srgbClr val="6A9955"/>
+                  <a:srgbClr val="FFFFFF"/>
                 </a:solidFill>
                 <a:latin typeface="Arial"/>
               </a:rPr>
@@ -28183,7 +26893,7 @@
             <a:fld id="{4B0E1F8A-6C1D-4E2A-9F3B-7A5C8D2E1F60}" type="slidenum">
               <a:rPr sz="1600" b="0" i="0">
                 <a:solidFill>
-                  <a:srgbClr val="5B6B82"/>
+                  <a:srgbClr val="0A2240"/>
                 </a:solidFill>
                 <a:latin typeface="Arial"/>
               </a:rPr>
@@ -28279,7 +26989,7 @@
             <a:r>
               <a:rPr sz="3400" b="1" i="0">
                 <a:solidFill>
-                  <a:srgbClr val="123A6B"/>
+                  <a:srgbClr val="0072CE"/>
                 </a:solidFill>
                 <a:latin typeface="Arial"/>
               </a:rPr>
@@ -28314,7 +27024,7 @@
             <a:r>
               <a:rPr sz="3400" b="1" i="0">
                 <a:solidFill>
-                  <a:srgbClr val="123A6B"/>
+                  <a:srgbClr val="0072CE"/>
                 </a:solidFill>
                 <a:latin typeface="Arial"/>
               </a:rPr>
@@ -28675,7 +27385,7 @@
             <a:fld id="{4B0E1F8A-6C1D-4E2A-9F3B-7A5C8D2E1F60}" type="slidenum">
               <a:rPr sz="1600" b="0" i="0">
                 <a:solidFill>
-                  <a:srgbClr val="5B6B82"/>
+                  <a:srgbClr val="0A2240"/>
                 </a:solidFill>
                 <a:latin typeface="Arial"/>
               </a:rPr>
@@ -28913,7 +27623,7 @@
             <a:fld id="{4B0E1F8A-6C1D-4E2A-9F3B-7A5C8D2E1F60}" type="slidenum">
               <a:rPr sz="1600" b="0" i="0">
                 <a:solidFill>
-                  <a:srgbClr val="5B6B82"/>
+                  <a:srgbClr val="0A2240"/>
                 </a:solidFill>
                 <a:latin typeface="Arial"/>
               </a:rPr>
@@ -29053,7 +27763,7 @@
             <a:r>
               <a:rPr sz="3400" b="0" i="0">
                 <a:solidFill>
-                  <a:srgbClr val="5B6B82"/>
+                  <a:srgbClr val="0A2240"/>
                 </a:solidFill>
                 <a:latin typeface="Arial"/>
               </a:rPr>
@@ -29090,7 +27800,7 @@
             <a:fld id="{4B0E1F8A-6C1D-4E2A-9F3B-7A5C8D2E1F60}" type="slidenum">
               <a:rPr sz="1600" b="0" i="0">
                 <a:solidFill>
-                  <a:srgbClr val="5B6B82"/>
+                  <a:srgbClr val="0A2240"/>
                 </a:solidFill>
                 <a:latin typeface="Arial"/>
               </a:rPr>
@@ -29267,7 +27977,7 @@
             <a:fld id="{4B0E1F8A-6C1D-4E2A-9F3B-7A5C8D2E1F60}" type="slidenum">
               <a:rPr sz="1600" b="0" i="0">
                 <a:solidFill>
-                  <a:srgbClr val="5B6B82"/>
+                  <a:srgbClr val="0A2240"/>
                 </a:solidFill>
                 <a:latin typeface="Arial"/>
               </a:rPr>
@@ -29409,7 +28119,7 @@
             <a:fld id="{4B0E1F8A-6C1D-4E2A-9F3B-7A5C8D2E1F60}" type="slidenum">
               <a:rPr sz="1600" b="0" i="0">
                 <a:solidFill>
-                  <a:srgbClr val="5B6B82"/>
+                  <a:srgbClr val="0A2240"/>
                 </a:solidFill>
                 <a:latin typeface="Arial"/>
               </a:rPr>
@@ -29586,7 +28296,7 @@
             <a:fld id="{4B0E1F8A-6C1D-4E2A-9F3B-7A5C8D2E1F60}" type="slidenum">
               <a:rPr sz="1600" b="0" i="0">
                 <a:solidFill>
-                  <a:srgbClr val="5B6B82"/>
+                  <a:srgbClr val="0A2240"/>
                 </a:solidFill>
                 <a:latin typeface="Arial"/>
               </a:rPr>
@@ -29824,7 +28534,7 @@
             <a:fld id="{4B0E1F8A-6C1D-4E2A-9F3B-7A5C8D2E1F60}" type="slidenum">
               <a:rPr sz="1600" b="0" i="0">
                 <a:solidFill>
-                  <a:srgbClr val="5B6B82"/>
+                  <a:srgbClr val="0A2240"/>
                 </a:solidFill>
                 <a:latin typeface="Arial"/>
               </a:rPr>
@@ -29920,7 +28630,7 @@
             <a:r>
               <a:rPr sz="4200" b="1" i="0">
                 <a:solidFill>
-                  <a:srgbClr val="123A6B"/>
+                  <a:srgbClr val="0072CE"/>
                 </a:solidFill>
                 <a:latin typeface="Arial"/>
               </a:rPr>
@@ -29955,7 +28665,7 @@
             <a:r>
               <a:rPr sz="4200" b="1" i="0">
                 <a:solidFill>
-                  <a:srgbClr val="123A6B"/>
+                  <a:srgbClr val="0072CE"/>
                 </a:solidFill>
                 <a:latin typeface="Arial"/>
               </a:rPr>
@@ -30025,7 +28735,7 @@
             <a:r>
               <a:rPr sz="4200" b="1" i="0">
                 <a:solidFill>
-                  <a:srgbClr val="123A6B"/>
+                  <a:srgbClr val="0072CE"/>
                 </a:solidFill>
                 <a:latin typeface="Arial"/>
               </a:rPr>
@@ -30060,7 +28770,7 @@
             <a:r>
               <a:rPr sz="4200" b="1" i="0">
                 <a:solidFill>
-                  <a:srgbClr val="123A6B"/>
+                  <a:srgbClr val="0072CE"/>
                 </a:solidFill>
                 <a:latin typeface="Arial"/>
               </a:rPr>
@@ -30130,7 +28840,7 @@
             <a:r>
               <a:rPr sz="4200" b="1" i="0">
                 <a:solidFill>
-                  <a:srgbClr val="123A6B"/>
+                  <a:srgbClr val="0072CE"/>
                 </a:solidFill>
                 <a:latin typeface="Arial"/>
               </a:rPr>
@@ -30165,7 +28875,7 @@
             <a:r>
               <a:rPr sz="4200" b="1" i="0">
                 <a:solidFill>
-                  <a:srgbClr val="123A6B"/>
+                  <a:srgbClr val="0072CE"/>
                 </a:solidFill>
                 <a:latin typeface="Arial"/>
               </a:rPr>
@@ -30237,7 +28947,7 @@
             <a:fld id="{4B0E1F8A-6C1D-4E2A-9F3B-7A5C8D2E1F60}" type="slidenum">
               <a:rPr sz="1600" b="0" i="0">
                 <a:solidFill>
-                  <a:srgbClr val="5B6B82"/>
+                  <a:srgbClr val="0A2240"/>
                 </a:solidFill>
                 <a:latin typeface="Arial"/>
               </a:rPr>
@@ -30379,7 +29089,7 @@
             <a:fld id="{4B0E1F8A-6C1D-4E2A-9F3B-7A5C8D2E1F60}" type="slidenum">
               <a:rPr sz="1600" b="0" i="0">
                 <a:solidFill>
-                  <a:srgbClr val="5B6B82"/>
+                  <a:srgbClr val="0A2240"/>
                 </a:solidFill>
                 <a:latin typeface="Arial"/>
               </a:rPr>
@@ -30429,7 +29139,7 @@
             <a:avLst/>
           </a:prstGeom>
           <a:solidFill>
-            <a:srgbClr val="FF5F56"/>
+            <a:srgbClr val="FFFFFF"/>
           </a:solidFill>
           <a:ln>
             <a:noFill/>
@@ -30473,7 +29183,7 @@
             <a:avLst/>
           </a:prstGeom>
           <a:solidFill>
-            <a:srgbClr val="FFBD2E"/>
+            <a:srgbClr val="FFFFFF"/>
           </a:solidFill>
           <a:ln>
             <a:noFill/>
@@ -30517,7 +29227,7 @@
             <a:avLst/>
           </a:prstGeom>
           <a:solidFill>
-            <a:srgbClr val="27C93F"/>
+            <a:srgbClr val="FFFFFF"/>
           </a:solidFill>
           <a:ln>
             <a:noFill/>
@@ -30572,7 +29282,7 @@
             <a:r>
               <a:rPr sz="4200" b="0" i="0">
                 <a:solidFill>
-                  <a:srgbClr val="D4D4D4"/>
+                  <a:srgbClr val="FFFFFF"/>
                 </a:solidFill>
                 <a:latin typeface="Arial"/>
               </a:rPr>
@@ -30590,7 +29300,7 @@
         <p:spPr>
           <a:xfrm>
             <a:off x="457200" y="1837944"/>
-            <a:ext cx="5596910" cy="518159"/>
+            <a:ext cx="6173092" cy="518159"/>
           </a:xfrm>
           <a:prstGeom prst="rect">
             <a:avLst/>
@@ -30607,11 +29317,11 @@
             <a:r>
               <a:rPr sz="3400" b="0" i="0">
                 <a:solidFill>
-                  <a:srgbClr val="D4D4D4"/>
-                </a:solidFill>
-                <a:latin typeface="Arial"/>
-              </a:rPr>
-              <a:t>Every morning at </a:t>
+                  <a:srgbClr val="FFFFFF"/>
+                </a:solidFill>
+                <a:latin typeface="Arial"/>
+              </a:rPr>
+              <a:t>Every morning at 8:</a:t>
             </a:r>
           </a:p>
         </p:txBody>
@@ -30624,8 +29334,8 @@
         </p:nvSpPr>
         <p:spPr>
           <a:xfrm>
-            <a:off x="3840969" y="1837944"/>
-            <a:ext cx="567115" cy="518159"/>
+            <a:off x="457200" y="2356103"/>
+            <a:ext cx="7633454" cy="518159"/>
           </a:xfrm>
           <a:prstGeom prst="rect">
             <a:avLst/>
@@ -30642,11 +29352,11 @@
             <a:r>
               <a:rPr sz="3400" b="0" i="0">
                 <a:solidFill>
-                  <a:srgbClr val="B5CEA8"/>
-                </a:solidFill>
-                <a:latin typeface="Arial"/>
-              </a:rPr>
-              <a:t>8</a:t>
+                  <a:srgbClr val="FFFFFF"/>
+                </a:solidFill>
+                <a:latin typeface="Arial"/>
+              </a:rPr>
+              <a:t>Open &lt;our public URL&gt;.</a:t>
             </a:r>
           </a:p>
         </p:txBody>
@@ -30659,8 +29369,8 @@
         </p:nvSpPr>
         <p:spPr>
           <a:xfrm>
-            <a:off x="4081115" y="1837944"/>
-            <a:ext cx="374828" cy="518159"/>
+            <a:off x="457200" y="2874262"/>
+            <a:ext cx="11318596" cy="518159"/>
           </a:xfrm>
           <a:prstGeom prst="rect">
             <a:avLst/>
@@ -30677,11 +29387,11 @@
             <a:r>
               <a:rPr sz="3400" b="0" i="0">
                 <a:solidFill>
-                  <a:srgbClr val="D4D4D4"/>
-                </a:solidFill>
-                <a:latin typeface="Arial"/>
-              </a:rPr>
-              <a:t>:</a:t>
+                  <a:srgbClr val="FFFFFF"/>
+                </a:solidFill>
+                <a:latin typeface="Arial"/>
+              </a:rPr>
+              <a:t>Upload fixtures/report.pdf, click Run.</a:t>
             </a:r>
           </a:p>
         </p:txBody>
@@ -30694,8 +29404,8 @@
         </p:nvSpPr>
         <p:spPr>
           <a:xfrm>
-            <a:off x="457200" y="2356103"/>
-            <a:ext cx="7633454" cy="518159"/>
+            <a:off x="457200" y="3392421"/>
+            <a:ext cx="4023875" cy="518159"/>
           </a:xfrm>
           <a:prstGeom prst="rect">
             <a:avLst/>
@@ -30712,11 +29422,11 @@
             <a:r>
               <a:rPr sz="3400" b="0" i="0">
                 <a:solidFill>
-                  <a:srgbClr val="D4D4D4"/>
-                </a:solidFill>
-                <a:latin typeface="Arial"/>
-              </a:rPr>
-              <a:t>Open &lt;our public URL&gt;.</a:t>
+                  <a:srgbClr val="FFFFFF"/>
+                </a:solidFill>
+                <a:latin typeface="Arial"/>
+              </a:rPr>
+              <a:t>If the output </a:t>
             </a:r>
           </a:p>
         </p:txBody>
@@ -30729,8 +29439,8 @@
         </p:nvSpPr>
         <p:spPr>
           <a:xfrm>
-            <a:off x="457200" y="2874262"/>
-            <a:ext cx="11318596" cy="518159"/>
+            <a:off x="2857822" y="3392421"/>
+            <a:ext cx="681811" cy="518159"/>
           </a:xfrm>
           <a:prstGeom prst="rect">
             <a:avLst/>
@@ -30747,11 +29457,11 @@
             <a:r>
               <a:rPr sz="3400" b="0" i="0">
                 <a:solidFill>
-                  <a:srgbClr val="D4D4D4"/>
-                </a:solidFill>
-                <a:latin typeface="Arial"/>
-              </a:rPr>
-              <a:t>Upload fixtures/report.pdf, click Run.</a:t>
+                  <a:srgbClr val="569CD6"/>
+                </a:solidFill>
+                <a:latin typeface="Arial"/>
+              </a:rPr>
+              <a:t>is</a:t>
             </a:r>
           </a:p>
         </p:txBody>
@@ -30764,8 +29474,8 @@
         </p:nvSpPr>
         <p:spPr>
           <a:xfrm>
-            <a:off x="457200" y="3392421"/>
-            <a:ext cx="4023875" cy="518159"/>
+            <a:off x="3169655" y="3392421"/>
+            <a:ext cx="2908617" cy="518159"/>
           </a:xfrm>
           <a:prstGeom prst="rect">
             <a:avLst/>
@@ -30782,11 +29492,11 @@
             <a:r>
               <a:rPr sz="3400" b="0" i="0">
                 <a:solidFill>
-                  <a:srgbClr val="D4D4D4"/>
-                </a:solidFill>
-                <a:latin typeface="Arial"/>
-              </a:rPr>
-              <a:t>If the output </a:t>
+                  <a:srgbClr val="FFFFFF"/>
+                </a:solidFill>
+                <a:latin typeface="Arial"/>
+              </a:rPr>
+              <a:t> missing </a:t>
             </a:r>
           </a:p>
         </p:txBody>
@@ -30799,8 +29509,8 @@
         </p:nvSpPr>
         <p:spPr>
           <a:xfrm>
-            <a:off x="2857822" y="3392421"/>
-            <a:ext cx="681811" cy="518159"/>
+            <a:off x="4873241" y="3392421"/>
+            <a:ext cx="797182" cy="518159"/>
           </a:xfrm>
           <a:prstGeom prst="rect">
             <a:avLst/>
@@ -30821,7 +29531,7 @@
                 </a:solidFill>
                 <a:latin typeface="Arial"/>
               </a:rPr>
-              <a:t>is</a:t>
+              <a:t>or</a:t>
             </a:r>
           </a:p>
         </p:txBody>
@@ -30834,8 +29544,8 @@
         </p:nvSpPr>
         <p:spPr>
           <a:xfrm>
-            <a:off x="3169655" y="3392421"/>
-            <a:ext cx="2908617" cy="518159"/>
+            <a:off x="5257180" y="3392421"/>
+            <a:ext cx="2448480" cy="518159"/>
           </a:xfrm>
           <a:prstGeom prst="rect">
             <a:avLst/>
@@ -30852,11 +29562,11 @@
             <a:r>
               <a:rPr sz="3400" b="0" i="0">
                 <a:solidFill>
-                  <a:srgbClr val="D4D4D4"/>
-                </a:solidFill>
-                <a:latin typeface="Arial"/>
-              </a:rPr>
-              <a:t> missing </a:t>
+                  <a:srgbClr val="FFFFFF"/>
+                </a:solidFill>
+                <a:latin typeface="Arial"/>
+              </a:rPr>
+              <a:t> wrong,</a:t>
             </a:r>
           </a:p>
         </p:txBody>
@@ -30869,8 +29579,8 @@
         </p:nvSpPr>
         <p:spPr>
           <a:xfrm>
-            <a:off x="4873241" y="3392421"/>
-            <a:ext cx="797182" cy="518159"/>
+            <a:off x="457200" y="3910580"/>
+            <a:ext cx="2371566" cy="518159"/>
           </a:xfrm>
           <a:prstGeom prst="rect">
             <a:avLst/>
@@ -30887,11 +29597,11 @@
             <a:r>
               <a:rPr sz="3400" b="0" i="0">
                 <a:solidFill>
-                  <a:srgbClr val="569CD6"/>
-                </a:solidFill>
-                <a:latin typeface="Arial"/>
-              </a:rPr>
-              <a:t>or</a:t>
+                  <a:srgbClr val="FFFFFF"/>
+                </a:solidFill>
+                <a:latin typeface="Arial"/>
+              </a:rPr>
+              <a:t>say so </a:t>
             </a:r>
           </a:p>
         </p:txBody>
@@ -30904,8 +29614,8 @@
         </p:nvSpPr>
         <p:spPr>
           <a:xfrm>
-            <a:off x="5257180" y="3392421"/>
-            <a:ext cx="2448480" cy="518159"/>
+            <a:off x="1825129" y="3910580"/>
+            <a:ext cx="720606" cy="518159"/>
           </a:xfrm>
           <a:prstGeom prst="rect">
             <a:avLst/>
@@ -30922,11 +29632,11 @@
             <a:r>
               <a:rPr sz="3400" b="0" i="0">
                 <a:solidFill>
-                  <a:srgbClr val="D4D4D4"/>
-                </a:solidFill>
-                <a:latin typeface="Arial"/>
-              </a:rPr>
-              <a:t> wrong,</a:t>
+                  <a:srgbClr val="569CD6"/>
+                </a:solidFill>
+                <a:latin typeface="Arial"/>
+              </a:rPr>
+              <a:t>in</a:t>
             </a:r>
           </a:p>
         </p:txBody>
@@ -30939,76 +29649,6 @@
         </p:nvSpPr>
         <p:spPr>
           <a:xfrm>
-            <a:off x="457200" y="3910580"/>
-            <a:ext cx="2371566" cy="518159"/>
-          </a:xfrm>
-          <a:prstGeom prst="rect">
-            <a:avLst/>
-          </a:prstGeom>
-          <a:noFill/>
-        </p:spPr>
-        <p:txBody>
-          <a:bodyPr wrap="none" lIns="0" rIns="0">
-            <a:noAutofit/>
-          </a:bodyPr>
-          <a:lstStyle/>
-          <a:p>
-            <a:pPr algn="l"/>
-            <a:r>
-              <a:rPr sz="3400" b="0" i="0">
-                <a:solidFill>
-                  <a:srgbClr val="D4D4D4"/>
-                </a:solidFill>
-                <a:latin typeface="Arial"/>
-              </a:rPr>
-              <a:t>say so </a:t>
-            </a:r>
-          </a:p>
-        </p:txBody>
-      </p:sp>
-      <p:sp>
-        <p:nvSpPr>
-          <p:cNvPr id="17" name="TextBox 16"/>
-          <p:cNvSpPr txBox="1"/>
-          <p:nvPr/>
-        </p:nvSpPr>
-        <p:spPr>
-          <a:xfrm>
-            <a:off x="1825129" y="3910580"/>
-            <a:ext cx="720606" cy="518159"/>
-          </a:xfrm>
-          <a:prstGeom prst="rect">
-            <a:avLst/>
-          </a:prstGeom>
-          <a:noFill/>
-        </p:spPr>
-        <p:txBody>
-          <a:bodyPr wrap="none" lIns="0" rIns="0">
-            <a:noAutofit/>
-          </a:bodyPr>
-          <a:lstStyle/>
-          <a:p>
-            <a:pPr algn="l"/>
-            <a:r>
-              <a:rPr sz="3400" b="0" i="0">
-                <a:solidFill>
-                  <a:srgbClr val="569CD6"/>
-                </a:solidFill>
-                <a:latin typeface="Arial"/>
-              </a:rPr>
-              <a:t>in</a:t>
-            </a:r>
-          </a:p>
-        </p:txBody>
-      </p:sp>
-      <p:sp>
-        <p:nvSpPr>
-          <p:cNvPr id="18" name="TextBox 17"/>
-          <p:cNvSpPr txBox="1"/>
-          <p:nvPr/>
-        </p:nvSpPr>
-        <p:spPr>
-          <a:xfrm>
             <a:off x="2161208" y="3910580"/>
             <a:ext cx="8937961" cy="518159"/>
           </a:xfrm>
@@ -31027,7 +29667,7 @@
             <a:r>
               <a:rPr sz="3400" b="0" i="0">
                 <a:solidFill>
-                  <a:srgbClr val="D4D4D4"/>
+                  <a:srgbClr val="FFFFFF"/>
                 </a:solidFill>
                 <a:latin typeface="Arial"/>
               </a:rPr>
@@ -31038,7 +29678,7 @@
       </p:sp>
       <p:sp>
         <p:nvSpPr>
-          <p:cNvPr id="19" name="TextBox 18"/>
+          <p:cNvPr id="17" name="TextBox 16"/>
           <p:cNvSpPr/>
           <p:nvPr>
             <p:ph type="sldNum" idx="12"/>
@@ -31064,7 +29704,7 @@
             <a:fld id="{4B0E1F8A-6C1D-4E2A-9F3B-7A5C8D2E1F60}" type="slidenum">
               <a:rPr sz="1600" b="0" i="0">
                 <a:solidFill>
-                  <a:srgbClr val="5B6B82"/>
+                  <a:srgbClr val="0A2240"/>
                 </a:solidFill>
                 <a:latin typeface="Arial"/>
               </a:rPr>
@@ -31302,7 +29942,7 @@
             <a:fld id="{4B0E1F8A-6C1D-4E2A-9F3B-7A5C8D2E1F60}" type="slidenum">
               <a:rPr sz="1600" b="0" i="0">
                 <a:solidFill>
-                  <a:srgbClr val="5B6B82"/>
+                  <a:srgbClr val="0A2240"/>
                 </a:solidFill>
                 <a:latin typeface="Arial"/>
               </a:rPr>
@@ -31398,7 +30038,7 @@
             <a:r>
               <a:rPr sz="3400" b="1" i="0">
                 <a:solidFill>
-                  <a:srgbClr val="5B6B82"/>
+                  <a:srgbClr val="0A2240"/>
                 </a:solidFill>
                 <a:latin typeface="Arial"/>
               </a:rPr>
@@ -31415,14 +30055,14 @@
         </p:nvSpPr>
         <p:spPr>
           <a:xfrm>
-            <a:off x="548640" y="2176271"/>
-            <a:ext cx="1650492" cy="54864"/>
+            <a:off x="457200" y="2176271"/>
+            <a:ext cx="1120192" cy="54864"/>
           </a:xfrm>
           <a:prstGeom prst="rect">
             <a:avLst/>
           </a:prstGeom>
           <a:solidFill>
-            <a:srgbClr val="5B6B82"/>
+            <a:srgbClr val="0A2240"/>
           </a:solidFill>
           <a:ln>
             <a:noFill/>
@@ -31494,8 +30134,8 @@
         </p:nvSpPr>
         <p:spPr>
           <a:xfrm>
-            <a:off x="6324600" y="2176271"/>
-            <a:ext cx="1650492" cy="54864"/>
+            <a:off x="6233160" y="2176271"/>
+            <a:ext cx="1391121" cy="54864"/>
           </a:xfrm>
           <a:prstGeom prst="rect">
             <a:avLst/>
@@ -31768,7 +30408,7 @@
             <a:fld id="{4B0E1F8A-6C1D-4E2A-9F3B-7A5C8D2E1F60}" type="slidenum">
               <a:rPr sz="1600" b="0" i="0">
                 <a:solidFill>
-                  <a:srgbClr val="5B6B82"/>
+                  <a:srgbClr val="0A2240"/>
                 </a:solidFill>
                 <a:latin typeface="Arial"/>
               </a:rPr>
@@ -32006,7 +30646,7 @@
             <a:fld id="{4B0E1F8A-6C1D-4E2A-9F3B-7A5C8D2E1F60}" type="slidenum">
               <a:rPr sz="1600" b="0" i="0">
                 <a:solidFill>
-                  <a:srgbClr val="5B6B82"/>
+                  <a:srgbClr val="0A2240"/>
                 </a:solidFill>
                 <a:latin typeface="Arial"/>
               </a:rPr>
@@ -32314,7 +30954,7 @@
             <a:fld id="{4B0E1F8A-6C1D-4E2A-9F3B-7A5C8D2E1F60}" type="slidenum">
               <a:rPr sz="1600" b="0" i="0">
                 <a:solidFill>
-                  <a:srgbClr val="5B6B82"/>
+                  <a:srgbClr val="0A2240"/>
                 </a:solidFill>
                 <a:latin typeface="Arial"/>
               </a:rPr>
@@ -32552,7 +31192,7 @@
             <a:fld id="{4B0E1F8A-6C1D-4E2A-9F3B-7A5C8D2E1F60}" type="slidenum">
               <a:rPr sz="1600" b="0" i="0">
                 <a:solidFill>
-                  <a:srgbClr val="5B6B82"/>
+                  <a:srgbClr val="0A2240"/>
                 </a:solidFill>
                 <a:latin typeface="Arial"/>
               </a:rPr>
@@ -32639,7 +31279,7 @@
             </a:avLst>
           </a:prstGeom>
           <a:solidFill>
-            <a:srgbClr val="0C1A1C"/>
+            <a:srgbClr val="0A2240"/>
           </a:solidFill>
           <a:ln>
             <a:noFill/>
@@ -32694,7 +31334,7 @@
             <a:r>
               <a:rPr sz="2400" b="1" i="0">
                 <a:solidFill>
-                  <a:srgbClr val="569CD6"/>
+                  <a:srgbClr val="0072CE"/>
                 </a:solidFill>
                 <a:latin typeface="Courier New"/>
               </a:rPr>
@@ -32729,7 +31369,7 @@
             <a:r>
               <a:rPr sz="2400" b="0" i="0">
                 <a:solidFill>
-                  <a:srgbClr val="55707A"/>
+                  <a:srgbClr val="0072CE"/>
                 </a:solidFill>
                 <a:latin typeface="Courier New"/>
               </a:rPr>
@@ -32764,7 +31404,7 @@
             <a:r>
               <a:rPr sz="2400" b="1" i="0">
                 <a:solidFill>
-                  <a:srgbClr val="569CD6"/>
+                  <a:srgbClr val="0072CE"/>
                 </a:solidFill>
                 <a:latin typeface="Courier New"/>
               </a:rPr>
@@ -32799,7 +31439,7 @@
             <a:r>
               <a:rPr sz="2400" b="0" i="0">
                 <a:solidFill>
-                  <a:srgbClr val="55707A"/>
+                  <a:srgbClr val="0072CE"/>
                 </a:solidFill>
                 <a:latin typeface="Courier New"/>
               </a:rPr>
@@ -32834,7 +31474,7 @@
             <a:r>
               <a:rPr sz="2400" b="0" i="0">
                 <a:solidFill>
-                  <a:srgbClr val="D4D4D4"/>
+                  <a:srgbClr val="FFFFFF"/>
                 </a:solidFill>
                 <a:latin typeface="Courier New"/>
               </a:rPr>
@@ -32869,7 +31509,7 @@
             <a:r>
               <a:rPr sz="2400" b="0" i="0">
                 <a:solidFill>
-                  <a:srgbClr val="55707A"/>
+                  <a:srgbClr val="0072CE"/>
                 </a:solidFill>
                 <a:latin typeface="Courier New"/>
               </a:rPr>
@@ -32904,7 +31544,7 @@
             <a:r>
               <a:rPr sz="2400" b="1" i="0">
                 <a:solidFill>
-                  <a:srgbClr val="569CD6"/>
+                  <a:srgbClr val="0072CE"/>
                 </a:solidFill>
                 <a:latin typeface="Courier New"/>
               </a:rPr>
@@ -32939,7 +31579,7 @@
             <a:r>
               <a:rPr sz="2400" b="0" i="0">
                 <a:solidFill>
-                  <a:srgbClr val="55707A"/>
+                  <a:srgbClr val="0072CE"/>
                 </a:solidFill>
                 <a:latin typeface="Courier New"/>
               </a:rPr>
@@ -32974,7 +31614,7 @@
             <a:r>
               <a:rPr sz="2400" b="1" i="0">
                 <a:solidFill>
-                  <a:srgbClr val="569CD6"/>
+                  <a:srgbClr val="0072CE"/>
                 </a:solidFill>
                 <a:latin typeface="Courier New"/>
               </a:rPr>
@@ -33009,7 +31649,7 @@
             <a:r>
               <a:rPr sz="2400" b="0" i="0">
                 <a:solidFill>
-                  <a:srgbClr val="55707A"/>
+                  <a:srgbClr val="0072CE"/>
                 </a:solidFill>
                 <a:latin typeface="Courier New"/>
               </a:rPr>
@@ -33044,7 +31684,7 @@
             <a:r>
               <a:rPr sz="2400" b="1" i="0">
                 <a:solidFill>
-                  <a:srgbClr val="569CD6"/>
+                  <a:srgbClr val="0072CE"/>
                 </a:solidFill>
                 <a:latin typeface="Courier New"/>
               </a:rPr>
@@ -33079,7 +31719,7 @@
             <a:r>
               <a:rPr sz="2400" b="0" i="0">
                 <a:solidFill>
-                  <a:srgbClr val="55707A"/>
+                  <a:srgbClr val="0072CE"/>
                 </a:solidFill>
                 <a:latin typeface="Courier New"/>
               </a:rPr>
@@ -33114,7 +31754,7 @@
             <a:r>
               <a:rPr sz="2400" b="0" i="0">
                 <a:solidFill>
-                  <a:srgbClr val="D4D4D4"/>
+                  <a:srgbClr val="FFFFFF"/>
                 </a:solidFill>
                 <a:latin typeface="Courier New"/>
               </a:rPr>
@@ -33149,7 +31789,7 @@
             <a:r>
               <a:rPr sz="2400" b="0" i="0">
                 <a:solidFill>
-                  <a:srgbClr val="55707A"/>
+                  <a:srgbClr val="0072CE"/>
                 </a:solidFill>
                 <a:latin typeface="Courier New"/>
               </a:rPr>
@@ -33184,7 +31824,7 @@
             <a:r>
               <a:rPr sz="2400" b="0" i="0">
                 <a:solidFill>
-                  <a:srgbClr val="D4D4D4"/>
+                  <a:srgbClr val="FFFFFF"/>
                 </a:solidFill>
                 <a:latin typeface="Courier New"/>
               </a:rPr>
@@ -33219,7 +31859,7 @@
             <a:r>
               <a:rPr sz="2400" b="0" i="0">
                 <a:solidFill>
-                  <a:srgbClr val="55707A"/>
+                  <a:srgbClr val="0072CE"/>
                 </a:solidFill>
                 <a:latin typeface="Courier New"/>
               </a:rPr>
@@ -33254,7 +31894,7 @@
             <a:r>
               <a:rPr sz="2400" b="0" i="0">
                 <a:solidFill>
-                  <a:srgbClr val="D4D4D4"/>
+                  <a:srgbClr val="FFFFFF"/>
                 </a:solidFill>
                 <a:latin typeface="Courier New"/>
               </a:rPr>
@@ -33289,7 +31929,7 @@
             <a:r>
               <a:rPr sz="2400" b="0" i="0">
                 <a:solidFill>
-                  <a:srgbClr val="55707A"/>
+                  <a:srgbClr val="0072CE"/>
                 </a:solidFill>
                 <a:latin typeface="Courier New"/>
               </a:rPr>
@@ -33324,7 +31964,7 @@
             <a:r>
               <a:rPr sz="2400" b="0" i="0">
                 <a:solidFill>
-                  <a:srgbClr val="D4D4D4"/>
+                  <a:srgbClr val="FFFFFF"/>
                 </a:solidFill>
                 <a:latin typeface="Courier New"/>
               </a:rPr>
@@ -33359,7 +31999,7 @@
             <a:r>
               <a:rPr sz="2400" b="0" i="0">
                 <a:solidFill>
-                  <a:srgbClr val="55707A"/>
+                  <a:srgbClr val="0072CE"/>
                 </a:solidFill>
                 <a:latin typeface="Courier New"/>
               </a:rPr>
@@ -33394,7 +32034,7 @@
             <a:r>
               <a:rPr sz="2400" b="0" i="0">
                 <a:solidFill>
-                  <a:srgbClr val="D4D4D4"/>
+                  <a:srgbClr val="FFFFFF"/>
                 </a:solidFill>
                 <a:latin typeface="Courier New"/>
               </a:rPr>
@@ -33429,7 +32069,7 @@
             <a:r>
               <a:rPr sz="2400" b="0" i="0">
                 <a:solidFill>
-                  <a:srgbClr val="55707A"/>
+                  <a:srgbClr val="0072CE"/>
                 </a:solidFill>
                 <a:latin typeface="Courier New"/>
               </a:rPr>
@@ -33464,7 +32104,7 @@
             <a:r>
               <a:rPr sz="2400" b="0" i="0">
                 <a:solidFill>
-                  <a:srgbClr val="D4D4D4"/>
+                  <a:srgbClr val="FFFFFF"/>
                 </a:solidFill>
                 <a:latin typeface="Courier New"/>
               </a:rPr>
@@ -33501,7 +32141,7 @@
             <a:fld id="{4B0E1F8A-6C1D-4E2A-9F3B-7A5C8D2E1F60}" type="slidenum">
               <a:rPr sz="1600" b="0" i="0">
                 <a:solidFill>
-                  <a:srgbClr val="5B6B82"/>
+                  <a:srgbClr val="0A2240"/>
                 </a:solidFill>
                 <a:latin typeface="Arial"/>
               </a:rPr>
@@ -33597,7 +32237,7 @@
             <a:r>
               <a:rPr sz="3400" b="1" i="0">
                 <a:solidFill>
-                  <a:srgbClr val="123A6B"/>
+                  <a:srgbClr val="0072CE"/>
                 </a:solidFill>
                 <a:latin typeface="Arial"/>
               </a:rPr>
@@ -33632,7 +32272,7 @@
             <a:r>
               <a:rPr sz="3400" b="1" i="0">
                 <a:solidFill>
-                  <a:srgbClr val="123A6B"/>
+                  <a:srgbClr val="0072CE"/>
                 </a:solidFill>
                 <a:latin typeface="Arial"/>
               </a:rPr>
@@ -33993,7 +32633,7 @@
             <a:fld id="{4B0E1F8A-6C1D-4E2A-9F3B-7A5C8D2E1F60}" type="slidenum">
               <a:rPr sz="1600" b="0" i="0">
                 <a:solidFill>
-                  <a:srgbClr val="5B6B82"/>
+                  <a:srgbClr val="0A2240"/>
                 </a:solidFill>
                 <a:latin typeface="Arial"/>
               </a:rPr>
@@ -34089,7 +32729,7 @@
             <a:r>
               <a:rPr sz="4200" b="1" i="0">
                 <a:solidFill>
-                  <a:srgbClr val="123A6B"/>
+                  <a:srgbClr val="0072CE"/>
                 </a:solidFill>
                 <a:latin typeface="Arial"/>
               </a:rPr>
@@ -34124,7 +32764,7 @@
             <a:r>
               <a:rPr sz="4200" b="1" i="0">
                 <a:solidFill>
-                  <a:srgbClr val="123A6B"/>
+                  <a:srgbClr val="0072CE"/>
                 </a:solidFill>
                 <a:latin typeface="Arial"/>
               </a:rPr>
@@ -34194,7 +32834,7 @@
             <a:r>
               <a:rPr sz="4200" b="1" i="0">
                 <a:solidFill>
-                  <a:srgbClr val="123A6B"/>
+                  <a:srgbClr val="0072CE"/>
                 </a:solidFill>
                 <a:latin typeface="Arial"/>
               </a:rPr>
@@ -34229,7 +32869,7 @@
             <a:r>
               <a:rPr sz="4200" b="1" i="0">
                 <a:solidFill>
-                  <a:srgbClr val="123A6B"/>
+                  <a:srgbClr val="0072CE"/>
                 </a:solidFill>
                 <a:latin typeface="Arial"/>
               </a:rPr>
@@ -34299,7 +32939,7 @@
             <a:r>
               <a:rPr sz="4200" b="1" i="0">
                 <a:solidFill>
-                  <a:srgbClr val="123A6B"/>
+                  <a:srgbClr val="0072CE"/>
                 </a:solidFill>
                 <a:latin typeface="Arial"/>
               </a:rPr>
@@ -34334,7 +32974,7 @@
             <a:r>
               <a:rPr sz="4200" b="1" i="0">
                 <a:solidFill>
-                  <a:srgbClr val="123A6B"/>
+                  <a:srgbClr val="0072CE"/>
                 </a:solidFill>
                 <a:latin typeface="Arial"/>
               </a:rPr>
@@ -34406,7 +33046,7 @@
             <a:fld id="{4B0E1F8A-6C1D-4E2A-9F3B-7A5C8D2E1F60}" type="slidenum">
               <a:rPr sz="1600" b="0" i="0">
                 <a:solidFill>
-                  <a:srgbClr val="5B6B82"/>
+                  <a:srgbClr val="0A2240"/>
                 </a:solidFill>
                 <a:latin typeface="Arial"/>
               </a:rPr>
@@ -34644,7 +33284,7 @@
             <a:fld id="{4B0E1F8A-6C1D-4E2A-9F3B-7A5C8D2E1F60}" type="slidenum">
               <a:rPr sz="1600" b="0" i="0">
                 <a:solidFill>
-                  <a:srgbClr val="5B6B82"/>
+                  <a:srgbClr val="0A2240"/>
                 </a:solidFill>
                 <a:latin typeface="Arial"/>
               </a:rPr>
@@ -34880,7 +33520,7 @@
             <a:r>
               <a:rPr sz="4200" b="1" i="0">
                 <a:solidFill>
-                  <a:srgbClr val="5B6B82"/>
+                  <a:srgbClr val="0A2240"/>
                 </a:solidFill>
                 <a:latin typeface="Arial"/>
               </a:rPr>
@@ -34917,7 +33557,7 @@
             <a:fld id="{4B0E1F8A-6C1D-4E2A-9F3B-7A5C8D2E1F60}" type="slidenum">
               <a:rPr sz="1600" b="0" i="0">
                 <a:solidFill>
-                  <a:srgbClr val="5B6B82"/>
+                  <a:srgbClr val="0A2240"/>
                 </a:solidFill>
                 <a:latin typeface="Arial"/>
               </a:rPr>
@@ -35013,7 +33653,7 @@
             <a:r>
               <a:rPr sz="3400" b="1" i="0">
                 <a:solidFill>
-                  <a:srgbClr val="123A6B"/>
+                  <a:srgbClr val="0072CE"/>
                 </a:solidFill>
                 <a:latin typeface="Arial"/>
               </a:rPr>
@@ -35048,7 +33688,7 @@
             <a:r>
               <a:rPr sz="3400" b="1" i="0">
                 <a:solidFill>
-                  <a:srgbClr val="123A6B"/>
+                  <a:srgbClr val="0072CE"/>
                 </a:solidFill>
                 <a:latin typeface="Arial"/>
               </a:rPr>
@@ -35409,7 +34049,7 @@
             <a:fld id="{4B0E1F8A-6C1D-4E2A-9F3B-7A5C8D2E1F60}" type="slidenum">
               <a:rPr sz="1600" b="0" i="0">
                 <a:solidFill>
-                  <a:srgbClr val="5B6B82"/>
+                  <a:srgbClr val="0A2240"/>
                 </a:solidFill>
                 <a:latin typeface="Arial"/>
               </a:rPr>
@@ -35647,153 +34287,11 @@
             <a:fld id="{4B0E1F8A-6C1D-4E2A-9F3B-7A5C8D2E1F60}" type="slidenum">
               <a:rPr sz="1600" b="0" i="0">
                 <a:solidFill>
-                  <a:srgbClr val="5B6B82"/>
+                  <a:srgbClr val="0A2240"/>
                 </a:solidFill>
                 <a:latin typeface="Arial"/>
               </a:rPr>
               <a:t>51</a:t>
-            </a:fld>
-          </a:p>
-        </p:txBody>
-      </p:sp>
-    </p:spTree>
-  </p:cSld>
-  <p:clrMapOvr>
-    <a:masterClrMapping/>
-  </p:clrMapOvr>
-</p:sld>
-</file>
-
-<file path=ppt/slides/slide52.xml><?xml version="1.0" encoding="utf-8"?>
-<p:sld xmlns:a="http://schemas.openxmlformats.org/drawingml/2006/main" xmlns:p="http://schemas.openxmlformats.org/presentationml/2006/main" xmlns:r="http://schemas.openxmlformats.org/officeDocument/2006/relationships" showMasterSp="0">
-  <p:cSld>
-    <p:bg>
-      <p:bgPr>
-        <a:solidFill>
-          <a:srgbClr val="FFFFFF"/>
-        </a:solidFill>
-        <a:effectLst/>
-      </p:bgPr>
-    </p:bg>
-    <p:spTree>
-      <p:nvGrpSpPr>
-        <p:cNvPr id="1" name=""/>
-        <p:cNvGrpSpPr/>
-        <p:nvPr/>
-      </p:nvGrpSpPr>
-      <p:grpSpPr/>
-      <p:sp>
-        <p:nvSpPr>
-          <p:cNvPr id="2" name="Rectangle 1"/>
-          <p:cNvSpPr/>
-          <p:nvPr/>
-        </p:nvSpPr>
-        <p:spPr>
-          <a:xfrm>
-            <a:off x="457200" y="2926080"/>
-            <a:ext cx="128016" cy="1005840"/>
-          </a:xfrm>
-          <a:prstGeom prst="rect">
-            <a:avLst/>
-          </a:prstGeom>
-          <a:solidFill>
-            <a:srgbClr val="0072CE"/>
-          </a:solidFill>
-          <a:ln>
-            <a:noFill/>
-          </a:ln>
-          <a:effectLst/>
-        </p:spPr>
-        <p:style>
-          <a:lnRef idx="1">
-            <a:schemeClr val="accent1"/>
-          </a:lnRef>
-          <a:fillRef idx="3">
-            <a:schemeClr val="accent1"/>
-          </a:fillRef>
-          <a:effectRef idx="2">
-            <a:schemeClr val="accent1"/>
-          </a:effectRef>
-          <a:fontRef idx="minor">
-            <a:schemeClr val="lt1"/>
-          </a:fontRef>
-        </p:style>
-        <p:txBody>
-          <a:bodyPr rtlCol="0" anchor="ctr"/>
-          <a:lstStyle/>
-          <a:p>
-            <a:pPr algn="ctr"/>
-          </a:p>
-        </p:txBody>
-      </p:sp>
-      <p:sp>
-        <p:nvSpPr>
-          <p:cNvPr id="3" name="TextBox 2"/>
-          <p:cNvSpPr txBox="1"/>
-          <p:nvPr/>
-        </p:nvSpPr>
-        <p:spPr>
-          <a:xfrm>
-            <a:off x="996696" y="2926080"/>
-            <a:ext cx="11195304" cy="1005840"/>
-          </a:xfrm>
-          <a:prstGeom prst="rect">
-            <a:avLst/>
-          </a:prstGeom>
-          <a:noFill/>
-        </p:spPr>
-        <p:txBody>
-          <a:bodyPr wrap="none" lIns="0" rIns="0">
-            <a:noAutofit/>
-          </a:bodyPr>
-          <a:lstStyle/>
-          <a:p>
-            <a:pPr algn="l"/>
-            <a:r>
-              <a:rPr sz="6000" b="1" i="0">
-                <a:solidFill>
-                  <a:srgbClr val="0A2240"/>
-                </a:solidFill>
-                <a:latin typeface="Arial"/>
-              </a:rPr>
-              <a:t>What would you build next?</a:t>
-            </a:r>
-          </a:p>
-        </p:txBody>
-      </p:sp>
-      <p:sp>
-        <p:nvSpPr>
-          <p:cNvPr id="4" name="TextBox 3"/>
-          <p:cNvSpPr/>
-          <p:nvPr>
-            <p:ph type="sldNum" idx="12"/>
-          </p:nvPr>
-        </p:nvSpPr>
-        <p:spPr>
-          <a:xfrm>
-            <a:off x="11186160" y="6035040"/>
-            <a:ext cx="548640" cy="365760"/>
-          </a:xfrm>
-          <a:prstGeom prst="rect">
-            <a:avLst/>
-          </a:prstGeom>
-          <a:noFill/>
-        </p:spPr>
-        <p:txBody>
-          <a:bodyPr wrap="none" lIns="0" rIns="0">
-            <a:noAutofit/>
-          </a:bodyPr>
-          <a:lstStyle/>
-          <a:p>
-            <a:pPr algn="r"/>
-            <a:fld id="{4B0E1F8A-6C1D-4E2A-9F3B-7A5C8D2E1F60}" type="slidenum">
-              <a:rPr sz="1600" b="0" i="0">
-                <a:solidFill>
-                  <a:srgbClr val="5B6B82"/>
-                </a:solidFill>
-                <a:latin typeface="Arial"/>
-              </a:rPr>
-              <a:t>52</a:t>
             </a:fld>
           </a:p>
         </p:txBody>
@@ -35885,7 +34383,7 @@
             <a:r>
               <a:rPr sz="4200" b="1" i="0">
                 <a:solidFill>
-                  <a:srgbClr val="123A6B"/>
+                  <a:srgbClr val="0072CE"/>
                 </a:solidFill>
                 <a:latin typeface="Arial"/>
               </a:rPr>
@@ -35903,13 +34401,13 @@
         <p:spPr>
           <a:xfrm>
             <a:off x="457200" y="2194560"/>
-            <a:ext cx="784098" cy="54864"/>
+            <a:ext cx="593303" cy="54864"/>
           </a:xfrm>
           <a:prstGeom prst="rect">
             <a:avLst/>
           </a:prstGeom>
           <a:solidFill>
-            <a:srgbClr val="123A6B"/>
+            <a:srgbClr val="0072CE"/>
           </a:solidFill>
           <a:ln>
             <a:noFill/>
@@ -35964,7 +34462,7 @@
             <a:r>
               <a:rPr sz="3400" b="1" i="0">
                 <a:solidFill>
-                  <a:srgbClr val="123A6B"/>
+                  <a:srgbClr val="0072CE"/>
                 </a:solidFill>
                 <a:latin typeface="Arial"/>
               </a:rPr>
@@ -36034,7 +34532,7 @@
             <a:r>
               <a:rPr sz="4200" b="1" i="0">
                 <a:solidFill>
-                  <a:srgbClr val="123A6B"/>
+                  <a:srgbClr val="0072CE"/>
                 </a:solidFill>
                 <a:latin typeface="Arial"/>
               </a:rPr>
@@ -36052,13 +34550,13 @@
         <p:spPr>
           <a:xfrm>
             <a:off x="3345180" y="2194560"/>
-            <a:ext cx="784098" cy="54864"/>
+            <a:ext cx="593303" cy="54864"/>
           </a:xfrm>
           <a:prstGeom prst="rect">
             <a:avLst/>
           </a:prstGeom>
           <a:solidFill>
-            <a:srgbClr val="123A6B"/>
+            <a:srgbClr val="0072CE"/>
           </a:solidFill>
           <a:ln>
             <a:noFill/>
@@ -36113,7 +34611,7 @@
             <a:r>
               <a:rPr sz="3400" b="1" i="0">
                 <a:solidFill>
-                  <a:srgbClr val="123A6B"/>
+                  <a:srgbClr val="0072CE"/>
                 </a:solidFill>
                 <a:latin typeface="Arial"/>
               </a:rPr>
@@ -36183,7 +34681,7 @@
             <a:r>
               <a:rPr sz="4200" b="1" i="0">
                 <a:solidFill>
-                  <a:srgbClr val="123A6B"/>
+                  <a:srgbClr val="0072CE"/>
                 </a:solidFill>
                 <a:latin typeface="Arial"/>
               </a:rPr>
@@ -36201,13 +34699,13 @@
         <p:spPr>
           <a:xfrm>
             <a:off x="6233160" y="2194560"/>
-            <a:ext cx="784098" cy="54864"/>
+            <a:ext cx="593303" cy="54864"/>
           </a:xfrm>
           <a:prstGeom prst="rect">
             <a:avLst/>
           </a:prstGeom>
           <a:solidFill>
-            <a:srgbClr val="123A6B"/>
+            <a:srgbClr val="0072CE"/>
           </a:solidFill>
           <a:ln>
             <a:noFill/>
@@ -36262,7 +34760,7 @@
             <a:r>
               <a:rPr sz="3400" b="1" i="0">
                 <a:solidFill>
-                  <a:srgbClr val="123A6B"/>
+                  <a:srgbClr val="0072CE"/>
                 </a:solidFill>
                 <a:latin typeface="Arial"/>
               </a:rPr>
@@ -36332,7 +34830,7 @@
             <a:r>
               <a:rPr sz="4200" b="1" i="0">
                 <a:solidFill>
-                  <a:srgbClr val="123A6B"/>
+                  <a:srgbClr val="0072CE"/>
                 </a:solidFill>
                 <a:latin typeface="Arial"/>
               </a:rPr>
@@ -36350,13 +34848,13 @@
         <p:spPr>
           <a:xfrm>
             <a:off x="9121140" y="2194560"/>
-            <a:ext cx="784098" cy="54864"/>
+            <a:ext cx="593303" cy="54864"/>
           </a:xfrm>
           <a:prstGeom prst="rect">
             <a:avLst/>
           </a:prstGeom>
           <a:solidFill>
-            <a:srgbClr val="123A6B"/>
+            <a:srgbClr val="0072CE"/>
           </a:solidFill>
           <a:ln>
             <a:noFill/>
@@ -36411,7 +34909,7 @@
             <a:r>
               <a:rPr sz="3400" b="1" i="0">
                 <a:solidFill>
-                  <a:srgbClr val="123A6B"/>
+                  <a:srgbClr val="0072CE"/>
                 </a:solidFill>
                 <a:latin typeface="Arial"/>
               </a:rPr>
@@ -36483,7 +34981,7 @@
             <a:fld id="{4B0E1F8A-6C1D-4E2A-9F3B-7A5C8D2E1F60}" type="slidenum">
               <a:rPr sz="1600" b="0" i="0">
                 <a:solidFill>
-                  <a:srgbClr val="5B6B82"/>
+                  <a:srgbClr val="0A2240"/>
                 </a:solidFill>
                 <a:latin typeface="Arial"/>
               </a:rPr>
@@ -37001,7 +35499,7 @@
             <a:fld id="{4B0E1F8A-6C1D-4E2A-9F3B-7A5C8D2E1F60}" type="slidenum">
               <a:rPr sz="1600" b="0" i="0">
                 <a:solidFill>
-                  <a:srgbClr val="5B6B82"/>
+                  <a:srgbClr val="0A2240"/>
                 </a:solidFill>
                 <a:latin typeface="Arial"/>
               </a:rPr>
@@ -37141,7 +35639,7 @@
             <a:r>
               <a:rPr sz="3400" b="0" i="0">
                 <a:solidFill>
-                  <a:srgbClr val="5B6B82"/>
+                  <a:srgbClr val="0A2240"/>
                 </a:solidFill>
                 <a:latin typeface="Arial"/>
               </a:rPr>
@@ -37178,7 +35676,7 @@
             <a:fld id="{4B0E1F8A-6C1D-4E2A-9F3B-7A5C8D2E1F60}" type="slidenum">
               <a:rPr sz="1600" b="0" i="0">
                 <a:solidFill>
-                  <a:srgbClr val="5B6B82"/>
+                  <a:srgbClr val="0A2240"/>
                 </a:solidFill>
                 <a:latin typeface="Arial"/>
               </a:rPr>
@@ -37355,7 +35853,7 @@
             <a:fld id="{4B0E1F8A-6C1D-4E2A-9F3B-7A5C8D2E1F60}" type="slidenum">
               <a:rPr sz="1600" b="0" i="0">
                 <a:solidFill>
-                  <a:srgbClr val="5B6B82"/>
+                  <a:srgbClr val="0A2240"/>
                 </a:solidFill>
                 <a:latin typeface="Arial"/>
               </a:rPr>
